--- a/docs/helix/06-iterate/deliverables/assets/DEL-001-helix-evaluation-deck.pptx
+++ b/docs/helix/06-iterate/deliverables/assets/DEL-001-helix-evaluation-deck.pptx
@@ -11107,7 +11107,7 @@
                 <a:ea typeface="Arial" pitchFamily="34" charset="-122"/>
                 <a:cs typeface="Arial" pitchFamily="34" charset="-120"/>
               </a:rPr>
-              <a:t>Each new conversation re-improvises the workflow, so reviews that should happen do not</a:t>
+              <a:t>Each new conversation re-improvises the workflow, so reviews get skipped</a:t>
             </a:r>
             <a:endParaRPr lang="en-US" sz="1800" dirty="0"/>
           </a:p>
@@ -11540,7 +11540,7 @@
                 <a:ea typeface="Arial" pitchFamily="34" charset="-122"/>
                 <a:cs typeface="Arial" pitchFamily="34" charset="-120"/>
               </a:rPr>
-              <a:t>Lost context</a:t>
+              <a:t>Cold start</a:t>
             </a:r>
             <a:endParaRPr lang="en-US" sz="1600" dirty="0"/>
           </a:p>

--- a/docs/helix/06-iterate/deliverables/assets/DEL-001-helix-evaluation-deck.pptx
+++ b/docs/helix/06-iterate/deliverables/assets/DEL-001-helix-evaluation-deck.pptx
@@ -692,7 +692,7 @@
           <a:p>
             <a:r>
               <a:rPr lang="en-US" dirty="0"/>
-              <a:t>Stop after the ask. The bar is a target the product sets for itself, not a result; say so. If asked about cost, the trial needs one champion and no new tooling.</a:t>
+              <a:t>Stop after the ask. The measure is accepted findings per check and their avoided review cost; more catches in a first quarter is the evidence of value. The product's own bar, under 3 findings per check, is a target for a settled corpus and comes later. If asked about cost, the trial needs one champion and no new tooling. Owners are roles; let the room put names on them.</a:t>
             </a:r>
             <a:endParaRPr lang="en-US" dirty="0"/>
           </a:p>
@@ -1132,7 +1132,7 @@
           <a:p>
             <a:r>
               <a:rPr lang="en-US" dirty="0"/>
-              <a:t>Name the change; do not argue it. This audience lives it. The missing third milestone is the deck.</a:t>
+              <a:t>Name the change; do not argue it. This audience lives it. The vision's words are "AI-touched code daily", and that is the claim; the hollow third milestone is what the deck offers.</a:t>
             </a:r>
             <a:endParaRPr lang="en-US" dirty="0"/>
           </a:p>
@@ -1308,7 +1308,7 @@
           <a:p>
             <a:r>
               <a:rPr lang="en-US" dirty="0"/>
-              <a:t>HELIX is a method you adopt, not a platform you join. Each template carries an authoring prompt and quality criteria, and the templates rank: vision governs requirements, requirements govern designs, designs govern tests and code. Every one of the 53 is optional; teams adopt one type at a time. Name the seven activities around the ring; the table of what each produces is in the appendix source.</a:t>
+              <a:t>Name the seven activities around the ring and say the templates rank: vision governs requirements, requirements govern designs, designs govern tests and code. The table of what each activity produces is in the appendix source.</a:t>
             </a:r>
             <a:endParaRPr lang="en-US" dirty="0"/>
           </a:p>
@@ -1748,7 +1748,7 @@
           <a:p>
             <a:r>
               <a:rPr lang="en-US" dirty="0"/>
-              <a:t>This is the worked example in the product vision, not a customer result. Five affected documents: three feature specs and two designs, plus the conflicting decision and the missing stories. The order matters: the plan starts with the security architecture revision, then the specs, then the stories. The bar the product sets for itself, under 3 findings per check on a healthy project, is a target and belongs to the ask.</a:t>
+              <a:t>Say plainly that this is the worked example in the product vision, not a customer result; the trial in the ask is how the room gets its own number. Six documents: three feature specs, two solution designs, and the security architecture; the decision, the stories, and the test plan are on top. The order matters: the plan starts with the security architecture revision, then the specs, then the stories. The bar the product sets for itself, under 3 findings per check on a healthy project, is a target for a settled corpus, not for a first quarter.</a:t>
             </a:r>
             <a:endParaRPr lang="en-US" dirty="0"/>
           </a:p>
@@ -2379,9 +2379,9 @@
                 <a:solidFill>
                   <a:srgbClr val="FFFFFF"/>
                 </a:solidFill>
-                <a:latin typeface="Georgia" pitchFamily="34" charset="0"/>
-                <a:ea typeface="Georgia" pitchFamily="34" charset="-122"/>
-                <a:cs typeface="Georgia" pitchFamily="34" charset="-120"/>
+                <a:latin typeface="Arial" pitchFamily="34" charset="0"/>
+                <a:ea typeface="Arial" pitchFamily="34" charset="-122"/>
+                <a:cs typeface="Arial" pitchFamily="34" charset="-120"/>
               </a:rPr>
               <a:t>10</a:t>
             </a:r>
@@ -2424,7 +2424,24 @@
                 <a:ea typeface="Georgia" pitchFamily="34" charset="-122"/>
                 <a:cs typeface="Georgia" pitchFamily="34" charset="-120"/>
               </a:rPr>
-              <a:t>People decide and agents draft at every gate</a:t>
+              <a:t>People decide and agents</a:t>
+            </a:r>
+            <a:endParaRPr lang="en-US" sz="3600" dirty="0"/>
+          </a:p>
+          <a:p>
+            <a:pPr algn="l" indent="0" marL="0">
+              <a:buNone/>
+            </a:pPr>
+            <a:r>
+              <a:rPr lang="en-US" sz="3600" b="1" dirty="0">
+                <a:solidFill>
+                  <a:srgbClr val="1F2933"/>
+                </a:solidFill>
+                <a:latin typeface="Georgia" pitchFamily="34" charset="0"/>
+                <a:ea typeface="Georgia" pitchFamily="34" charset="-122"/>
+                <a:cs typeface="Georgia" pitchFamily="34" charset="-120"/>
+              </a:rPr>
+              <a:t>draft at every gate</a:t>
             </a:r>
             <a:endParaRPr lang="en-US" sz="3600" dirty="0"/>
           </a:p>
@@ -2650,48 +2667,33 @@
           </a:ln>
         </p:spPr>
       </p:sp>
-      <p:sp>
-        <p:nvSpPr>
-          <p:cNvPr id="13" name="Text 9"/>
-          <p:cNvSpPr txBox="1"/>
-          <p:nvPr/>
-        </p:nvSpPr>
-        <p:spPr>
-          <a:xfrm>
-            <a:off x="822960" y="2743200"/>
-            <a:ext cx="292608" cy="292608"/>
-          </a:xfrm>
-          <a:prstGeom prst="rect">
-            <a:avLst/>
-          </a:prstGeom>
-          <a:noFill/>
-          <a:ln/>
-        </p:spPr>
-        <p:txBody>
-          <a:bodyPr wrap="square" lIns="0" tIns="0" rIns="0" bIns="0" rtlCol="0" anchor="ctr"/>
-          <a:lstStyle/>
-          <a:p>
-            <a:pPr algn="ctr" indent="0" marL="0">
-              <a:buNone/>
-            </a:pPr>
-            <a:r>
-              <a:rPr lang="en-US" sz="1200" b="1" dirty="0">
-                <a:solidFill>
-                  <a:srgbClr val="FFFFFF"/>
-                </a:solidFill>
-                <a:latin typeface="Georgia" pitchFamily="34" charset="0"/>
-                <a:ea typeface="Georgia" pitchFamily="34" charset="-122"/>
-                <a:cs typeface="Georgia" pitchFamily="34" charset="-120"/>
-              </a:rPr>
-              <a:t>✓</a:t>
-            </a:r>
-            <a:endParaRPr lang="en-US" sz="1200" dirty="0"/>
-          </a:p>
-        </p:txBody>
-      </p:sp>
-      <p:sp>
-        <p:nvSpPr>
-          <p:cNvPr id="14" name="Text 10"/>
+      <p:pic>
+        <p:nvPicPr>
+          <p:cNvPr id="13" name="Image 1" descr="preencoded.png">    </p:cNvPr>
+          <p:cNvPicPr>
+            <a:picLocks noChangeAspect="1"/>
+          </p:cNvPicPr>
+          <p:nvPr/>
+        </p:nvPicPr>
+        <p:blipFill>
+          <a:blip r:embed="rId2"/>
+          <a:stretch>
+            <a:fillRect/>
+          </a:stretch>
+        </p:blipFill>
+        <p:spPr>
+          <a:xfrm>
+            <a:off x="881482" y="2801722"/>
+            <a:ext cx="175565" cy="175565"/>
+          </a:xfrm>
+          <a:prstGeom prst="rect">
+            <a:avLst/>
+          </a:prstGeom>
+        </p:spPr>
+      </p:pic>
+      <p:sp>
+        <p:nvSpPr>
+          <p:cNvPr id="14" name="Text 9"/>
           <p:cNvSpPr txBox="1"/>
           <p:nvPr/>
         </p:nvSpPr>
@@ -2732,7 +2734,7 @@
       </p:sp>
       <p:sp>
         <p:nvSpPr>
-          <p:cNvPr id="15" name="Shape 11"/>
+          <p:cNvPr id="15" name="Shape 10"/>
           <p:cNvSpPr/>
           <p:nvPr/>
         </p:nvSpPr>
@@ -2755,48 +2757,33 @@
           </a:ln>
         </p:spPr>
       </p:sp>
-      <p:sp>
-        <p:nvSpPr>
-          <p:cNvPr id="16" name="Text 12"/>
-          <p:cNvSpPr txBox="1"/>
-          <p:nvPr/>
-        </p:nvSpPr>
-        <p:spPr>
-          <a:xfrm>
-            <a:off x="822960" y="3291840"/>
-            <a:ext cx="292608" cy="292608"/>
-          </a:xfrm>
-          <a:prstGeom prst="rect">
-            <a:avLst/>
-          </a:prstGeom>
-          <a:noFill/>
-          <a:ln/>
-        </p:spPr>
-        <p:txBody>
-          <a:bodyPr wrap="square" lIns="0" tIns="0" rIns="0" bIns="0" rtlCol="0" anchor="ctr"/>
-          <a:lstStyle/>
-          <a:p>
-            <a:pPr algn="ctr" indent="0" marL="0">
-              <a:buNone/>
-            </a:pPr>
-            <a:r>
-              <a:rPr lang="en-US" sz="1200" b="1" dirty="0">
-                <a:solidFill>
-                  <a:srgbClr val="FFFFFF"/>
-                </a:solidFill>
-                <a:latin typeface="Georgia" pitchFamily="34" charset="0"/>
-                <a:ea typeface="Georgia" pitchFamily="34" charset="-122"/>
-                <a:cs typeface="Georgia" pitchFamily="34" charset="-120"/>
-              </a:rPr>
-              <a:t>✓</a:t>
-            </a:r>
-            <a:endParaRPr lang="en-US" sz="1200" dirty="0"/>
-          </a:p>
-        </p:txBody>
-      </p:sp>
-      <p:sp>
-        <p:nvSpPr>
-          <p:cNvPr id="17" name="Text 13"/>
+      <p:pic>
+        <p:nvPicPr>
+          <p:cNvPr id="16" name="Image 2" descr="preencoded.png">    </p:cNvPr>
+          <p:cNvPicPr>
+            <a:picLocks noChangeAspect="1"/>
+          </p:cNvPicPr>
+          <p:nvPr/>
+        </p:nvPicPr>
+        <p:blipFill>
+          <a:blip r:embed="rId3"/>
+          <a:stretch>
+            <a:fillRect/>
+          </a:stretch>
+        </p:blipFill>
+        <p:spPr>
+          <a:xfrm>
+            <a:off x="881482" y="3350362"/>
+            <a:ext cx="175565" cy="175565"/>
+          </a:xfrm>
+          <a:prstGeom prst="rect">
+            <a:avLst/>
+          </a:prstGeom>
+        </p:spPr>
+      </p:pic>
+      <p:sp>
+        <p:nvSpPr>
+          <p:cNvPr id="17" name="Text 11"/>
           <p:cNvSpPr txBox="1"/>
           <p:nvPr/>
         </p:nvSpPr>
@@ -2837,7 +2824,7 @@
       </p:sp>
       <p:sp>
         <p:nvSpPr>
-          <p:cNvPr id="18" name="Shape 14"/>
+          <p:cNvPr id="18" name="Shape 12"/>
           <p:cNvSpPr/>
           <p:nvPr/>
         </p:nvSpPr>
@@ -2860,48 +2847,33 @@
           </a:ln>
         </p:spPr>
       </p:sp>
-      <p:sp>
-        <p:nvSpPr>
-          <p:cNvPr id="19" name="Text 15"/>
-          <p:cNvSpPr txBox="1"/>
-          <p:nvPr/>
-        </p:nvSpPr>
-        <p:spPr>
-          <a:xfrm>
-            <a:off x="822960" y="3840480"/>
-            <a:ext cx="292608" cy="292608"/>
-          </a:xfrm>
-          <a:prstGeom prst="rect">
-            <a:avLst/>
-          </a:prstGeom>
-          <a:noFill/>
-          <a:ln/>
-        </p:spPr>
-        <p:txBody>
-          <a:bodyPr wrap="square" lIns="0" tIns="0" rIns="0" bIns="0" rtlCol="0" anchor="ctr"/>
-          <a:lstStyle/>
-          <a:p>
-            <a:pPr algn="ctr" indent="0" marL="0">
-              <a:buNone/>
-            </a:pPr>
-            <a:r>
-              <a:rPr lang="en-US" sz="1200" b="1" dirty="0">
-                <a:solidFill>
-                  <a:srgbClr val="FFFFFF"/>
-                </a:solidFill>
-                <a:latin typeface="Georgia" pitchFamily="34" charset="0"/>
-                <a:ea typeface="Georgia" pitchFamily="34" charset="-122"/>
-                <a:cs typeface="Georgia" pitchFamily="34" charset="-120"/>
-              </a:rPr>
-              <a:t>✓</a:t>
-            </a:r>
-            <a:endParaRPr lang="en-US" sz="1200" dirty="0"/>
-          </a:p>
-        </p:txBody>
-      </p:sp>
-      <p:sp>
-        <p:nvSpPr>
-          <p:cNvPr id="20" name="Text 16"/>
+      <p:pic>
+        <p:nvPicPr>
+          <p:cNvPr id="19" name="Image 3" descr="preencoded.png">    </p:cNvPr>
+          <p:cNvPicPr>
+            <a:picLocks noChangeAspect="1"/>
+          </p:cNvPicPr>
+          <p:nvPr/>
+        </p:nvPicPr>
+        <p:blipFill>
+          <a:blip r:embed="rId4"/>
+          <a:stretch>
+            <a:fillRect/>
+          </a:stretch>
+        </p:blipFill>
+        <p:spPr>
+          <a:xfrm>
+            <a:off x="881482" y="3899002"/>
+            <a:ext cx="175565" cy="175565"/>
+          </a:xfrm>
+          <a:prstGeom prst="rect">
+            <a:avLst/>
+          </a:prstGeom>
+        </p:spPr>
+      </p:pic>
+      <p:sp>
+        <p:nvSpPr>
+          <p:cNvPr id="20" name="Text 13"/>
           <p:cNvSpPr txBox="1"/>
           <p:nvPr/>
         </p:nvSpPr>
@@ -2942,7 +2914,7 @@
       </p:sp>
       <p:sp>
         <p:nvSpPr>
-          <p:cNvPr id="21" name="Shape 17"/>
+          <p:cNvPr id="21" name="Shape 14"/>
           <p:cNvSpPr/>
           <p:nvPr/>
         </p:nvSpPr>
@@ -2965,48 +2937,33 @@
           </a:ln>
         </p:spPr>
       </p:sp>
-      <p:sp>
-        <p:nvSpPr>
-          <p:cNvPr id="22" name="Text 18"/>
-          <p:cNvSpPr txBox="1"/>
-          <p:nvPr/>
-        </p:nvSpPr>
-        <p:spPr>
-          <a:xfrm>
-            <a:off x="822960" y="4389120"/>
-            <a:ext cx="292608" cy="292608"/>
-          </a:xfrm>
-          <a:prstGeom prst="rect">
-            <a:avLst/>
-          </a:prstGeom>
-          <a:noFill/>
-          <a:ln/>
-        </p:spPr>
-        <p:txBody>
-          <a:bodyPr wrap="square" lIns="0" tIns="0" rIns="0" bIns="0" rtlCol="0" anchor="ctr"/>
-          <a:lstStyle/>
-          <a:p>
-            <a:pPr algn="ctr" indent="0" marL="0">
-              <a:buNone/>
-            </a:pPr>
-            <a:r>
-              <a:rPr lang="en-US" sz="1200" b="1" dirty="0">
-                <a:solidFill>
-                  <a:srgbClr val="FFFFFF"/>
-                </a:solidFill>
-                <a:latin typeface="Georgia" pitchFamily="34" charset="0"/>
-                <a:ea typeface="Georgia" pitchFamily="34" charset="-122"/>
-                <a:cs typeface="Georgia" pitchFamily="34" charset="-120"/>
-              </a:rPr>
-              <a:t>✓</a:t>
-            </a:r>
-            <a:endParaRPr lang="en-US" sz="1200" dirty="0"/>
-          </a:p>
-        </p:txBody>
-      </p:sp>
-      <p:sp>
-        <p:nvSpPr>
-          <p:cNvPr id="23" name="Text 19"/>
+      <p:pic>
+        <p:nvPicPr>
+          <p:cNvPr id="22" name="Image 4" descr="preencoded.png">    </p:cNvPr>
+          <p:cNvPicPr>
+            <a:picLocks noChangeAspect="1"/>
+          </p:cNvPicPr>
+          <p:nvPr/>
+        </p:nvPicPr>
+        <p:blipFill>
+          <a:blip r:embed="rId5"/>
+          <a:stretch>
+            <a:fillRect/>
+          </a:stretch>
+        </p:blipFill>
+        <p:spPr>
+          <a:xfrm>
+            <a:off x="881482" y="4447642"/>
+            <a:ext cx="175565" cy="175565"/>
+          </a:xfrm>
+          <a:prstGeom prst="rect">
+            <a:avLst/>
+          </a:prstGeom>
+        </p:spPr>
+      </p:pic>
+      <p:sp>
+        <p:nvSpPr>
+          <p:cNvPr id="23" name="Text 15"/>
           <p:cNvSpPr txBox="1"/>
           <p:nvPr/>
         </p:nvSpPr>
@@ -3047,7 +3004,7 @@
       </p:sp>
       <p:sp>
         <p:nvSpPr>
-          <p:cNvPr id="24" name="Shape 20"/>
+          <p:cNvPr id="24" name="Shape 16"/>
           <p:cNvSpPr/>
           <p:nvPr/>
         </p:nvSpPr>
@@ -3074,7 +3031,7 @@
       </p:sp>
       <p:sp>
         <p:nvSpPr>
-          <p:cNvPr id="25" name="Shape 21"/>
+          <p:cNvPr id="25" name="Shape 17"/>
           <p:cNvSpPr/>
           <p:nvPr/>
         </p:nvSpPr>
@@ -3099,14 +3056,14 @@
       </p:sp>
       <p:pic>
         <p:nvPicPr>
-          <p:cNvPr id="26" name="Image 1" descr="preencoded.png">    </p:cNvPr>
+          <p:cNvPr id="26" name="Image 5" descr="preencoded.png">    </p:cNvPr>
           <p:cNvPicPr>
             <a:picLocks noChangeAspect="1"/>
           </p:cNvPicPr>
           <p:nvPr/>
         </p:nvPicPr>
         <p:blipFill>
-          <a:blip r:embed="rId2"/>
+          <a:blip r:embed="rId6"/>
           <a:stretch>
             <a:fillRect/>
           </a:stretch>
@@ -3123,7 +3080,7 @@
       </p:pic>
       <p:sp>
         <p:nvSpPr>
-          <p:cNvPr id="27" name="Text 22"/>
+          <p:cNvPr id="27" name="Text 18"/>
           <p:cNvSpPr txBox="1"/>
           <p:nvPr/>
         </p:nvSpPr>
@@ -3164,7 +3121,7 @@
       </p:sp>
       <p:sp>
         <p:nvSpPr>
-          <p:cNvPr id="28" name="Text 23"/>
+          <p:cNvPr id="28" name="Text 19"/>
           <p:cNvSpPr txBox="1"/>
           <p:nvPr/>
         </p:nvSpPr>
@@ -3205,7 +3162,7 @@
       </p:sp>
       <p:sp>
         <p:nvSpPr>
-          <p:cNvPr id="29" name="Text 24"/>
+          <p:cNvPr id="29" name="Text 20"/>
           <p:cNvSpPr txBox="1"/>
           <p:nvPr/>
         </p:nvSpPr>
@@ -3246,7 +3203,7 @@
       </p:sp>
       <p:sp>
         <p:nvSpPr>
-          <p:cNvPr id="30" name="Text 25"/>
+          <p:cNvPr id="30" name="Text 21"/>
           <p:cNvSpPr txBox="1"/>
           <p:nvPr/>
         </p:nvSpPr>
@@ -3287,7 +3244,7 @@
       </p:sp>
       <p:sp>
         <p:nvSpPr>
-          <p:cNvPr id="31" name="Text 26"/>
+          <p:cNvPr id="31" name="Text 22"/>
           <p:cNvSpPr txBox="1"/>
           <p:nvPr/>
         </p:nvSpPr>
@@ -3328,7 +3285,7 @@
       </p:sp>
       <p:sp>
         <p:nvSpPr>
-          <p:cNvPr id="32" name="Text 27"/>
+          <p:cNvPr id="32" name="Text 23"/>
           <p:cNvSpPr txBox="1"/>
           <p:nvPr/>
         </p:nvSpPr>
@@ -3361,7 +3318,7 @@
                 <a:ea typeface="Arial" pitchFamily="34" charset="-122"/>
                 <a:cs typeface="Arial" pitchFamily="34" charset="-120"/>
               </a:rPr>
-              <a:t>Verdict: the hand-offs have owners and rules, never an implied one</a:t>
+              <a:t>Verdict: every hand-off has an owner, and HELIX ships no runtime or tracker and approves nothing</a:t>
             </a:r>
             <a:endParaRPr lang="en-US" sz="1500" dirty="0"/>
           </a:p>
@@ -3453,9 +3410,9 @@
                 <a:solidFill>
                   <a:srgbClr val="FFFFFF"/>
                 </a:solidFill>
-                <a:latin typeface="Georgia" pitchFamily="34" charset="0"/>
-                <a:ea typeface="Georgia" pitchFamily="34" charset="-122"/>
-                <a:cs typeface="Georgia" pitchFamily="34" charset="-120"/>
+                <a:latin typeface="Arial" pitchFamily="34" charset="0"/>
+                <a:ea typeface="Arial" pitchFamily="34" charset="-122"/>
+                <a:cs typeface="Arial" pitchFamily="34" charset="-120"/>
               </a:rPr>
               <a:t>11</a:t>
             </a:r>
@@ -3498,7 +3455,24 @@
                 <a:ea typeface="Georgia" pitchFamily="34" charset="-122"/>
                 <a:cs typeface="Georgia" pitchFamily="34" charset="-120"/>
               </a:rPr>
-              <a:t>Pilot HELIX for one quarter and count what gates catch</a:t>
+              <a:t>Pilot HELIX for one quarter</a:t>
+            </a:r>
+            <a:endParaRPr lang="en-US" sz="3600" dirty="0"/>
+          </a:p>
+          <a:p>
+            <a:pPr algn="l" indent="0" marL="0">
+              <a:buNone/>
+            </a:pPr>
+            <a:r>
+              <a:rPr lang="en-US" sz="3600" b="1" dirty="0">
+                <a:solidFill>
+                  <a:srgbClr val="EEF2F7"/>
+                </a:solidFill>
+                <a:latin typeface="Georgia" pitchFamily="34" charset="0"/>
+                <a:ea typeface="Georgia" pitchFamily="34" charset="-122"/>
+                <a:cs typeface="Georgia" pitchFamily="34" charset="-120"/>
+              </a:rPr>
+              <a:t>and count what gates catch</a:t>
             </a:r>
             <a:endParaRPr lang="en-US" sz="3600" dirty="0"/>
           </a:p>
@@ -3638,13 +3612,13 @@
             <a:r>
               <a:rPr lang="en-US" sz="1800" b="1" dirty="0">
                 <a:solidFill>
-                  <a:srgbClr val="FFFFFF"/>
+                  <a:srgbClr val="14181F"/>
                 </a:solidFill>
                 <a:latin typeface="Arial" pitchFamily="34" charset="0"/>
                 <a:ea typeface="Arial" pitchFamily="34" charset="-122"/>
                 <a:cs typeface="Arial" pitchFamily="34" charset="-120"/>
               </a:rPr>
-              <a:t>Pilot HELIX for one quarter and count what gates catch</a:t>
+              <a:t>Run HELIX on one project for one quarter and count the findings the team accepts as real</a:t>
             </a:r>
             <a:endParaRPr lang="en-US" sz="1800" dirty="0"/>
           </a:p>
@@ -3857,7 +3831,7 @@
                 <a:ea typeface="Arial" pitchFamily="34" charset="-122"/>
                 <a:cs typeface="Arial" pitchFamily="34" charset="-120"/>
               </a:rPr>
-              <a:t>Pick one active project with an agent already in the loop, by the end of this week</a:t>
+              <a:t>Pick one active project with an agent already in the loop</a:t>
             </a:r>
             <a:endParaRPr lang="en-US" sz="1500" dirty="0"/>
           </a:p>
@@ -3865,53 +3839,85 @@
       </p:sp>
       <p:sp>
         <p:nvSpPr>
-          <p:cNvPr id="16" name="Shape 12"/>
-          <p:cNvSpPr/>
-          <p:nvPr/>
-        </p:nvSpPr>
-        <p:spPr>
-          <a:xfrm>
-            <a:off x="8127797" y="3749040"/>
-            <a:ext cx="1620469" cy="0"/>
-          </a:xfrm>
-          <a:prstGeom prst="line">
+          <p:cNvPr id="16" name="Text 12"/>
+          <p:cNvSpPr txBox="1"/>
+          <p:nvPr/>
+        </p:nvSpPr>
+        <p:spPr>
+          <a:xfrm>
+            <a:off x="8127797" y="3383280"/>
+            <a:ext cx="1620469" cy="502920"/>
+          </a:xfrm>
+          <a:prstGeom prst="rect">
             <a:avLst/>
           </a:prstGeom>
           <a:noFill/>
-          <a:ln w="9525">
-            <a:solidFill>
-              <a:srgbClr val="B9C2CF"/>
-            </a:solidFill>
-            <a:prstDash val="solid"/>
-            <a:headEnd type="none"/>
-            <a:tailEnd type="none"/>
-          </a:ln>
-        </p:spPr>
-      </p:sp>
-      <p:sp>
-        <p:nvSpPr>
-          <p:cNvPr id="17" name="Shape 13"/>
-          <p:cNvSpPr/>
-          <p:nvPr/>
-        </p:nvSpPr>
-        <p:spPr>
-          <a:xfrm>
-            <a:off x="10022586" y="3749040"/>
-            <a:ext cx="1620469" cy="0"/>
-          </a:xfrm>
-          <a:prstGeom prst="line">
+          <a:ln/>
+        </p:spPr>
+        <p:txBody>
+          <a:bodyPr wrap="square" lIns="0" tIns="0" rIns="0" bIns="0" rtlCol="0" anchor="ctr">
+            <a:normAutofit/>
+          </a:bodyPr>
+          <a:lstStyle/>
+          <a:p>
+            <a:pPr algn="l" indent="0" marL="0">
+              <a:buNone/>
+            </a:pPr>
+            <a:r>
+              <a:rPr lang="en-US" sz="1400" dirty="0">
+                <a:solidFill>
+                  <a:srgbClr val="EEF2F7"/>
+                </a:solidFill>
+                <a:latin typeface="Arial" pitchFamily="34" charset="0"/>
+                <a:ea typeface="Arial" pitchFamily="34" charset="-122"/>
+                <a:cs typeface="Arial" pitchFamily="34" charset="-120"/>
+              </a:rPr>
+              <a:t>head of platform</a:t>
+            </a:r>
+            <a:endParaRPr lang="en-US" sz="1400" dirty="0"/>
+          </a:p>
+        </p:txBody>
+      </p:sp>
+      <p:sp>
+        <p:nvSpPr>
+          <p:cNvPr id="17" name="Text 13"/>
+          <p:cNvSpPr txBox="1"/>
+          <p:nvPr/>
+        </p:nvSpPr>
+        <p:spPr>
+          <a:xfrm>
+            <a:off x="10022586" y="3383280"/>
+            <a:ext cx="1620469" cy="502920"/>
+          </a:xfrm>
+          <a:prstGeom prst="rect">
             <a:avLst/>
           </a:prstGeom>
           <a:noFill/>
-          <a:ln w="9525">
-            <a:solidFill>
-              <a:srgbClr val="B9C2CF"/>
-            </a:solidFill>
-            <a:prstDash val="solid"/>
-            <a:headEnd type="none"/>
-            <a:tailEnd type="none"/>
-          </a:ln>
-        </p:spPr>
+          <a:ln/>
+        </p:spPr>
+        <p:txBody>
+          <a:bodyPr wrap="square" lIns="0" tIns="0" rIns="0" bIns="0" rtlCol="0" anchor="ctr">
+            <a:normAutofit/>
+          </a:bodyPr>
+          <a:lstStyle/>
+          <a:p>
+            <a:pPr algn="l" indent="0" marL="0">
+              <a:buNone/>
+            </a:pPr>
+            <a:r>
+              <a:rPr lang="en-US" sz="1400" dirty="0">
+                <a:solidFill>
+                  <a:srgbClr val="EEF2F7"/>
+                </a:solidFill>
+                <a:latin typeface="Arial" pitchFamily="34" charset="0"/>
+                <a:ea typeface="Arial" pitchFamily="34" charset="-122"/>
+                <a:cs typeface="Arial" pitchFamily="34" charset="-120"/>
+              </a:rPr>
+              <a:t>this week</a:t>
+            </a:r>
+            <a:endParaRPr lang="en-US" sz="1400" dirty="0"/>
+          </a:p>
+        </p:txBody>
       </p:sp>
       <p:sp>
         <p:nvSpPr>
@@ -3997,7 +4003,7 @@
                 <a:ea typeface="Arial" pitchFamily="34" charset="-122"/>
                 <a:cs typeface="Arial" pitchFamily="34" charset="-120"/>
               </a:rPr>
-              <a:t>Adopt the templates and run one alignment check on its documents in the first sprint</a:t>
+              <a:t>Adopt the templates and run one alignment check on its documents</a:t>
             </a:r>
             <a:endParaRPr lang="en-US" sz="1500" dirty="0"/>
           </a:p>
@@ -4005,53 +4011,85 @@
       </p:sp>
       <p:sp>
         <p:nvSpPr>
-          <p:cNvPr id="21" name="Shape 16"/>
-          <p:cNvSpPr/>
-          <p:nvPr/>
-        </p:nvSpPr>
-        <p:spPr>
-          <a:xfrm>
-            <a:off x="8127797" y="4343400"/>
-            <a:ext cx="1620469" cy="0"/>
-          </a:xfrm>
-          <a:prstGeom prst="line">
+          <p:cNvPr id="21" name="Text 16"/>
+          <p:cNvSpPr txBox="1"/>
+          <p:nvPr/>
+        </p:nvSpPr>
+        <p:spPr>
+          <a:xfrm>
+            <a:off x="8127797" y="3977640"/>
+            <a:ext cx="1620469" cy="502920"/>
+          </a:xfrm>
+          <a:prstGeom prst="rect">
             <a:avLst/>
           </a:prstGeom>
           <a:noFill/>
-          <a:ln w="9525">
-            <a:solidFill>
-              <a:srgbClr val="B9C2CF"/>
-            </a:solidFill>
-            <a:prstDash val="solid"/>
-            <a:headEnd type="none"/>
-            <a:tailEnd type="none"/>
-          </a:ln>
-        </p:spPr>
-      </p:sp>
-      <p:sp>
-        <p:nvSpPr>
-          <p:cNvPr id="22" name="Shape 17"/>
-          <p:cNvSpPr/>
-          <p:nvPr/>
-        </p:nvSpPr>
-        <p:spPr>
-          <a:xfrm>
-            <a:off x="10022586" y="4343400"/>
-            <a:ext cx="1620469" cy="0"/>
-          </a:xfrm>
-          <a:prstGeom prst="line">
+          <a:ln/>
+        </p:spPr>
+        <p:txBody>
+          <a:bodyPr wrap="square" lIns="0" tIns="0" rIns="0" bIns="0" rtlCol="0" anchor="ctr">
+            <a:normAutofit/>
+          </a:bodyPr>
+          <a:lstStyle/>
+          <a:p>
+            <a:pPr algn="l" indent="0" marL="0">
+              <a:buNone/>
+            </a:pPr>
+            <a:r>
+              <a:rPr lang="en-US" sz="1400" dirty="0">
+                <a:solidFill>
+                  <a:srgbClr val="EEF2F7"/>
+                </a:solidFill>
+                <a:latin typeface="Arial" pitchFamily="34" charset="0"/>
+                <a:ea typeface="Arial" pitchFamily="34" charset="-122"/>
+                <a:cs typeface="Arial" pitchFamily="34" charset="-120"/>
+              </a:rPr>
+              <a:t>the project's team lead</a:t>
+            </a:r>
+            <a:endParaRPr lang="en-US" sz="1400" dirty="0"/>
+          </a:p>
+        </p:txBody>
+      </p:sp>
+      <p:sp>
+        <p:nvSpPr>
+          <p:cNvPr id="22" name="Text 17"/>
+          <p:cNvSpPr txBox="1"/>
+          <p:nvPr/>
+        </p:nvSpPr>
+        <p:spPr>
+          <a:xfrm>
+            <a:off x="10022586" y="3977640"/>
+            <a:ext cx="1620469" cy="502920"/>
+          </a:xfrm>
+          <a:prstGeom prst="rect">
             <a:avLst/>
           </a:prstGeom>
           <a:noFill/>
-          <a:ln w="9525">
-            <a:solidFill>
-              <a:srgbClr val="B9C2CF"/>
-            </a:solidFill>
-            <a:prstDash val="solid"/>
-            <a:headEnd type="none"/>
-            <a:tailEnd type="none"/>
-          </a:ln>
-        </p:spPr>
+          <a:ln/>
+        </p:spPr>
+        <p:txBody>
+          <a:bodyPr wrap="square" lIns="0" tIns="0" rIns="0" bIns="0" rtlCol="0" anchor="ctr">
+            <a:normAutofit/>
+          </a:bodyPr>
+          <a:lstStyle/>
+          <a:p>
+            <a:pPr algn="l" indent="0" marL="0">
+              <a:buNone/>
+            </a:pPr>
+            <a:r>
+              <a:rPr lang="en-US" sz="1400" dirty="0">
+                <a:solidFill>
+                  <a:srgbClr val="EEF2F7"/>
+                </a:solidFill>
+                <a:latin typeface="Arial" pitchFamily="34" charset="0"/>
+                <a:ea typeface="Arial" pitchFamily="34" charset="-122"/>
+                <a:cs typeface="Arial" pitchFamily="34" charset="-120"/>
+              </a:rPr>
+              <a:t>sprint one</a:t>
+            </a:r>
+            <a:endParaRPr lang="en-US" sz="1400" dirty="0"/>
+          </a:p>
+        </p:txBody>
       </p:sp>
       <p:sp>
         <p:nvSpPr>
@@ -4137,7 +4175,7 @@
                 <a:ea typeface="Arial" pitchFamily="34" charset="-122"/>
                 <a:cs typeface="Arial" pitchFamily="34" charset="-120"/>
               </a:rPr>
-              <a:t>Review the findings together after four weeks against the bar of under 3 findings per check</a:t>
+              <a:t>Review the findings the team accepts as real, and what each would have cost in review</a:t>
             </a:r>
             <a:endParaRPr lang="en-US" sz="1500" dirty="0"/>
           </a:p>
@@ -4145,53 +4183,85 @@
       </p:sp>
       <p:sp>
         <p:nvSpPr>
-          <p:cNvPr id="26" name="Shape 20"/>
-          <p:cNvSpPr/>
-          <p:nvPr/>
-        </p:nvSpPr>
-        <p:spPr>
-          <a:xfrm>
-            <a:off x="8127797" y="4937760"/>
-            <a:ext cx="1620469" cy="0"/>
-          </a:xfrm>
-          <a:prstGeom prst="line">
+          <p:cNvPr id="26" name="Text 20"/>
+          <p:cNvSpPr txBox="1"/>
+          <p:nvPr/>
+        </p:nvSpPr>
+        <p:spPr>
+          <a:xfrm>
+            <a:off x="8127797" y="4572000"/>
+            <a:ext cx="1620469" cy="502920"/>
+          </a:xfrm>
+          <a:prstGeom prst="rect">
             <a:avLst/>
           </a:prstGeom>
           <a:noFill/>
-          <a:ln w="9525">
-            <a:solidFill>
-              <a:srgbClr val="B9C2CF"/>
-            </a:solidFill>
-            <a:prstDash val="solid"/>
-            <a:headEnd type="none"/>
-            <a:tailEnd type="none"/>
-          </a:ln>
-        </p:spPr>
-      </p:sp>
-      <p:sp>
-        <p:nvSpPr>
-          <p:cNvPr id="27" name="Shape 21"/>
-          <p:cNvSpPr/>
-          <p:nvPr/>
-        </p:nvSpPr>
-        <p:spPr>
-          <a:xfrm>
-            <a:off x="10022586" y="4937760"/>
-            <a:ext cx="1620469" cy="0"/>
-          </a:xfrm>
-          <a:prstGeom prst="line">
+          <a:ln/>
+        </p:spPr>
+        <p:txBody>
+          <a:bodyPr wrap="square" lIns="0" tIns="0" rIns="0" bIns="0" rtlCol="0" anchor="ctr">
+            <a:normAutofit/>
+          </a:bodyPr>
+          <a:lstStyle/>
+          <a:p>
+            <a:pPr algn="l" indent="0" marL="0">
+              <a:buNone/>
+            </a:pPr>
+            <a:r>
+              <a:rPr lang="en-US" sz="1400" dirty="0">
+                <a:solidFill>
+                  <a:srgbClr val="EEF2F7"/>
+                </a:solidFill>
+                <a:latin typeface="Arial" pitchFamily="34" charset="0"/>
+                <a:ea typeface="Arial" pitchFamily="34" charset="-122"/>
+                <a:cs typeface="Arial" pitchFamily="34" charset="-120"/>
+              </a:rPr>
+              <a:t>both of us</a:t>
+            </a:r>
+            <a:endParaRPr lang="en-US" sz="1400" dirty="0"/>
+          </a:p>
+        </p:txBody>
+      </p:sp>
+      <p:sp>
+        <p:nvSpPr>
+          <p:cNvPr id="27" name="Text 21"/>
+          <p:cNvSpPr txBox="1"/>
+          <p:nvPr/>
+        </p:nvSpPr>
+        <p:spPr>
+          <a:xfrm>
+            <a:off x="10022586" y="4572000"/>
+            <a:ext cx="1620469" cy="502920"/>
+          </a:xfrm>
+          <a:prstGeom prst="rect">
             <a:avLst/>
           </a:prstGeom>
           <a:noFill/>
-          <a:ln w="9525">
-            <a:solidFill>
-              <a:srgbClr val="B9C2CF"/>
-            </a:solidFill>
-            <a:prstDash val="solid"/>
-            <a:headEnd type="none"/>
-            <a:tailEnd type="none"/>
-          </a:ln>
-        </p:spPr>
+          <a:ln/>
+        </p:spPr>
+        <p:txBody>
+          <a:bodyPr wrap="square" lIns="0" tIns="0" rIns="0" bIns="0" rtlCol="0" anchor="ctr">
+            <a:normAutofit/>
+          </a:bodyPr>
+          <a:lstStyle/>
+          <a:p>
+            <a:pPr algn="l" indent="0" marL="0">
+              <a:buNone/>
+            </a:pPr>
+            <a:r>
+              <a:rPr lang="en-US" sz="1400" dirty="0">
+                <a:solidFill>
+                  <a:srgbClr val="EEF2F7"/>
+                </a:solidFill>
+                <a:latin typeface="Arial" pitchFamily="34" charset="0"/>
+                <a:ea typeface="Arial" pitchFamily="34" charset="-122"/>
+                <a:cs typeface="Arial" pitchFamily="34" charset="-120"/>
+              </a:rPr>
+              <a:t>week four</a:t>
+            </a:r>
+            <a:endParaRPr lang="en-US" sz="1400" dirty="0"/>
+          </a:p>
+        </p:txBody>
       </p:sp>
       <p:sp>
         <p:nvSpPr>
@@ -4369,11 +4439,11 @@
             <a:tbl>
               <a:tblPr/>
               <a:tblGrid>
-                <a:gridCol w="548640"/>
-                <a:gridCol w="6538381"/>
-                <a:gridCol w="4007395"/>
+                <a:gridCol w="502920"/>
+                <a:gridCol w="6354897"/>
+                <a:gridCol w="4236598"/>
               </a:tblGrid>
-              <a:tr h="384048">
+              <a:tr h="329184">
                 <a:tc>
                   <a:txBody>
                     <a:bodyPr/>
@@ -4400,7 +4470,7 @@
                       </a:endParaRPr>
                     </a:p>
                   </a:txBody>
-                  <a:tcPr marL="73152" marR="73152" marT="73152" marB="73152" anchor="ctr">
+                  <a:tcPr marL="45720" marR="45720" marT="45720" marB="45720" anchor="ctr">
                     <a:lnL w="9525" cap="flat" cmpd="sng" algn="ctr">
                       <a:solidFill>
                         <a:srgbClr val="D6DCE4"/>
@@ -4468,7 +4538,7 @@
                       </a:endParaRPr>
                     </a:p>
                   </a:txBody>
-                  <a:tcPr marL="73152" marR="73152" marT="73152" marB="73152" anchor="ctr">
+                  <a:tcPr marL="45720" marR="45720" marT="45720" marB="45720" anchor="ctr">
                     <a:lnL w="9525" cap="flat" cmpd="sng" algn="ctr">
                       <a:solidFill>
                         <a:srgbClr val="D6DCE4"/>
@@ -4536,7 +4606,7 @@
                       </a:endParaRPr>
                     </a:p>
                   </a:txBody>
-                  <a:tcPr marL="73152" marR="73152" marT="73152" marB="73152" anchor="ctr">
+                  <a:tcPr marL="45720" marR="45720" marT="45720" marB="45720" anchor="ctr">
                     <a:lnL w="9525" cap="flat" cmpd="sng" algn="ctr">
                       <a:solidFill>
                         <a:srgbClr val="D6DCE4"/>
@@ -4579,7 +4649,7 @@
                   </a:tcPr>
                 </a:tc>
               </a:tr>
-              <a:tr h="384048">
+              <a:tr h="329184">
                 <a:tc>
                   <a:txBody>
                     <a:bodyPr/>
@@ -4606,7 +4676,7 @@
                       </a:endParaRPr>
                     </a:p>
                   </a:txBody>
-                  <a:tcPr marL="73152" marR="73152" marT="73152" marB="73152" anchor="ctr">
+                  <a:tcPr marL="45720" marR="45720" marT="45720" marB="45720" anchor="ctr">
                     <a:lnL w="9525" cap="flat" cmpd="sng" algn="ctr">
                       <a:solidFill>
                         <a:srgbClr val="D6DCE4"/>
@@ -4674,7 +4744,7 @@
                       </a:endParaRPr>
                     </a:p>
                   </a:txBody>
-                  <a:tcPr marL="73152" marR="73152" marT="73152" marB="73152" anchor="ctr">
+                  <a:tcPr marL="45720" marR="45720" marT="45720" marB="45720" anchor="ctr">
                     <a:lnL w="9525" cap="flat" cmpd="sng" algn="ctr">
                       <a:solidFill>
                         <a:srgbClr val="D6DCE4"/>
@@ -4742,7 +4812,7 @@
                       </a:endParaRPr>
                     </a:p>
                   </a:txBody>
-                  <a:tcPr marL="73152" marR="73152" marT="73152" marB="73152" anchor="ctr">
+                  <a:tcPr marL="45720" marR="45720" marT="45720" marB="45720" anchor="ctr">
                     <a:lnL w="9525" cap="flat" cmpd="sng" algn="ctr">
                       <a:solidFill>
                         <a:srgbClr val="D6DCE4"/>
@@ -4785,7 +4855,7 @@
                   </a:tcPr>
                 </a:tc>
               </a:tr>
-              <a:tr h="566928">
+              <a:tr h="512064">
                 <a:tc>
                   <a:txBody>
                     <a:bodyPr/>
@@ -4812,7 +4882,7 @@
                       </a:endParaRPr>
                     </a:p>
                   </a:txBody>
-                  <a:tcPr marL="73152" marR="73152" marT="73152" marB="73152" anchor="ctr">
+                  <a:tcPr marL="45720" marR="45720" marT="45720" marB="45720" anchor="ctr">
                     <a:lnL w="9525" cap="flat" cmpd="sng" algn="ctr">
                       <a:solidFill>
                         <a:srgbClr val="D6DCE4"/>
@@ -4880,7 +4950,7 @@
                       </a:endParaRPr>
                     </a:p>
                   </a:txBody>
-                  <a:tcPr marL="73152" marR="73152" marT="73152" marB="73152" anchor="ctr">
+                  <a:tcPr marL="45720" marR="45720" marT="45720" marB="45720" anchor="ctr">
                     <a:lnL w="9525" cap="flat" cmpd="sng" algn="ctr">
                       <a:solidFill>
                         <a:srgbClr val="D6DCE4"/>
@@ -4948,7 +5018,7 @@
                       </a:endParaRPr>
                     </a:p>
                   </a:txBody>
-                  <a:tcPr marL="73152" marR="73152" marT="73152" marB="73152" anchor="ctr">
+                  <a:tcPr marL="45720" marR="45720" marT="45720" marB="45720" anchor="ctr">
                     <a:lnL w="9525" cap="flat" cmpd="sng" algn="ctr">
                       <a:solidFill>
                         <a:srgbClr val="D6DCE4"/>
@@ -4991,7 +5061,7 @@
                   </a:tcPr>
                 </a:tc>
               </a:tr>
-              <a:tr h="566928">
+              <a:tr h="512064">
                 <a:tc>
                   <a:txBody>
                     <a:bodyPr/>
@@ -5018,7 +5088,7 @@
                       </a:endParaRPr>
                     </a:p>
                   </a:txBody>
-                  <a:tcPr marL="73152" marR="73152" marT="73152" marB="73152" anchor="ctr">
+                  <a:tcPr marL="45720" marR="45720" marT="45720" marB="45720" anchor="ctr">
                     <a:lnL w="9525" cap="flat" cmpd="sng" algn="ctr">
                       <a:solidFill>
                         <a:srgbClr val="D6DCE4"/>
@@ -5086,7 +5156,7 @@
                       </a:endParaRPr>
                     </a:p>
                   </a:txBody>
-                  <a:tcPr marL="73152" marR="73152" marT="73152" marB="73152" anchor="ctr">
+                  <a:tcPr marL="45720" marR="45720" marT="45720" marB="45720" anchor="ctr">
                     <a:lnL w="9525" cap="flat" cmpd="sng" algn="ctr">
                       <a:solidFill>
                         <a:srgbClr val="D6DCE4"/>
@@ -5154,7 +5224,7 @@
                       </a:endParaRPr>
                     </a:p>
                   </a:txBody>
-                  <a:tcPr marL="73152" marR="73152" marT="73152" marB="73152" anchor="ctr">
+                  <a:tcPr marL="45720" marR="45720" marT="45720" marB="45720" anchor="ctr">
                     <a:lnL w="9525" cap="flat" cmpd="sng" algn="ctr">
                       <a:solidFill>
                         <a:srgbClr val="D6DCE4"/>
@@ -5197,7 +5267,7 @@
                   </a:tcPr>
                 </a:tc>
               </a:tr>
-              <a:tr h="566928">
+              <a:tr h="512064">
                 <a:tc>
                   <a:txBody>
                     <a:bodyPr/>
@@ -5224,7 +5294,7 @@
                       </a:endParaRPr>
                     </a:p>
                   </a:txBody>
-                  <a:tcPr marL="73152" marR="73152" marT="73152" marB="73152" anchor="ctr">
+                  <a:tcPr marL="45720" marR="45720" marT="45720" marB="45720" anchor="ctr">
                     <a:lnL w="9525" cap="flat" cmpd="sng" algn="ctr">
                       <a:solidFill>
                         <a:srgbClr val="D6DCE4"/>
@@ -5292,7 +5362,7 @@
                       </a:endParaRPr>
                     </a:p>
                   </a:txBody>
-                  <a:tcPr marL="73152" marR="73152" marT="73152" marB="73152" anchor="ctr">
+                  <a:tcPr marL="45720" marR="45720" marT="45720" marB="45720" anchor="ctr">
                     <a:lnL w="9525" cap="flat" cmpd="sng" algn="ctr">
                       <a:solidFill>
                         <a:srgbClr val="D6DCE4"/>
@@ -5360,7 +5430,7 @@
                       </a:endParaRPr>
                     </a:p>
                   </a:txBody>
-                  <a:tcPr marL="73152" marR="73152" marT="73152" marB="73152" anchor="ctr">
+                  <a:tcPr marL="45720" marR="45720" marT="45720" marB="45720" anchor="ctr">
                     <a:lnL w="9525" cap="flat" cmpd="sng" algn="ctr">
                       <a:solidFill>
                         <a:srgbClr val="D6DCE4"/>
@@ -5403,7 +5473,7 @@
                   </a:tcPr>
                 </a:tc>
               </a:tr>
-              <a:tr h="749808">
+              <a:tr h="694944">
                 <a:tc>
                   <a:txBody>
                     <a:bodyPr/>
@@ -5430,7 +5500,7 @@
                       </a:endParaRPr>
                     </a:p>
                   </a:txBody>
-                  <a:tcPr marL="73152" marR="73152" marT="73152" marB="73152" anchor="ctr">
+                  <a:tcPr marL="45720" marR="45720" marT="45720" marB="45720" anchor="ctr">
                     <a:lnL w="9525" cap="flat" cmpd="sng" algn="ctr">
                       <a:solidFill>
                         <a:srgbClr val="D6DCE4"/>
@@ -5498,7 +5568,7 @@
                       </a:endParaRPr>
                     </a:p>
                   </a:txBody>
-                  <a:tcPr marL="73152" marR="73152" marT="73152" marB="73152" anchor="ctr">
+                  <a:tcPr marL="45720" marR="45720" marT="45720" marB="45720" anchor="ctr">
                     <a:lnL w="9525" cap="flat" cmpd="sng" algn="ctr">
                       <a:solidFill>
                         <a:srgbClr val="D6DCE4"/>
@@ -5566,7 +5636,7 @@
                       </a:endParaRPr>
                     </a:p>
                   </a:txBody>
-                  <a:tcPr marL="73152" marR="73152" marT="73152" marB="73152" anchor="ctr">
+                  <a:tcPr marL="45720" marR="45720" marT="45720" marB="45720" anchor="ctr">
                     <a:lnL w="9525" cap="flat" cmpd="sng" algn="ctr">
                       <a:solidFill>
                         <a:srgbClr val="D6DCE4"/>
@@ -5609,7 +5679,7 @@
                   </a:tcPr>
                 </a:tc>
               </a:tr>
-              <a:tr h="566928">
+              <a:tr h="512064">
                 <a:tc>
                   <a:txBody>
                     <a:bodyPr/>
@@ -5636,7 +5706,7 @@
                       </a:endParaRPr>
                     </a:p>
                   </a:txBody>
-                  <a:tcPr marL="73152" marR="73152" marT="73152" marB="73152" anchor="ctr">
+                  <a:tcPr marL="45720" marR="45720" marT="45720" marB="45720" anchor="ctr">
                     <a:lnL w="9525" cap="flat" cmpd="sng" algn="ctr">
                       <a:solidFill>
                         <a:srgbClr val="D6DCE4"/>
@@ -5704,7 +5774,7 @@
                       </a:endParaRPr>
                     </a:p>
                   </a:txBody>
-                  <a:tcPr marL="73152" marR="73152" marT="73152" marB="73152" anchor="ctr">
+                  <a:tcPr marL="45720" marR="45720" marT="45720" marB="45720" anchor="ctr">
                     <a:lnL w="9525" cap="flat" cmpd="sng" algn="ctr">
                       <a:solidFill>
                         <a:srgbClr val="D6DCE4"/>
@@ -5772,7 +5842,213 @@
                       </a:endParaRPr>
                     </a:p>
                   </a:txBody>
-                  <a:tcPr marL="73152" marR="73152" marT="73152" marB="73152" anchor="ctr">
+                  <a:tcPr marL="45720" marR="45720" marT="45720" marB="45720" anchor="ctr">
+                    <a:lnL w="9525" cap="flat" cmpd="sng" algn="ctr">
+                      <a:solidFill>
+                        <a:srgbClr val="D6DCE4"/>
+                      </a:solidFill>
+                      <a:prstDash val="solid"/>
+                      <a:round/>
+                      <a:headEnd type="none" w="med" len="med"/>
+                      <a:tailEnd type="none" w="med" len="med"/>
+                    </a:lnL>
+                    <a:lnR w="9525" cap="flat" cmpd="sng" algn="ctr">
+                      <a:solidFill>
+                        <a:srgbClr val="D6DCE4"/>
+                      </a:solidFill>
+                      <a:prstDash val="solid"/>
+                      <a:round/>
+                      <a:headEnd type="none" w="med" len="med"/>
+                      <a:tailEnd type="none" w="med" len="med"/>
+                    </a:lnR>
+                    <a:lnT w="9525" cap="flat" cmpd="sng" algn="ctr">
+                      <a:solidFill>
+                        <a:srgbClr val="D6DCE4"/>
+                      </a:solidFill>
+                      <a:prstDash val="solid"/>
+                      <a:round/>
+                      <a:headEnd type="none" w="med" len="med"/>
+                      <a:tailEnd type="none" w="med" len="med"/>
+                    </a:lnT>
+                    <a:lnB w="9525" cap="flat" cmpd="sng" algn="ctr">
+                      <a:solidFill>
+                        <a:srgbClr val="D6DCE4"/>
+                      </a:solidFill>
+                      <a:prstDash val="solid"/>
+                      <a:round/>
+                      <a:headEnd type="none" w="med" len="med"/>
+                      <a:tailEnd type="none" w="med" len="med"/>
+                    </a:lnB>
+                    <a:solidFill>
+                      <a:srgbClr val="FFFFFF"/>
+                    </a:solidFill>
+                  </a:tcPr>
+                </a:tc>
+              </a:tr>
+              <a:tr h="329184">
+                <a:tc>
+                  <a:txBody>
+                    <a:bodyPr/>
+                    <a:lstStyle/>
+                    <a:p>
+                      <a:pPr indent="0" marL="0">
+                        <a:buNone/>
+                      </a:pPr>
+                      <a:r>
+                        <a:rPr lang="en-US" sz="1200" b="1" dirty="0">
+                          <a:solidFill>
+                            <a:srgbClr val="55606D"/>
+                          </a:solidFill>
+                          <a:latin typeface="Arial" pitchFamily="34" charset="0"/>
+                          <a:ea typeface="Arial" pitchFamily="34" charset="-122"/>
+                          <a:cs typeface="Arial" pitchFamily="34" charset="-120"/>
+                        </a:rPr>
+                        <a:t>S7</a:t>
+                      </a:r>
+                      <a:endParaRPr lang="en-US" sz="1200" dirty="0">
+                        <a:latin typeface="Arial" charset="0"/>
+                        <a:ea typeface="Arial" charset="0"/>
+                        <a:cs typeface="Arial" charset="0"/>
+                      </a:endParaRPr>
+                    </a:p>
+                  </a:txBody>
+                  <a:tcPr marL="45720" marR="45720" marT="45720" marB="45720" anchor="ctr">
+                    <a:lnL w="9525" cap="flat" cmpd="sng" algn="ctr">
+                      <a:solidFill>
+                        <a:srgbClr val="D6DCE4"/>
+                      </a:solidFill>
+                      <a:prstDash val="solid"/>
+                      <a:round/>
+                      <a:headEnd type="none" w="med" len="med"/>
+                      <a:tailEnd type="none" w="med" len="med"/>
+                    </a:lnL>
+                    <a:lnR w="9525" cap="flat" cmpd="sng" algn="ctr">
+                      <a:solidFill>
+                        <a:srgbClr val="D6DCE4"/>
+                      </a:solidFill>
+                      <a:prstDash val="solid"/>
+                      <a:round/>
+                      <a:headEnd type="none" w="med" len="med"/>
+                      <a:tailEnd type="none" w="med" len="med"/>
+                    </a:lnR>
+                    <a:lnT w="9525" cap="flat" cmpd="sng" algn="ctr">
+                      <a:solidFill>
+                        <a:srgbClr val="D6DCE4"/>
+                      </a:solidFill>
+                      <a:prstDash val="solid"/>
+                      <a:round/>
+                      <a:headEnd type="none" w="med" len="med"/>
+                      <a:tailEnd type="none" w="med" len="med"/>
+                    </a:lnT>
+                    <a:lnB w="9525" cap="flat" cmpd="sng" algn="ctr">
+                      <a:solidFill>
+                        <a:srgbClr val="D6DCE4"/>
+                      </a:solidFill>
+                      <a:prstDash val="solid"/>
+                      <a:round/>
+                      <a:headEnd type="none" w="med" len="med"/>
+                      <a:tailEnd type="none" w="med" len="med"/>
+                    </a:lnB>
+                    <a:solidFill>
+                      <a:srgbClr val="FFFFFF"/>
+                    </a:solidFill>
+                  </a:tcPr>
+                </a:tc>
+                <a:tc>
+                  <a:txBody>
+                    <a:bodyPr/>
+                    <a:lstStyle/>
+                    <a:p>
+                      <a:pPr indent="0" marL="0">
+                        <a:buNone/>
+                      </a:pPr>
+                      <a:r>
+                        <a:rPr lang="en-US" sz="1200" dirty="0">
+                          <a:solidFill>
+                            <a:srgbClr val="1F2933"/>
+                          </a:solidFill>
+                          <a:latin typeface="Arial" pitchFamily="34" charset="0"/>
+                          <a:ea typeface="Arial" pitchFamily="34" charset="-122"/>
+                          <a:cs typeface="Arial" pitchFamily="34" charset="-120"/>
+                        </a:rPr>
+                        <a:t>Four-step contract: write the brief, check alignment, plan the work, run it</a:t>
+                      </a:r>
+                      <a:endParaRPr lang="en-US" sz="1200" dirty="0">
+                        <a:latin typeface="Arial" charset="0"/>
+                        <a:ea typeface="Arial" charset="0"/>
+                        <a:cs typeface="Arial" charset="0"/>
+                      </a:endParaRPr>
+                    </a:p>
+                  </a:txBody>
+                  <a:tcPr marL="45720" marR="45720" marT="45720" marB="45720" anchor="ctr">
+                    <a:lnL w="9525" cap="flat" cmpd="sng" algn="ctr">
+                      <a:solidFill>
+                        <a:srgbClr val="D6DCE4"/>
+                      </a:solidFill>
+                      <a:prstDash val="solid"/>
+                      <a:round/>
+                      <a:headEnd type="none" w="med" len="med"/>
+                      <a:tailEnd type="none" w="med" len="med"/>
+                    </a:lnL>
+                    <a:lnR w="9525" cap="flat" cmpd="sng" algn="ctr">
+                      <a:solidFill>
+                        <a:srgbClr val="D6DCE4"/>
+                      </a:solidFill>
+                      <a:prstDash val="solid"/>
+                      <a:round/>
+                      <a:headEnd type="none" w="med" len="med"/>
+                      <a:tailEnd type="none" w="med" len="med"/>
+                    </a:lnR>
+                    <a:lnT w="9525" cap="flat" cmpd="sng" algn="ctr">
+                      <a:solidFill>
+                        <a:srgbClr val="D6DCE4"/>
+                      </a:solidFill>
+                      <a:prstDash val="solid"/>
+                      <a:round/>
+                      <a:headEnd type="none" w="med" len="med"/>
+                      <a:tailEnd type="none" w="med" len="med"/>
+                    </a:lnT>
+                    <a:lnB w="9525" cap="flat" cmpd="sng" algn="ctr">
+                      <a:solidFill>
+                        <a:srgbClr val="D6DCE4"/>
+                      </a:solidFill>
+                      <a:prstDash val="solid"/>
+                      <a:round/>
+                      <a:headEnd type="none" w="med" len="med"/>
+                      <a:tailEnd type="none" w="med" len="med"/>
+                    </a:lnB>
+                    <a:solidFill>
+                      <a:srgbClr val="FFFFFF"/>
+                    </a:solidFill>
+                  </a:tcPr>
+                </a:tc>
+                <a:tc>
+                  <a:txBody>
+                    <a:bodyPr/>
+                    <a:lstStyle/>
+                    <a:p>
+                      <a:pPr indent="0" marL="0">
+                        <a:buNone/>
+                      </a:pPr>
+                      <a:r>
+                        <a:rPr lang="en-US" sz="1200" dirty="0">
+                          <a:solidFill>
+                            <a:srgbClr val="1F2933"/>
+                          </a:solidFill>
+                          <a:latin typeface="Arial" pitchFamily="34" charset="0"/>
+                          <a:ea typeface="Arial" pitchFamily="34" charset="-122"/>
+                          <a:cs typeface="Arial" pitchFamily="34" charset="-120"/>
+                        </a:rPr>
+                        <a:t>docs/helix/01-frame/prd.md#core-workflow-contract</a:t>
+                      </a:r>
+                      <a:endParaRPr lang="en-US" sz="1200" dirty="0">
+                        <a:latin typeface="Arial" charset="0"/>
+                        <a:ea typeface="Arial" charset="0"/>
+                        <a:cs typeface="Arial" charset="0"/>
+                      </a:endParaRPr>
+                    </a:p>
+                  </a:txBody>
+                  <a:tcPr marL="45720" marR="45720" marT="45720" marB="45720" anchor="ctr">
                     <a:lnL w="9525" cap="flat" cmpd="sng" algn="ctr">
                       <a:solidFill>
                         <a:srgbClr val="D6DCE4"/>
@@ -5954,11 +6230,11 @@
             <a:tbl>
               <a:tblPr/>
               <a:tblGrid>
-                <a:gridCol w="548640"/>
-                <a:gridCol w="6538381"/>
-                <a:gridCol w="4007395"/>
+                <a:gridCol w="502920"/>
+                <a:gridCol w="6354897"/>
+                <a:gridCol w="4236598"/>
               </a:tblGrid>
-              <a:tr h="384048">
+              <a:tr h="329184">
                 <a:tc>
                   <a:txBody>
                     <a:bodyPr/>
@@ -5985,7 +6261,7 @@
                       </a:endParaRPr>
                     </a:p>
                   </a:txBody>
-                  <a:tcPr marL="73152" marR="73152" marT="73152" marB="73152" anchor="ctr">
+                  <a:tcPr marL="45720" marR="45720" marT="45720" marB="45720" anchor="ctr">
                     <a:lnL w="9525" cap="flat" cmpd="sng" algn="ctr">
                       <a:solidFill>
                         <a:srgbClr val="D6DCE4"/>
@@ -6053,7 +6329,7 @@
                       </a:endParaRPr>
                     </a:p>
                   </a:txBody>
-                  <a:tcPr marL="73152" marR="73152" marT="73152" marB="73152" anchor="ctr">
+                  <a:tcPr marL="45720" marR="45720" marT="45720" marB="45720" anchor="ctr">
                     <a:lnL w="9525" cap="flat" cmpd="sng" algn="ctr">
                       <a:solidFill>
                         <a:srgbClr val="D6DCE4"/>
@@ -6121,7 +6397,7 @@
                       </a:endParaRPr>
                     </a:p>
                   </a:txBody>
-                  <a:tcPr marL="73152" marR="73152" marT="73152" marB="73152" anchor="ctr">
+                  <a:tcPr marL="45720" marR="45720" marT="45720" marB="45720" anchor="ctr">
                     <a:lnL w="9525" cap="flat" cmpd="sng" algn="ctr">
                       <a:solidFill>
                         <a:srgbClr val="D6DCE4"/>
@@ -6164,213 +6440,7 @@
                   </a:tcPr>
                 </a:tc>
               </a:tr>
-              <a:tr h="384048">
-                <a:tc>
-                  <a:txBody>
-                    <a:bodyPr/>
-                    <a:lstStyle/>
-                    <a:p>
-                      <a:pPr indent="0" marL="0">
-                        <a:buNone/>
-                      </a:pPr>
-                      <a:r>
-                        <a:rPr lang="en-US" sz="1200" b="1" dirty="0">
-                          <a:solidFill>
-                            <a:srgbClr val="55606D"/>
-                          </a:solidFill>
-                          <a:latin typeface="Arial" pitchFamily="34" charset="0"/>
-                          <a:ea typeface="Arial" pitchFamily="34" charset="-122"/>
-                          <a:cs typeface="Arial" pitchFamily="34" charset="-120"/>
-                        </a:rPr>
-                        <a:t>S7</a:t>
-                      </a:r>
-                      <a:endParaRPr lang="en-US" sz="1200" dirty="0">
-                        <a:latin typeface="Arial" charset="0"/>
-                        <a:ea typeface="Arial" charset="0"/>
-                        <a:cs typeface="Arial" charset="0"/>
-                      </a:endParaRPr>
-                    </a:p>
-                  </a:txBody>
-                  <a:tcPr marL="73152" marR="73152" marT="73152" marB="73152" anchor="ctr">
-                    <a:lnL w="9525" cap="flat" cmpd="sng" algn="ctr">
-                      <a:solidFill>
-                        <a:srgbClr val="D6DCE4"/>
-                      </a:solidFill>
-                      <a:prstDash val="solid"/>
-                      <a:round/>
-                      <a:headEnd type="none" w="med" len="med"/>
-                      <a:tailEnd type="none" w="med" len="med"/>
-                    </a:lnL>
-                    <a:lnR w="9525" cap="flat" cmpd="sng" algn="ctr">
-                      <a:solidFill>
-                        <a:srgbClr val="D6DCE4"/>
-                      </a:solidFill>
-                      <a:prstDash val="solid"/>
-                      <a:round/>
-                      <a:headEnd type="none" w="med" len="med"/>
-                      <a:tailEnd type="none" w="med" len="med"/>
-                    </a:lnR>
-                    <a:lnT w="9525" cap="flat" cmpd="sng" algn="ctr">
-                      <a:solidFill>
-                        <a:srgbClr val="D6DCE4"/>
-                      </a:solidFill>
-                      <a:prstDash val="solid"/>
-                      <a:round/>
-                      <a:headEnd type="none" w="med" len="med"/>
-                      <a:tailEnd type="none" w="med" len="med"/>
-                    </a:lnT>
-                    <a:lnB w="9525" cap="flat" cmpd="sng" algn="ctr">
-                      <a:solidFill>
-                        <a:srgbClr val="D6DCE4"/>
-                      </a:solidFill>
-                      <a:prstDash val="solid"/>
-                      <a:round/>
-                      <a:headEnd type="none" w="med" len="med"/>
-                      <a:tailEnd type="none" w="med" len="med"/>
-                    </a:lnB>
-                    <a:solidFill>
-                      <a:srgbClr val="FFFFFF"/>
-                    </a:solidFill>
-                  </a:tcPr>
-                </a:tc>
-                <a:tc>
-                  <a:txBody>
-                    <a:bodyPr/>
-                    <a:lstStyle/>
-                    <a:p>
-                      <a:pPr indent="0" marL="0">
-                        <a:buNone/>
-                      </a:pPr>
-                      <a:r>
-                        <a:rPr lang="en-US" sz="1200" dirty="0">
-                          <a:solidFill>
-                            <a:srgbClr val="1F2933"/>
-                          </a:solidFill>
-                          <a:latin typeface="Arial" pitchFamily="34" charset="0"/>
-                          <a:ea typeface="Arial" pitchFamily="34" charset="-122"/>
-                          <a:cs typeface="Arial" pitchFamily="34" charset="-120"/>
-                        </a:rPr>
-                        <a:t>Four-step contract: write the brief, check alignment, plan the work, run it</a:t>
-                      </a:r>
-                      <a:endParaRPr lang="en-US" sz="1200" dirty="0">
-                        <a:latin typeface="Arial" charset="0"/>
-                        <a:ea typeface="Arial" charset="0"/>
-                        <a:cs typeface="Arial" charset="0"/>
-                      </a:endParaRPr>
-                    </a:p>
-                  </a:txBody>
-                  <a:tcPr marL="73152" marR="73152" marT="73152" marB="73152" anchor="ctr">
-                    <a:lnL w="9525" cap="flat" cmpd="sng" algn="ctr">
-                      <a:solidFill>
-                        <a:srgbClr val="D6DCE4"/>
-                      </a:solidFill>
-                      <a:prstDash val="solid"/>
-                      <a:round/>
-                      <a:headEnd type="none" w="med" len="med"/>
-                      <a:tailEnd type="none" w="med" len="med"/>
-                    </a:lnL>
-                    <a:lnR w="9525" cap="flat" cmpd="sng" algn="ctr">
-                      <a:solidFill>
-                        <a:srgbClr val="D6DCE4"/>
-                      </a:solidFill>
-                      <a:prstDash val="solid"/>
-                      <a:round/>
-                      <a:headEnd type="none" w="med" len="med"/>
-                      <a:tailEnd type="none" w="med" len="med"/>
-                    </a:lnR>
-                    <a:lnT w="9525" cap="flat" cmpd="sng" algn="ctr">
-                      <a:solidFill>
-                        <a:srgbClr val="D6DCE4"/>
-                      </a:solidFill>
-                      <a:prstDash val="solid"/>
-                      <a:round/>
-                      <a:headEnd type="none" w="med" len="med"/>
-                      <a:tailEnd type="none" w="med" len="med"/>
-                    </a:lnT>
-                    <a:lnB w="9525" cap="flat" cmpd="sng" algn="ctr">
-                      <a:solidFill>
-                        <a:srgbClr val="D6DCE4"/>
-                      </a:solidFill>
-                      <a:prstDash val="solid"/>
-                      <a:round/>
-                      <a:headEnd type="none" w="med" len="med"/>
-                      <a:tailEnd type="none" w="med" len="med"/>
-                    </a:lnB>
-                    <a:solidFill>
-                      <a:srgbClr val="FFFFFF"/>
-                    </a:solidFill>
-                  </a:tcPr>
-                </a:tc>
-                <a:tc>
-                  <a:txBody>
-                    <a:bodyPr/>
-                    <a:lstStyle/>
-                    <a:p>
-                      <a:pPr indent="0" marL="0">
-                        <a:buNone/>
-                      </a:pPr>
-                      <a:r>
-                        <a:rPr lang="en-US" sz="1200" dirty="0">
-                          <a:solidFill>
-                            <a:srgbClr val="1F2933"/>
-                          </a:solidFill>
-                          <a:latin typeface="Arial" pitchFamily="34" charset="0"/>
-                          <a:ea typeface="Arial" pitchFamily="34" charset="-122"/>
-                          <a:cs typeface="Arial" pitchFamily="34" charset="-120"/>
-                        </a:rPr>
-                        <a:t>docs/helix/01-frame/prd.md#core-workflow-contract</a:t>
-                      </a:r>
-                      <a:endParaRPr lang="en-US" sz="1200" dirty="0">
-                        <a:latin typeface="Arial" charset="0"/>
-                        <a:ea typeface="Arial" charset="0"/>
-                        <a:cs typeface="Arial" charset="0"/>
-                      </a:endParaRPr>
-                    </a:p>
-                  </a:txBody>
-                  <a:tcPr marL="73152" marR="73152" marT="73152" marB="73152" anchor="ctr">
-                    <a:lnL w="9525" cap="flat" cmpd="sng" algn="ctr">
-                      <a:solidFill>
-                        <a:srgbClr val="D6DCE4"/>
-                      </a:solidFill>
-                      <a:prstDash val="solid"/>
-                      <a:round/>
-                      <a:headEnd type="none" w="med" len="med"/>
-                      <a:tailEnd type="none" w="med" len="med"/>
-                    </a:lnL>
-                    <a:lnR w="9525" cap="flat" cmpd="sng" algn="ctr">
-                      <a:solidFill>
-                        <a:srgbClr val="D6DCE4"/>
-                      </a:solidFill>
-                      <a:prstDash val="solid"/>
-                      <a:round/>
-                      <a:headEnd type="none" w="med" len="med"/>
-                      <a:tailEnd type="none" w="med" len="med"/>
-                    </a:lnR>
-                    <a:lnT w="9525" cap="flat" cmpd="sng" algn="ctr">
-                      <a:solidFill>
-                        <a:srgbClr val="D6DCE4"/>
-                      </a:solidFill>
-                      <a:prstDash val="solid"/>
-                      <a:round/>
-                      <a:headEnd type="none" w="med" len="med"/>
-                      <a:tailEnd type="none" w="med" len="med"/>
-                    </a:lnT>
-                    <a:lnB w="9525" cap="flat" cmpd="sng" algn="ctr">
-                      <a:solidFill>
-                        <a:srgbClr val="D6DCE4"/>
-                      </a:solidFill>
-                      <a:prstDash val="solid"/>
-                      <a:round/>
-                      <a:headEnd type="none" w="med" len="med"/>
-                      <a:tailEnd type="none" w="med" len="med"/>
-                    </a:lnB>
-                    <a:solidFill>
-                      <a:srgbClr val="FFFFFF"/>
-                    </a:solidFill>
-                  </a:tcPr>
-                </a:tc>
-              </a:tr>
-              <a:tr h="566928">
+              <a:tr h="512064">
                 <a:tc>
                   <a:txBody>
                     <a:bodyPr/>
@@ -6397,7 +6467,7 @@
                       </a:endParaRPr>
                     </a:p>
                   </a:txBody>
-                  <a:tcPr marL="73152" marR="73152" marT="73152" marB="73152" anchor="ctr">
+                  <a:tcPr marL="45720" marR="45720" marT="45720" marB="45720" anchor="ctr">
                     <a:lnL w="9525" cap="flat" cmpd="sng" algn="ctr">
                       <a:solidFill>
                         <a:srgbClr val="D6DCE4"/>
@@ -6465,7 +6535,7 @@
                       </a:endParaRPr>
                     </a:p>
                   </a:txBody>
-                  <a:tcPr marL="73152" marR="73152" marT="73152" marB="73152" anchor="ctr">
+                  <a:tcPr marL="45720" marR="45720" marT="45720" marB="45720" anchor="ctr">
                     <a:lnL w="9525" cap="flat" cmpd="sng" algn="ctr">
                       <a:solidFill>
                         <a:srgbClr val="D6DCE4"/>
@@ -6533,7 +6603,7 @@
                       </a:endParaRPr>
                     </a:p>
                   </a:txBody>
-                  <a:tcPr marL="73152" marR="73152" marT="73152" marB="73152" anchor="ctr">
+                  <a:tcPr marL="45720" marR="45720" marT="45720" marB="45720" anchor="ctr">
                     <a:lnL w="9525" cap="flat" cmpd="sng" algn="ctr">
                       <a:solidFill>
                         <a:srgbClr val="D6DCE4"/>
@@ -6576,7 +6646,7 @@
                   </a:tcPr>
                 </a:tc>
               </a:tr>
-              <a:tr h="749808">
+              <a:tr h="512064">
                 <a:tc>
                   <a:txBody>
                     <a:bodyPr/>
@@ -6603,7 +6673,7 @@
                       </a:endParaRPr>
                     </a:p>
                   </a:txBody>
-                  <a:tcPr marL="73152" marR="73152" marT="73152" marB="73152" anchor="ctr">
+                  <a:tcPr marL="45720" marR="45720" marT="45720" marB="45720" anchor="ctr">
                     <a:lnL w="9525" cap="flat" cmpd="sng" algn="ctr">
                       <a:solidFill>
                         <a:srgbClr val="D6DCE4"/>
@@ -6671,7 +6741,7 @@
                       </a:endParaRPr>
                     </a:p>
                   </a:txBody>
-                  <a:tcPr marL="73152" marR="73152" marT="73152" marB="73152" anchor="ctr">
+                  <a:tcPr marL="45720" marR="45720" marT="45720" marB="45720" anchor="ctr">
                     <a:lnL w="9525" cap="flat" cmpd="sng" algn="ctr">
                       <a:solidFill>
                         <a:srgbClr val="D6DCE4"/>
@@ -6739,7 +6809,7 @@
                       </a:endParaRPr>
                     </a:p>
                   </a:txBody>
-                  <a:tcPr marL="73152" marR="73152" marT="73152" marB="73152" anchor="ctr">
+                  <a:tcPr marL="45720" marR="45720" marT="45720" marB="45720" anchor="ctr">
                     <a:lnL w="9525" cap="flat" cmpd="sng" algn="ctr">
                       <a:solidFill>
                         <a:srgbClr val="D6DCE4"/>
@@ -6782,7 +6852,7 @@
                   </a:tcPr>
                 </a:tc>
               </a:tr>
-              <a:tr h="566928">
+              <a:tr h="512064">
                 <a:tc>
                   <a:txBody>
                     <a:bodyPr/>
@@ -6809,7 +6879,7 @@
                       </a:endParaRPr>
                     </a:p>
                   </a:txBody>
-                  <a:tcPr marL="73152" marR="73152" marT="73152" marB="73152" anchor="ctr">
+                  <a:tcPr marL="45720" marR="45720" marT="45720" marB="45720" anchor="ctr">
                     <a:lnL w="9525" cap="flat" cmpd="sng" algn="ctr">
                       <a:solidFill>
                         <a:srgbClr val="D6DCE4"/>
@@ -6877,7 +6947,7 @@
                       </a:endParaRPr>
                     </a:p>
                   </a:txBody>
-                  <a:tcPr marL="73152" marR="73152" marT="73152" marB="73152" anchor="ctr">
+                  <a:tcPr marL="45720" marR="45720" marT="45720" marB="45720" anchor="ctr">
                     <a:lnL w="9525" cap="flat" cmpd="sng" algn="ctr">
                       <a:solidFill>
                         <a:srgbClr val="D6DCE4"/>
@@ -6945,7 +7015,7 @@
                       </a:endParaRPr>
                     </a:p>
                   </a:txBody>
-                  <a:tcPr marL="73152" marR="73152" marT="73152" marB="73152" anchor="ctr">
+                  <a:tcPr marL="45720" marR="45720" marT="45720" marB="45720" anchor="ctr">
                     <a:lnL w="9525" cap="flat" cmpd="sng" algn="ctr">
                       <a:solidFill>
                         <a:srgbClr val="D6DCE4"/>
@@ -6988,7 +7058,7 @@
                   </a:tcPr>
                 </a:tc>
               </a:tr>
-              <a:tr h="566928">
+              <a:tr h="512064">
                 <a:tc>
                   <a:txBody>
                     <a:bodyPr/>
@@ -7015,7 +7085,7 @@
                       </a:endParaRPr>
                     </a:p>
                   </a:txBody>
-                  <a:tcPr marL="73152" marR="73152" marT="73152" marB="73152" anchor="ctr">
+                  <a:tcPr marL="45720" marR="45720" marT="45720" marB="45720" anchor="ctr">
                     <a:lnL w="9525" cap="flat" cmpd="sng" algn="ctr">
                       <a:solidFill>
                         <a:srgbClr val="D6DCE4"/>
@@ -7083,7 +7153,7 @@
                       </a:endParaRPr>
                     </a:p>
                   </a:txBody>
-                  <a:tcPr marL="73152" marR="73152" marT="73152" marB="73152" anchor="ctr">
+                  <a:tcPr marL="45720" marR="45720" marT="45720" marB="45720" anchor="ctr">
                     <a:lnL w="9525" cap="flat" cmpd="sng" algn="ctr">
                       <a:solidFill>
                         <a:srgbClr val="D6DCE4"/>
@@ -7151,7 +7221,7 @@
                       </a:endParaRPr>
                     </a:p>
                   </a:txBody>
-                  <a:tcPr marL="73152" marR="73152" marT="73152" marB="73152" anchor="ctr">
+                  <a:tcPr marL="45720" marR="45720" marT="45720" marB="45720" anchor="ctr">
                     <a:lnL w="9525" cap="flat" cmpd="sng" algn="ctr">
                       <a:solidFill>
                         <a:srgbClr val="D6DCE4"/>
@@ -7194,7 +7264,7 @@
                   </a:tcPr>
                 </a:tc>
               </a:tr>
-              <a:tr h="566928">
+              <a:tr h="512064">
                 <a:tc>
                   <a:txBody>
                     <a:bodyPr/>
@@ -7221,7 +7291,7 @@
                       </a:endParaRPr>
                     </a:p>
                   </a:txBody>
-                  <a:tcPr marL="73152" marR="73152" marT="73152" marB="73152" anchor="ctr">
+                  <a:tcPr marL="45720" marR="45720" marT="45720" marB="45720" anchor="ctr">
                     <a:lnL w="9525" cap="flat" cmpd="sng" algn="ctr">
                       <a:solidFill>
                         <a:srgbClr val="D6DCE4"/>
@@ -7289,7 +7359,7 @@
                       </a:endParaRPr>
                     </a:p>
                   </a:txBody>
-                  <a:tcPr marL="73152" marR="73152" marT="73152" marB="73152" anchor="ctr">
+                  <a:tcPr marL="45720" marR="45720" marT="45720" marB="45720" anchor="ctr">
                     <a:lnL w="9525" cap="flat" cmpd="sng" algn="ctr">
                       <a:solidFill>
                         <a:srgbClr val="D6DCE4"/>
@@ -7357,7 +7427,213 @@
                       </a:endParaRPr>
                     </a:p>
                   </a:txBody>
-                  <a:tcPr marL="73152" marR="73152" marT="73152" marB="73152" anchor="ctr">
+                  <a:tcPr marL="45720" marR="45720" marT="45720" marB="45720" anchor="ctr">
+                    <a:lnL w="9525" cap="flat" cmpd="sng" algn="ctr">
+                      <a:solidFill>
+                        <a:srgbClr val="D6DCE4"/>
+                      </a:solidFill>
+                      <a:prstDash val="solid"/>
+                      <a:round/>
+                      <a:headEnd type="none" w="med" len="med"/>
+                      <a:tailEnd type="none" w="med" len="med"/>
+                    </a:lnL>
+                    <a:lnR w="9525" cap="flat" cmpd="sng" algn="ctr">
+                      <a:solidFill>
+                        <a:srgbClr val="D6DCE4"/>
+                      </a:solidFill>
+                      <a:prstDash val="solid"/>
+                      <a:round/>
+                      <a:headEnd type="none" w="med" len="med"/>
+                      <a:tailEnd type="none" w="med" len="med"/>
+                    </a:lnR>
+                    <a:lnT w="9525" cap="flat" cmpd="sng" algn="ctr">
+                      <a:solidFill>
+                        <a:srgbClr val="D6DCE4"/>
+                      </a:solidFill>
+                      <a:prstDash val="solid"/>
+                      <a:round/>
+                      <a:headEnd type="none" w="med" len="med"/>
+                      <a:tailEnd type="none" w="med" len="med"/>
+                    </a:lnT>
+                    <a:lnB w="9525" cap="flat" cmpd="sng" algn="ctr">
+                      <a:solidFill>
+                        <a:srgbClr val="D6DCE4"/>
+                      </a:solidFill>
+                      <a:prstDash val="solid"/>
+                      <a:round/>
+                      <a:headEnd type="none" w="med" len="med"/>
+                      <a:tailEnd type="none" w="med" len="med"/>
+                    </a:lnB>
+                    <a:solidFill>
+                      <a:srgbClr val="FFFFFF"/>
+                    </a:solidFill>
+                  </a:tcPr>
+                </a:tc>
+              </a:tr>
+              <a:tr h="512064">
+                <a:tc>
+                  <a:txBody>
+                    <a:bodyPr/>
+                    <a:lstStyle/>
+                    <a:p>
+                      <a:pPr indent="0" marL="0">
+                        <a:buNone/>
+                      </a:pPr>
+                      <a:r>
+                        <a:rPr lang="en-US" sz="1200" b="1" dirty="0">
+                          <a:solidFill>
+                            <a:srgbClr val="55606D"/>
+                          </a:solidFill>
+                          <a:latin typeface="Arial" pitchFamily="34" charset="0"/>
+                          <a:ea typeface="Arial" pitchFamily="34" charset="-122"/>
+                          <a:cs typeface="Arial" pitchFamily="34" charset="-120"/>
+                        </a:rPr>
+                        <a:t>S13</a:t>
+                      </a:r>
+                      <a:endParaRPr lang="en-US" sz="1200" dirty="0">
+                        <a:latin typeface="Arial" charset="0"/>
+                        <a:ea typeface="Arial" charset="0"/>
+                        <a:cs typeface="Arial" charset="0"/>
+                      </a:endParaRPr>
+                    </a:p>
+                  </a:txBody>
+                  <a:tcPr marL="45720" marR="45720" marT="45720" marB="45720" anchor="ctr">
+                    <a:lnL w="9525" cap="flat" cmpd="sng" algn="ctr">
+                      <a:solidFill>
+                        <a:srgbClr val="D6DCE4"/>
+                      </a:solidFill>
+                      <a:prstDash val="solid"/>
+                      <a:round/>
+                      <a:headEnd type="none" w="med" len="med"/>
+                      <a:tailEnd type="none" w="med" len="med"/>
+                    </a:lnL>
+                    <a:lnR w="9525" cap="flat" cmpd="sng" algn="ctr">
+                      <a:solidFill>
+                        <a:srgbClr val="D6DCE4"/>
+                      </a:solidFill>
+                      <a:prstDash val="solid"/>
+                      <a:round/>
+                      <a:headEnd type="none" w="med" len="med"/>
+                      <a:tailEnd type="none" w="med" len="med"/>
+                    </a:lnR>
+                    <a:lnT w="9525" cap="flat" cmpd="sng" algn="ctr">
+                      <a:solidFill>
+                        <a:srgbClr val="D6DCE4"/>
+                      </a:solidFill>
+                      <a:prstDash val="solid"/>
+                      <a:round/>
+                      <a:headEnd type="none" w="med" len="med"/>
+                      <a:tailEnd type="none" w="med" len="med"/>
+                    </a:lnT>
+                    <a:lnB w="9525" cap="flat" cmpd="sng" algn="ctr">
+                      <a:solidFill>
+                        <a:srgbClr val="D6DCE4"/>
+                      </a:solidFill>
+                      <a:prstDash val="solid"/>
+                      <a:round/>
+                      <a:headEnd type="none" w="med" len="med"/>
+                      <a:tailEnd type="none" w="med" len="med"/>
+                    </a:lnB>
+                    <a:solidFill>
+                      <a:srgbClr val="FFFFFF"/>
+                    </a:solidFill>
+                  </a:tcPr>
+                </a:tc>
+                <a:tc>
+                  <a:txBody>
+                    <a:bodyPr/>
+                    <a:lstStyle/>
+                    <a:p>
+                      <a:pPr indent="0" marL="0">
+                        <a:buNone/>
+                      </a:pPr>
+                      <a:r>
+                        <a:rPr lang="en-US" sz="1200" dirty="0">
+                          <a:solidFill>
+                            <a:srgbClr val="1F2933"/>
+                          </a:solidFill>
+                          <a:latin typeface="Arial" pitchFamily="34" charset="0"/>
+                          <a:ea typeface="Arial" pitchFamily="34" charset="-122"/>
+                          <a:cs typeface="Arial" pitchFamily="34" charset="-120"/>
+                        </a:rPr>
+                        <a:t>Non-goals: no CLI, tracker, queue, or engine; no imposed technology; judgment stays with people</a:t>
+                      </a:r>
+                      <a:endParaRPr lang="en-US" sz="1200" dirty="0">
+                        <a:latin typeface="Arial" charset="0"/>
+                        <a:ea typeface="Arial" charset="0"/>
+                        <a:cs typeface="Arial" charset="0"/>
+                      </a:endParaRPr>
+                    </a:p>
+                  </a:txBody>
+                  <a:tcPr marL="45720" marR="45720" marT="45720" marB="45720" anchor="ctr">
+                    <a:lnL w="9525" cap="flat" cmpd="sng" algn="ctr">
+                      <a:solidFill>
+                        <a:srgbClr val="D6DCE4"/>
+                      </a:solidFill>
+                      <a:prstDash val="solid"/>
+                      <a:round/>
+                      <a:headEnd type="none" w="med" len="med"/>
+                      <a:tailEnd type="none" w="med" len="med"/>
+                    </a:lnL>
+                    <a:lnR w="9525" cap="flat" cmpd="sng" algn="ctr">
+                      <a:solidFill>
+                        <a:srgbClr val="D6DCE4"/>
+                      </a:solidFill>
+                      <a:prstDash val="solid"/>
+                      <a:round/>
+                      <a:headEnd type="none" w="med" len="med"/>
+                      <a:tailEnd type="none" w="med" len="med"/>
+                    </a:lnR>
+                    <a:lnT w="9525" cap="flat" cmpd="sng" algn="ctr">
+                      <a:solidFill>
+                        <a:srgbClr val="D6DCE4"/>
+                      </a:solidFill>
+                      <a:prstDash val="solid"/>
+                      <a:round/>
+                      <a:headEnd type="none" w="med" len="med"/>
+                      <a:tailEnd type="none" w="med" len="med"/>
+                    </a:lnT>
+                    <a:lnB w="9525" cap="flat" cmpd="sng" algn="ctr">
+                      <a:solidFill>
+                        <a:srgbClr val="D6DCE4"/>
+                      </a:solidFill>
+                      <a:prstDash val="solid"/>
+                      <a:round/>
+                      <a:headEnd type="none" w="med" len="med"/>
+                      <a:tailEnd type="none" w="med" len="med"/>
+                    </a:lnB>
+                    <a:solidFill>
+                      <a:srgbClr val="FFFFFF"/>
+                    </a:solidFill>
+                  </a:tcPr>
+                </a:tc>
+                <a:tc>
+                  <a:txBody>
+                    <a:bodyPr/>
+                    <a:lstStyle/>
+                    <a:p>
+                      <a:pPr indent="0" marL="0">
+                        <a:buNone/>
+                      </a:pPr>
+                      <a:r>
+                        <a:rPr lang="en-US" sz="1200" dirty="0">
+                          <a:solidFill>
+                            <a:srgbClr val="1F2933"/>
+                          </a:solidFill>
+                          <a:latin typeface="Arial" pitchFamily="34" charset="0"/>
+                          <a:ea typeface="Arial" pitchFamily="34" charset="-122"/>
+                          <a:cs typeface="Arial" pitchFamily="34" charset="-120"/>
+                        </a:rPr>
+                        <a:t>docs/helix/01-frame/prd.md#non-goals</a:t>
+                      </a:r>
+                      <a:endParaRPr lang="en-US" sz="1200" dirty="0">
+                        <a:latin typeface="Arial" charset="0"/>
+                        <a:ea typeface="Arial" charset="0"/>
+                        <a:cs typeface="Arial" charset="0"/>
+                      </a:endParaRPr>
+                    </a:p>
+                  </a:txBody>
+                  <a:tcPr marL="45720" marR="45720" marT="45720" marB="45720" anchor="ctr">
                     <a:lnL w="9525" cap="flat" cmpd="sng" algn="ctr">
                       <a:solidFill>
                         <a:srgbClr val="D6DCE4"/>
@@ -7539,11 +7815,11 @@
             <a:tbl>
               <a:tblPr/>
               <a:tblGrid>
-                <a:gridCol w="548640"/>
-                <a:gridCol w="6538381"/>
-                <a:gridCol w="4007395"/>
+                <a:gridCol w="502920"/>
+                <a:gridCol w="6354897"/>
+                <a:gridCol w="4236598"/>
               </a:tblGrid>
-              <a:tr h="384048">
+              <a:tr h="329184">
                 <a:tc>
                   <a:txBody>
                     <a:bodyPr/>
@@ -7570,7 +7846,7 @@
                       </a:endParaRPr>
                     </a:p>
                   </a:txBody>
-                  <a:tcPr marL="73152" marR="73152" marT="73152" marB="73152" anchor="ctr">
+                  <a:tcPr marL="45720" marR="45720" marT="45720" marB="45720" anchor="ctr">
                     <a:lnL w="9525" cap="flat" cmpd="sng" algn="ctr">
                       <a:solidFill>
                         <a:srgbClr val="D6DCE4"/>
@@ -7638,7 +7914,7 @@
                       </a:endParaRPr>
                     </a:p>
                   </a:txBody>
-                  <a:tcPr marL="73152" marR="73152" marT="73152" marB="73152" anchor="ctr">
+                  <a:tcPr marL="45720" marR="45720" marT="45720" marB="45720" anchor="ctr">
                     <a:lnL w="9525" cap="flat" cmpd="sng" algn="ctr">
                       <a:solidFill>
                         <a:srgbClr val="D6DCE4"/>
@@ -7706,7 +7982,7 @@
                       </a:endParaRPr>
                     </a:p>
                   </a:txBody>
-                  <a:tcPr marL="73152" marR="73152" marT="73152" marB="73152" anchor="ctr">
+                  <a:tcPr marL="45720" marR="45720" marT="45720" marB="45720" anchor="ctr">
                     <a:lnL w="9525" cap="flat" cmpd="sng" algn="ctr">
                       <a:solidFill>
                         <a:srgbClr val="D6DCE4"/>
@@ -7749,213 +8025,7 @@
                   </a:tcPr>
                 </a:tc>
               </a:tr>
-              <a:tr h="566928">
-                <a:tc>
-                  <a:txBody>
-                    <a:bodyPr/>
-                    <a:lstStyle/>
-                    <a:p>
-                      <a:pPr indent="0" marL="0">
-                        <a:buNone/>
-                      </a:pPr>
-                      <a:r>
-                        <a:rPr lang="en-US" sz="1200" b="1" dirty="0">
-                          <a:solidFill>
-                            <a:srgbClr val="55606D"/>
-                          </a:solidFill>
-                          <a:latin typeface="Arial" pitchFamily="34" charset="0"/>
-                          <a:ea typeface="Arial" pitchFamily="34" charset="-122"/>
-                          <a:cs typeface="Arial" pitchFamily="34" charset="-120"/>
-                        </a:rPr>
-                        <a:t>S13</a:t>
-                      </a:r>
-                      <a:endParaRPr lang="en-US" sz="1200" dirty="0">
-                        <a:latin typeface="Arial" charset="0"/>
-                        <a:ea typeface="Arial" charset="0"/>
-                        <a:cs typeface="Arial" charset="0"/>
-                      </a:endParaRPr>
-                    </a:p>
-                  </a:txBody>
-                  <a:tcPr marL="73152" marR="73152" marT="73152" marB="73152" anchor="ctr">
-                    <a:lnL w="9525" cap="flat" cmpd="sng" algn="ctr">
-                      <a:solidFill>
-                        <a:srgbClr val="D6DCE4"/>
-                      </a:solidFill>
-                      <a:prstDash val="solid"/>
-                      <a:round/>
-                      <a:headEnd type="none" w="med" len="med"/>
-                      <a:tailEnd type="none" w="med" len="med"/>
-                    </a:lnL>
-                    <a:lnR w="9525" cap="flat" cmpd="sng" algn="ctr">
-                      <a:solidFill>
-                        <a:srgbClr val="D6DCE4"/>
-                      </a:solidFill>
-                      <a:prstDash val="solid"/>
-                      <a:round/>
-                      <a:headEnd type="none" w="med" len="med"/>
-                      <a:tailEnd type="none" w="med" len="med"/>
-                    </a:lnR>
-                    <a:lnT w="9525" cap="flat" cmpd="sng" algn="ctr">
-                      <a:solidFill>
-                        <a:srgbClr val="D6DCE4"/>
-                      </a:solidFill>
-                      <a:prstDash val="solid"/>
-                      <a:round/>
-                      <a:headEnd type="none" w="med" len="med"/>
-                      <a:tailEnd type="none" w="med" len="med"/>
-                    </a:lnT>
-                    <a:lnB w="9525" cap="flat" cmpd="sng" algn="ctr">
-                      <a:solidFill>
-                        <a:srgbClr val="D6DCE4"/>
-                      </a:solidFill>
-                      <a:prstDash val="solid"/>
-                      <a:round/>
-                      <a:headEnd type="none" w="med" len="med"/>
-                      <a:tailEnd type="none" w="med" len="med"/>
-                    </a:lnB>
-                    <a:solidFill>
-                      <a:srgbClr val="FFFFFF"/>
-                    </a:solidFill>
-                  </a:tcPr>
-                </a:tc>
-                <a:tc>
-                  <a:txBody>
-                    <a:bodyPr/>
-                    <a:lstStyle/>
-                    <a:p>
-                      <a:pPr indent="0" marL="0">
-                        <a:buNone/>
-                      </a:pPr>
-                      <a:r>
-                        <a:rPr lang="en-US" sz="1200" dirty="0">
-                          <a:solidFill>
-                            <a:srgbClr val="1F2933"/>
-                          </a:solidFill>
-                          <a:latin typeface="Arial" pitchFamily="34" charset="0"/>
-                          <a:ea typeface="Arial" pitchFamily="34" charset="-122"/>
-                          <a:cs typeface="Arial" pitchFamily="34" charset="-120"/>
-                        </a:rPr>
-                        <a:t>Non-goals: no CLI, tracker, queue, or engine; no imposed technology; judgment stays with people</a:t>
-                      </a:r>
-                      <a:endParaRPr lang="en-US" sz="1200" dirty="0">
-                        <a:latin typeface="Arial" charset="0"/>
-                        <a:ea typeface="Arial" charset="0"/>
-                        <a:cs typeface="Arial" charset="0"/>
-                      </a:endParaRPr>
-                    </a:p>
-                  </a:txBody>
-                  <a:tcPr marL="73152" marR="73152" marT="73152" marB="73152" anchor="ctr">
-                    <a:lnL w="9525" cap="flat" cmpd="sng" algn="ctr">
-                      <a:solidFill>
-                        <a:srgbClr val="D6DCE4"/>
-                      </a:solidFill>
-                      <a:prstDash val="solid"/>
-                      <a:round/>
-                      <a:headEnd type="none" w="med" len="med"/>
-                      <a:tailEnd type="none" w="med" len="med"/>
-                    </a:lnL>
-                    <a:lnR w="9525" cap="flat" cmpd="sng" algn="ctr">
-                      <a:solidFill>
-                        <a:srgbClr val="D6DCE4"/>
-                      </a:solidFill>
-                      <a:prstDash val="solid"/>
-                      <a:round/>
-                      <a:headEnd type="none" w="med" len="med"/>
-                      <a:tailEnd type="none" w="med" len="med"/>
-                    </a:lnR>
-                    <a:lnT w="9525" cap="flat" cmpd="sng" algn="ctr">
-                      <a:solidFill>
-                        <a:srgbClr val="D6DCE4"/>
-                      </a:solidFill>
-                      <a:prstDash val="solid"/>
-                      <a:round/>
-                      <a:headEnd type="none" w="med" len="med"/>
-                      <a:tailEnd type="none" w="med" len="med"/>
-                    </a:lnT>
-                    <a:lnB w="9525" cap="flat" cmpd="sng" algn="ctr">
-                      <a:solidFill>
-                        <a:srgbClr val="D6DCE4"/>
-                      </a:solidFill>
-                      <a:prstDash val="solid"/>
-                      <a:round/>
-                      <a:headEnd type="none" w="med" len="med"/>
-                      <a:tailEnd type="none" w="med" len="med"/>
-                    </a:lnB>
-                    <a:solidFill>
-                      <a:srgbClr val="FFFFFF"/>
-                    </a:solidFill>
-                  </a:tcPr>
-                </a:tc>
-                <a:tc>
-                  <a:txBody>
-                    <a:bodyPr/>
-                    <a:lstStyle/>
-                    <a:p>
-                      <a:pPr indent="0" marL="0">
-                        <a:buNone/>
-                      </a:pPr>
-                      <a:r>
-                        <a:rPr lang="en-US" sz="1200" dirty="0">
-                          <a:solidFill>
-                            <a:srgbClr val="1F2933"/>
-                          </a:solidFill>
-                          <a:latin typeface="Arial" pitchFamily="34" charset="0"/>
-                          <a:ea typeface="Arial" pitchFamily="34" charset="-122"/>
-                          <a:cs typeface="Arial" pitchFamily="34" charset="-120"/>
-                        </a:rPr>
-                        <a:t>docs/helix/01-frame/prd.md#non-goals</a:t>
-                      </a:r>
-                      <a:endParaRPr lang="en-US" sz="1200" dirty="0">
-                        <a:latin typeface="Arial" charset="0"/>
-                        <a:ea typeface="Arial" charset="0"/>
-                        <a:cs typeface="Arial" charset="0"/>
-                      </a:endParaRPr>
-                    </a:p>
-                  </a:txBody>
-                  <a:tcPr marL="73152" marR="73152" marT="73152" marB="73152" anchor="ctr">
-                    <a:lnL w="9525" cap="flat" cmpd="sng" algn="ctr">
-                      <a:solidFill>
-                        <a:srgbClr val="D6DCE4"/>
-                      </a:solidFill>
-                      <a:prstDash val="solid"/>
-                      <a:round/>
-                      <a:headEnd type="none" w="med" len="med"/>
-                      <a:tailEnd type="none" w="med" len="med"/>
-                    </a:lnL>
-                    <a:lnR w="9525" cap="flat" cmpd="sng" algn="ctr">
-                      <a:solidFill>
-                        <a:srgbClr val="D6DCE4"/>
-                      </a:solidFill>
-                      <a:prstDash val="solid"/>
-                      <a:round/>
-                      <a:headEnd type="none" w="med" len="med"/>
-                      <a:tailEnd type="none" w="med" len="med"/>
-                    </a:lnR>
-                    <a:lnT w="9525" cap="flat" cmpd="sng" algn="ctr">
-                      <a:solidFill>
-                        <a:srgbClr val="D6DCE4"/>
-                      </a:solidFill>
-                      <a:prstDash val="solid"/>
-                      <a:round/>
-                      <a:headEnd type="none" w="med" len="med"/>
-                      <a:tailEnd type="none" w="med" len="med"/>
-                    </a:lnT>
-                    <a:lnB w="9525" cap="flat" cmpd="sng" algn="ctr">
-                      <a:solidFill>
-                        <a:srgbClr val="D6DCE4"/>
-                      </a:solidFill>
-                      <a:prstDash val="solid"/>
-                      <a:round/>
-                      <a:headEnd type="none" w="med" len="med"/>
-                      <a:tailEnd type="none" w="med" len="med"/>
-                    </a:lnB>
-                    <a:solidFill>
-                      <a:srgbClr val="FFFFFF"/>
-                    </a:solidFill>
-                  </a:tcPr>
-                </a:tc>
-              </a:tr>
-              <a:tr h="566928">
+              <a:tr h="512064">
                 <a:tc>
                   <a:txBody>
                     <a:bodyPr/>
@@ -7982,7 +8052,7 @@
                       </a:endParaRPr>
                     </a:p>
                   </a:txBody>
-                  <a:tcPr marL="73152" marR="73152" marT="73152" marB="73152" anchor="ctr">
+                  <a:tcPr marL="45720" marR="45720" marT="45720" marB="45720" anchor="ctr">
                     <a:lnL w="9525" cap="flat" cmpd="sng" algn="ctr">
                       <a:solidFill>
                         <a:srgbClr val="D6DCE4"/>
@@ -8050,7 +8120,7 @@
                       </a:endParaRPr>
                     </a:p>
                   </a:txBody>
-                  <a:tcPr marL="73152" marR="73152" marT="73152" marB="73152" anchor="ctr">
+                  <a:tcPr marL="45720" marR="45720" marT="45720" marB="45720" anchor="ctr">
                     <a:lnL w="9525" cap="flat" cmpd="sng" algn="ctr">
                       <a:solidFill>
                         <a:srgbClr val="D6DCE4"/>
@@ -8118,7 +8188,7 @@
                       </a:endParaRPr>
                     </a:p>
                   </a:txBody>
-                  <a:tcPr marL="73152" marR="73152" marT="73152" marB="73152" anchor="ctr">
+                  <a:tcPr marL="45720" marR="45720" marT="45720" marB="45720" anchor="ctr">
                     <a:lnL w="9525" cap="flat" cmpd="sng" algn="ctr">
                       <a:solidFill>
                         <a:srgbClr val="D6DCE4"/>
@@ -8161,7 +8231,7 @@
                   </a:tcPr>
                 </a:tc>
               </a:tr>
-              <a:tr h="384048">
+              <a:tr h="329184">
                 <a:tc>
                   <a:txBody>
                     <a:bodyPr/>
@@ -8188,7 +8258,7 @@
                       </a:endParaRPr>
                     </a:p>
                   </a:txBody>
-                  <a:tcPr marL="73152" marR="73152" marT="73152" marB="73152" anchor="ctr">
+                  <a:tcPr marL="45720" marR="45720" marT="45720" marB="45720" anchor="ctr">
                     <a:lnL w="9525" cap="flat" cmpd="sng" algn="ctr">
                       <a:solidFill>
                         <a:srgbClr val="D6DCE4"/>
@@ -8256,7 +8326,7 @@
                       </a:endParaRPr>
                     </a:p>
                   </a:txBody>
-                  <a:tcPr marL="73152" marR="73152" marT="73152" marB="73152" anchor="ctr">
+                  <a:tcPr marL="45720" marR="45720" marT="45720" marB="45720" anchor="ctr">
                     <a:lnL w="9525" cap="flat" cmpd="sng" algn="ctr">
                       <a:solidFill>
                         <a:srgbClr val="D6DCE4"/>
@@ -8324,7 +8394,7 @@
                       </a:endParaRPr>
                     </a:p>
                   </a:txBody>
-                  <a:tcPr marL="73152" marR="73152" marT="73152" marB="73152" anchor="ctr">
+                  <a:tcPr marL="45720" marR="45720" marT="45720" marB="45720" anchor="ctr">
                     <a:lnL w="9525" cap="flat" cmpd="sng" algn="ctr">
                       <a:solidFill>
                         <a:srgbClr val="D6DCE4"/>
@@ -8367,7 +8437,7 @@
                   </a:tcPr>
                 </a:tc>
               </a:tr>
-              <a:tr h="566928">
+              <a:tr h="512064">
                 <a:tc>
                   <a:txBody>
                     <a:bodyPr/>
@@ -8394,7 +8464,7 @@
                       </a:endParaRPr>
                     </a:p>
                   </a:txBody>
-                  <a:tcPr marL="73152" marR="73152" marT="73152" marB="73152" anchor="ctr">
+                  <a:tcPr marL="45720" marR="45720" marT="45720" marB="45720" anchor="ctr">
                     <a:lnL w="9525" cap="flat" cmpd="sng" algn="ctr">
                       <a:solidFill>
                         <a:srgbClr val="D6DCE4"/>
@@ -8462,7 +8532,7 @@
                       </a:endParaRPr>
                     </a:p>
                   </a:txBody>
-                  <a:tcPr marL="73152" marR="73152" marT="73152" marB="73152" anchor="ctr">
+                  <a:tcPr marL="45720" marR="45720" marT="45720" marB="45720" anchor="ctr">
                     <a:lnL w="9525" cap="flat" cmpd="sng" algn="ctr">
                       <a:solidFill>
                         <a:srgbClr val="D6DCE4"/>
@@ -8530,7 +8600,7 @@
                       </a:endParaRPr>
                     </a:p>
                   </a:txBody>
-                  <a:tcPr marL="73152" marR="73152" marT="73152" marB="73152" anchor="ctr">
+                  <a:tcPr marL="45720" marR="45720" marT="45720" marB="45720" anchor="ctr">
                     <a:lnL w="9525" cap="flat" cmpd="sng" algn="ctr">
                       <a:solidFill>
                         <a:srgbClr val="D6DCE4"/>
@@ -8573,7 +8643,7 @@
                   </a:tcPr>
                 </a:tc>
               </a:tr>
-              <a:tr h="566928">
+              <a:tr h="512064">
                 <a:tc>
                   <a:txBody>
                     <a:bodyPr/>
@@ -8600,7 +8670,7 @@
                       </a:endParaRPr>
                     </a:p>
                   </a:txBody>
-                  <a:tcPr marL="73152" marR="73152" marT="73152" marB="73152" anchor="ctr">
+                  <a:tcPr marL="45720" marR="45720" marT="45720" marB="45720" anchor="ctr">
                     <a:lnL w="9525" cap="flat" cmpd="sng" algn="ctr">
                       <a:solidFill>
                         <a:srgbClr val="D6DCE4"/>
@@ -8668,7 +8738,7 @@
                       </a:endParaRPr>
                     </a:p>
                   </a:txBody>
-                  <a:tcPr marL="73152" marR="73152" marT="73152" marB="73152" anchor="ctr">
+                  <a:tcPr marL="45720" marR="45720" marT="45720" marB="45720" anchor="ctr">
                     <a:lnL w="9525" cap="flat" cmpd="sng" algn="ctr">
                       <a:solidFill>
                         <a:srgbClr val="D6DCE4"/>
@@ -8736,7 +8806,7 @@
                       </a:endParaRPr>
                     </a:p>
                   </a:txBody>
-                  <a:tcPr marL="73152" marR="73152" marT="73152" marB="73152" anchor="ctr">
+                  <a:tcPr marL="45720" marR="45720" marT="45720" marB="45720" anchor="ctr">
                     <a:lnL w="9525" cap="flat" cmpd="sng" algn="ctr">
                       <a:solidFill>
                         <a:srgbClr val="D6DCE4"/>
@@ -8779,7 +8849,7 @@
                   </a:tcPr>
                 </a:tc>
               </a:tr>
-              <a:tr h="566928">
+              <a:tr h="512064">
                 <a:tc>
                   <a:txBody>
                     <a:bodyPr/>
@@ -8806,7 +8876,7 @@
                       </a:endParaRPr>
                     </a:p>
                   </a:txBody>
-                  <a:tcPr marL="73152" marR="73152" marT="73152" marB="73152" anchor="ctr">
+                  <a:tcPr marL="45720" marR="45720" marT="45720" marB="45720" anchor="ctr">
                     <a:lnL w="9525" cap="flat" cmpd="sng" algn="ctr">
                       <a:solidFill>
                         <a:srgbClr val="D6DCE4"/>
@@ -8874,7 +8944,7 @@
                       </a:endParaRPr>
                     </a:p>
                   </a:txBody>
-                  <a:tcPr marL="73152" marR="73152" marT="73152" marB="73152" anchor="ctr">
+                  <a:tcPr marL="45720" marR="45720" marT="45720" marB="45720" anchor="ctr">
                     <a:lnL w="9525" cap="flat" cmpd="sng" algn="ctr">
                       <a:solidFill>
                         <a:srgbClr val="D6DCE4"/>
@@ -8942,7 +9012,419 @@
                       </a:endParaRPr>
                     </a:p>
                   </a:txBody>
-                  <a:tcPr marL="73152" marR="73152" marT="73152" marB="73152" anchor="ctr">
+                  <a:tcPr marL="45720" marR="45720" marT="45720" marB="45720" anchor="ctr">
+                    <a:lnL w="9525" cap="flat" cmpd="sng" algn="ctr">
+                      <a:solidFill>
+                        <a:srgbClr val="D6DCE4"/>
+                      </a:solidFill>
+                      <a:prstDash val="solid"/>
+                      <a:round/>
+                      <a:headEnd type="none" w="med" len="med"/>
+                      <a:tailEnd type="none" w="med" len="med"/>
+                    </a:lnL>
+                    <a:lnR w="9525" cap="flat" cmpd="sng" algn="ctr">
+                      <a:solidFill>
+                        <a:srgbClr val="D6DCE4"/>
+                      </a:solidFill>
+                      <a:prstDash val="solid"/>
+                      <a:round/>
+                      <a:headEnd type="none" w="med" len="med"/>
+                      <a:tailEnd type="none" w="med" len="med"/>
+                    </a:lnR>
+                    <a:lnT w="9525" cap="flat" cmpd="sng" algn="ctr">
+                      <a:solidFill>
+                        <a:srgbClr val="D6DCE4"/>
+                      </a:solidFill>
+                      <a:prstDash val="solid"/>
+                      <a:round/>
+                      <a:headEnd type="none" w="med" len="med"/>
+                      <a:tailEnd type="none" w="med" len="med"/>
+                    </a:lnT>
+                    <a:lnB w="9525" cap="flat" cmpd="sng" algn="ctr">
+                      <a:solidFill>
+                        <a:srgbClr val="D6DCE4"/>
+                      </a:solidFill>
+                      <a:prstDash val="solid"/>
+                      <a:round/>
+                      <a:headEnd type="none" w="med" len="med"/>
+                      <a:tailEnd type="none" w="med" len="med"/>
+                    </a:lnB>
+                    <a:solidFill>
+                      <a:srgbClr val="FFFFFF"/>
+                    </a:solidFill>
+                  </a:tcPr>
+                </a:tc>
+              </a:tr>
+              <a:tr h="512064">
+                <a:tc>
+                  <a:txBody>
+                    <a:bodyPr/>
+                    <a:lstStyle/>
+                    <a:p>
+                      <a:pPr indent="0" marL="0">
+                        <a:buNone/>
+                      </a:pPr>
+                      <a:r>
+                        <a:rPr lang="en-US" sz="1200" b="1" dirty="0">
+                          <a:solidFill>
+                            <a:srgbClr val="55606D"/>
+                          </a:solidFill>
+                          <a:latin typeface="Arial" pitchFamily="34" charset="0"/>
+                          <a:ea typeface="Arial" pitchFamily="34" charset="-122"/>
+                          <a:cs typeface="Arial" pitchFamily="34" charset="-120"/>
+                        </a:rPr>
+                        <a:t>S19</a:t>
+                      </a:r>
+                      <a:endParaRPr lang="en-US" sz="1200" dirty="0">
+                        <a:latin typeface="Arial" charset="0"/>
+                        <a:ea typeface="Arial" charset="0"/>
+                        <a:cs typeface="Arial" charset="0"/>
+                      </a:endParaRPr>
+                    </a:p>
+                  </a:txBody>
+                  <a:tcPr marL="45720" marR="45720" marT="45720" marB="45720" anchor="ctr">
+                    <a:lnL w="9525" cap="flat" cmpd="sng" algn="ctr">
+                      <a:solidFill>
+                        <a:srgbClr val="D6DCE4"/>
+                      </a:solidFill>
+                      <a:prstDash val="solid"/>
+                      <a:round/>
+                      <a:headEnd type="none" w="med" len="med"/>
+                      <a:tailEnd type="none" w="med" len="med"/>
+                    </a:lnL>
+                    <a:lnR w="9525" cap="flat" cmpd="sng" algn="ctr">
+                      <a:solidFill>
+                        <a:srgbClr val="D6DCE4"/>
+                      </a:solidFill>
+                      <a:prstDash val="solid"/>
+                      <a:round/>
+                      <a:headEnd type="none" w="med" len="med"/>
+                      <a:tailEnd type="none" w="med" len="med"/>
+                    </a:lnR>
+                    <a:lnT w="9525" cap="flat" cmpd="sng" algn="ctr">
+                      <a:solidFill>
+                        <a:srgbClr val="D6DCE4"/>
+                      </a:solidFill>
+                      <a:prstDash val="solid"/>
+                      <a:round/>
+                      <a:headEnd type="none" w="med" len="med"/>
+                      <a:tailEnd type="none" w="med" len="med"/>
+                    </a:lnT>
+                    <a:lnB w="9525" cap="flat" cmpd="sng" algn="ctr">
+                      <a:solidFill>
+                        <a:srgbClr val="D6DCE4"/>
+                      </a:solidFill>
+                      <a:prstDash val="solid"/>
+                      <a:round/>
+                      <a:headEnd type="none" w="med" len="med"/>
+                      <a:tailEnd type="none" w="med" len="med"/>
+                    </a:lnB>
+                    <a:solidFill>
+                      <a:srgbClr val="FFFFFF"/>
+                    </a:solidFill>
+                  </a:tcPr>
+                </a:tc>
+                <a:tc>
+                  <a:txBody>
+                    <a:bodyPr/>
+                    <a:lstStyle/>
+                    <a:p>
+                      <a:pPr indent="0" marL="0">
+                        <a:buNone/>
+                      </a:pPr>
+                      <a:r>
+                        <a:rPr lang="en-US" sz="1200" dirty="0">
+                          <a:solidFill>
+                            <a:srgbClr val="1F2933"/>
+                          </a:solidFill>
+                          <a:latin typeface="Arial" pitchFamily="34" charset="0"/>
+                          <a:ea typeface="Arial" pitchFamily="34" charset="-122"/>
+                          <a:cs typeface="Arial" pitchFamily="34" charset="-120"/>
+                        </a:rPr>
+                        <a:t>Layers are the control: each layer governs the next; a change enters at the top layer it affects; rules live in a layer, not a prompt</a:t>
+                      </a:r>
+                      <a:endParaRPr lang="en-US" sz="1200" dirty="0">
+                        <a:latin typeface="Arial" charset="0"/>
+                        <a:ea typeface="Arial" charset="0"/>
+                        <a:cs typeface="Arial" charset="0"/>
+                      </a:endParaRPr>
+                    </a:p>
+                  </a:txBody>
+                  <a:tcPr marL="45720" marR="45720" marT="45720" marB="45720" anchor="ctr">
+                    <a:lnL w="9525" cap="flat" cmpd="sng" algn="ctr">
+                      <a:solidFill>
+                        <a:srgbClr val="D6DCE4"/>
+                      </a:solidFill>
+                      <a:prstDash val="solid"/>
+                      <a:round/>
+                      <a:headEnd type="none" w="med" len="med"/>
+                      <a:tailEnd type="none" w="med" len="med"/>
+                    </a:lnL>
+                    <a:lnR w="9525" cap="flat" cmpd="sng" algn="ctr">
+                      <a:solidFill>
+                        <a:srgbClr val="D6DCE4"/>
+                      </a:solidFill>
+                      <a:prstDash val="solid"/>
+                      <a:round/>
+                      <a:headEnd type="none" w="med" len="med"/>
+                      <a:tailEnd type="none" w="med" len="med"/>
+                    </a:lnR>
+                    <a:lnT w="9525" cap="flat" cmpd="sng" algn="ctr">
+                      <a:solidFill>
+                        <a:srgbClr val="D6DCE4"/>
+                      </a:solidFill>
+                      <a:prstDash val="solid"/>
+                      <a:round/>
+                      <a:headEnd type="none" w="med" len="med"/>
+                      <a:tailEnd type="none" w="med" len="med"/>
+                    </a:lnT>
+                    <a:lnB w="9525" cap="flat" cmpd="sng" algn="ctr">
+                      <a:solidFill>
+                        <a:srgbClr val="D6DCE4"/>
+                      </a:solidFill>
+                      <a:prstDash val="solid"/>
+                      <a:round/>
+                      <a:headEnd type="none" w="med" len="med"/>
+                      <a:tailEnd type="none" w="med" len="med"/>
+                    </a:lnB>
+                    <a:solidFill>
+                      <a:srgbClr val="FFFFFF"/>
+                    </a:solidFill>
+                  </a:tcPr>
+                </a:tc>
+                <a:tc>
+                  <a:txBody>
+                    <a:bodyPr/>
+                    <a:lstStyle/>
+                    <a:p>
+                      <a:pPr indent="0" marL="0">
+                        <a:buNone/>
+                      </a:pPr>
+                      <a:r>
+                        <a:rPr lang="en-US" sz="1200" dirty="0">
+                          <a:solidFill>
+                            <a:srgbClr val="1F2933"/>
+                          </a:solidFill>
+                          <a:latin typeface="Arial" pitchFamily="34" charset="0"/>
+                          <a:ea typeface="Arial" pitchFamily="34" charset="-122"/>
+                          <a:cs typeface="Arial" pitchFamily="34" charset="-120"/>
+                        </a:rPr>
+                        <a:t>workflows/principles.md#layers-are-the-control</a:t>
+                      </a:r>
+                      <a:endParaRPr lang="en-US" sz="1200" dirty="0">
+                        <a:latin typeface="Arial" charset="0"/>
+                        <a:ea typeface="Arial" charset="0"/>
+                        <a:cs typeface="Arial" charset="0"/>
+                      </a:endParaRPr>
+                    </a:p>
+                  </a:txBody>
+                  <a:tcPr marL="45720" marR="45720" marT="45720" marB="45720" anchor="ctr">
+                    <a:lnL w="9525" cap="flat" cmpd="sng" algn="ctr">
+                      <a:solidFill>
+                        <a:srgbClr val="D6DCE4"/>
+                      </a:solidFill>
+                      <a:prstDash val="solid"/>
+                      <a:round/>
+                      <a:headEnd type="none" w="med" len="med"/>
+                      <a:tailEnd type="none" w="med" len="med"/>
+                    </a:lnL>
+                    <a:lnR w="9525" cap="flat" cmpd="sng" algn="ctr">
+                      <a:solidFill>
+                        <a:srgbClr val="D6DCE4"/>
+                      </a:solidFill>
+                      <a:prstDash val="solid"/>
+                      <a:round/>
+                      <a:headEnd type="none" w="med" len="med"/>
+                      <a:tailEnd type="none" w="med" len="med"/>
+                    </a:lnR>
+                    <a:lnT w="9525" cap="flat" cmpd="sng" algn="ctr">
+                      <a:solidFill>
+                        <a:srgbClr val="D6DCE4"/>
+                      </a:solidFill>
+                      <a:prstDash val="solid"/>
+                      <a:round/>
+                      <a:headEnd type="none" w="med" len="med"/>
+                      <a:tailEnd type="none" w="med" len="med"/>
+                    </a:lnT>
+                    <a:lnB w="9525" cap="flat" cmpd="sng" algn="ctr">
+                      <a:solidFill>
+                        <a:srgbClr val="D6DCE4"/>
+                      </a:solidFill>
+                      <a:prstDash val="solid"/>
+                      <a:round/>
+                      <a:headEnd type="none" w="med" len="med"/>
+                      <a:tailEnd type="none" w="med" len="med"/>
+                    </a:lnB>
+                    <a:solidFill>
+                      <a:srgbClr val="FFFFFF"/>
+                    </a:solidFill>
+                  </a:tcPr>
+                </a:tc>
+              </a:tr>
+              <a:tr h="512064">
+                <a:tc>
+                  <a:txBody>
+                    <a:bodyPr/>
+                    <a:lstStyle/>
+                    <a:p>
+                      <a:pPr indent="0" marL="0">
+                        <a:buNone/>
+                      </a:pPr>
+                      <a:r>
+                        <a:rPr lang="en-US" sz="1200" b="1" dirty="0">
+                          <a:solidFill>
+                            <a:srgbClr val="55606D"/>
+                          </a:solidFill>
+                          <a:latin typeface="Arial" pitchFamily="34" charset="0"/>
+                          <a:ea typeface="Arial" pitchFamily="34" charset="-122"/>
+                          <a:cs typeface="Arial" pitchFamily="34" charset="-120"/>
+                        </a:rPr>
+                        <a:t>S20</a:t>
+                      </a:r>
+                      <a:endParaRPr lang="en-US" sz="1200" dirty="0">
+                        <a:latin typeface="Arial" charset="0"/>
+                        <a:ea typeface="Arial" charset="0"/>
+                        <a:cs typeface="Arial" charset="0"/>
+                      </a:endParaRPr>
+                    </a:p>
+                  </a:txBody>
+                  <a:tcPr marL="45720" marR="45720" marT="45720" marB="45720" anchor="ctr">
+                    <a:lnL w="9525" cap="flat" cmpd="sng" algn="ctr">
+                      <a:solidFill>
+                        <a:srgbClr val="D6DCE4"/>
+                      </a:solidFill>
+                      <a:prstDash val="solid"/>
+                      <a:round/>
+                      <a:headEnd type="none" w="med" len="med"/>
+                      <a:tailEnd type="none" w="med" len="med"/>
+                    </a:lnL>
+                    <a:lnR w="9525" cap="flat" cmpd="sng" algn="ctr">
+                      <a:solidFill>
+                        <a:srgbClr val="D6DCE4"/>
+                      </a:solidFill>
+                      <a:prstDash val="solid"/>
+                      <a:round/>
+                      <a:headEnd type="none" w="med" len="med"/>
+                      <a:tailEnd type="none" w="med" len="med"/>
+                    </a:lnR>
+                    <a:lnT w="9525" cap="flat" cmpd="sng" algn="ctr">
+                      <a:solidFill>
+                        <a:srgbClr val="D6DCE4"/>
+                      </a:solidFill>
+                      <a:prstDash val="solid"/>
+                      <a:round/>
+                      <a:headEnd type="none" w="med" len="med"/>
+                      <a:tailEnd type="none" w="med" len="med"/>
+                    </a:lnT>
+                    <a:lnB w="9525" cap="flat" cmpd="sng" algn="ctr">
+                      <a:solidFill>
+                        <a:srgbClr val="D6DCE4"/>
+                      </a:solidFill>
+                      <a:prstDash val="solid"/>
+                      <a:round/>
+                      <a:headEnd type="none" w="med" len="med"/>
+                      <a:tailEnd type="none" w="med" len="med"/>
+                    </a:lnB>
+                    <a:solidFill>
+                      <a:srgbClr val="FFFFFF"/>
+                    </a:solidFill>
+                  </a:tcPr>
+                </a:tc>
+                <a:tc>
+                  <a:txBody>
+                    <a:bodyPr/>
+                    <a:lstStyle/>
+                    <a:p>
+                      <a:pPr indent="0" marL="0">
+                        <a:buNone/>
+                      </a:pPr>
+                      <a:r>
+                        <a:rPr lang="en-US" sz="1200" dirty="0">
+                          <a:solidFill>
+                            <a:srgbClr val="1F2933"/>
+                          </a:solidFill>
+                          <a:latin typeface="Arial" pitchFamily="34" charset="0"/>
+                          <a:ea typeface="Arial" pitchFamily="34" charset="-122"/>
+                          <a:cs typeface="Arial" pitchFamily="34" charset="-120"/>
+                        </a:rPr>
+                        <a:t>The hierarchy as control loop: authority flows down, concerns cross layers, gates sit between layers, humans hold the hand-offs</a:t>
+                      </a:r>
+                      <a:endParaRPr lang="en-US" sz="1200" dirty="0">
+                        <a:latin typeface="Arial" charset="0"/>
+                        <a:ea typeface="Arial" charset="0"/>
+                        <a:cs typeface="Arial" charset="0"/>
+                      </a:endParaRPr>
+                    </a:p>
+                  </a:txBody>
+                  <a:tcPr marL="45720" marR="45720" marT="45720" marB="45720" anchor="ctr">
+                    <a:lnL w="9525" cap="flat" cmpd="sng" algn="ctr">
+                      <a:solidFill>
+                        <a:srgbClr val="D6DCE4"/>
+                      </a:solidFill>
+                      <a:prstDash val="solid"/>
+                      <a:round/>
+                      <a:headEnd type="none" w="med" len="med"/>
+                      <a:tailEnd type="none" w="med" len="med"/>
+                    </a:lnL>
+                    <a:lnR w="9525" cap="flat" cmpd="sng" algn="ctr">
+                      <a:solidFill>
+                        <a:srgbClr val="D6DCE4"/>
+                      </a:solidFill>
+                      <a:prstDash val="solid"/>
+                      <a:round/>
+                      <a:headEnd type="none" w="med" len="med"/>
+                      <a:tailEnd type="none" w="med" len="med"/>
+                    </a:lnR>
+                    <a:lnT w="9525" cap="flat" cmpd="sng" algn="ctr">
+                      <a:solidFill>
+                        <a:srgbClr val="D6DCE4"/>
+                      </a:solidFill>
+                      <a:prstDash val="solid"/>
+                      <a:round/>
+                      <a:headEnd type="none" w="med" len="med"/>
+                      <a:tailEnd type="none" w="med" len="med"/>
+                    </a:lnT>
+                    <a:lnB w="9525" cap="flat" cmpd="sng" algn="ctr">
+                      <a:solidFill>
+                        <a:srgbClr val="D6DCE4"/>
+                      </a:solidFill>
+                      <a:prstDash val="solid"/>
+                      <a:round/>
+                      <a:headEnd type="none" w="med" len="med"/>
+                      <a:tailEnd type="none" w="med" len="med"/>
+                    </a:lnB>
+                    <a:solidFill>
+                      <a:srgbClr val="FFFFFF"/>
+                    </a:solidFill>
+                  </a:tcPr>
+                </a:tc>
+                <a:tc>
+                  <a:txBody>
+                    <a:bodyPr/>
+                    <a:lstStyle/>
+                    <a:p>
+                      <a:pPr indent="0" marL="0">
+                        <a:buNone/>
+                      </a:pPr>
+                      <a:r>
+                        <a:rPr lang="en-US" sz="1200" dirty="0">
+                          <a:solidFill>
+                            <a:srgbClr val="1F2933"/>
+                          </a:solidFill>
+                          <a:latin typeface="Arial" pitchFamily="34" charset="0"/>
+                          <a:ea typeface="Arial" pitchFamily="34" charset="-122"/>
+                          <a:cs typeface="Arial" pitchFamily="34" charset="-120"/>
+                        </a:rPr>
+                        <a:t>workflows/artifact-hierarchy.md#the-hierarchy-is-the-control-loop</a:t>
+                      </a:r>
+                      <a:endParaRPr lang="en-US" sz="1200" dirty="0">
+                        <a:latin typeface="Arial" charset="0"/>
+                        <a:ea typeface="Arial" charset="0"/>
+                        <a:cs typeface="Arial" charset="0"/>
+                      </a:endParaRPr>
+                    </a:p>
+                  </a:txBody>
+                  <a:tcPr marL="45720" marR="45720" marT="45720" marB="45720" anchor="ctr">
                     <a:lnL w="9525" cap="flat" cmpd="sng" algn="ctr">
                       <a:solidFill>
                         <a:srgbClr val="D6DCE4"/>
@@ -9124,11 +9606,11 @@
             <a:tbl>
               <a:tblPr/>
               <a:tblGrid>
-                <a:gridCol w="548640"/>
-                <a:gridCol w="6538381"/>
-                <a:gridCol w="4007395"/>
+                <a:gridCol w="502920"/>
+                <a:gridCol w="6354897"/>
+                <a:gridCol w="4236598"/>
               </a:tblGrid>
-              <a:tr h="384048">
+              <a:tr h="329184">
                 <a:tc>
                   <a:txBody>
                     <a:bodyPr/>
@@ -9155,7 +9637,7 @@
                       </a:endParaRPr>
                     </a:p>
                   </a:txBody>
-                  <a:tcPr marL="73152" marR="73152" marT="73152" marB="73152" anchor="ctr">
+                  <a:tcPr marL="45720" marR="45720" marT="45720" marB="45720" anchor="ctr">
                     <a:lnL w="9525" cap="flat" cmpd="sng" algn="ctr">
                       <a:solidFill>
                         <a:srgbClr val="D6DCE4"/>
@@ -9223,7 +9705,7 @@
                       </a:endParaRPr>
                     </a:p>
                   </a:txBody>
-                  <a:tcPr marL="73152" marR="73152" marT="73152" marB="73152" anchor="ctr">
+                  <a:tcPr marL="45720" marR="45720" marT="45720" marB="45720" anchor="ctr">
                     <a:lnL w="9525" cap="flat" cmpd="sng" algn="ctr">
                       <a:solidFill>
                         <a:srgbClr val="D6DCE4"/>
@@ -9291,7 +9773,7 @@
                       </a:endParaRPr>
                     </a:p>
                   </a:txBody>
-                  <a:tcPr marL="73152" marR="73152" marT="73152" marB="73152" anchor="ctr">
+                  <a:tcPr marL="45720" marR="45720" marT="45720" marB="45720" anchor="ctr">
                     <a:lnL w="9525" cap="flat" cmpd="sng" algn="ctr">
                       <a:solidFill>
                         <a:srgbClr val="D6DCE4"/>
@@ -9334,419 +9816,7 @@
                   </a:tcPr>
                 </a:tc>
               </a:tr>
-              <a:tr h="566928">
-                <a:tc>
-                  <a:txBody>
-                    <a:bodyPr/>
-                    <a:lstStyle/>
-                    <a:p>
-                      <a:pPr indent="0" marL="0">
-                        <a:buNone/>
-                      </a:pPr>
-                      <a:r>
-                        <a:rPr lang="en-US" sz="1200" b="1" dirty="0">
-                          <a:solidFill>
-                            <a:srgbClr val="55606D"/>
-                          </a:solidFill>
-                          <a:latin typeface="Arial" pitchFamily="34" charset="0"/>
-                          <a:ea typeface="Arial" pitchFamily="34" charset="-122"/>
-                          <a:cs typeface="Arial" pitchFamily="34" charset="-120"/>
-                        </a:rPr>
-                        <a:t>S19</a:t>
-                      </a:r>
-                      <a:endParaRPr lang="en-US" sz="1200" dirty="0">
-                        <a:latin typeface="Arial" charset="0"/>
-                        <a:ea typeface="Arial" charset="0"/>
-                        <a:cs typeface="Arial" charset="0"/>
-                      </a:endParaRPr>
-                    </a:p>
-                  </a:txBody>
-                  <a:tcPr marL="73152" marR="73152" marT="73152" marB="73152" anchor="ctr">
-                    <a:lnL w="9525" cap="flat" cmpd="sng" algn="ctr">
-                      <a:solidFill>
-                        <a:srgbClr val="D6DCE4"/>
-                      </a:solidFill>
-                      <a:prstDash val="solid"/>
-                      <a:round/>
-                      <a:headEnd type="none" w="med" len="med"/>
-                      <a:tailEnd type="none" w="med" len="med"/>
-                    </a:lnL>
-                    <a:lnR w="9525" cap="flat" cmpd="sng" algn="ctr">
-                      <a:solidFill>
-                        <a:srgbClr val="D6DCE4"/>
-                      </a:solidFill>
-                      <a:prstDash val="solid"/>
-                      <a:round/>
-                      <a:headEnd type="none" w="med" len="med"/>
-                      <a:tailEnd type="none" w="med" len="med"/>
-                    </a:lnR>
-                    <a:lnT w="9525" cap="flat" cmpd="sng" algn="ctr">
-                      <a:solidFill>
-                        <a:srgbClr val="D6DCE4"/>
-                      </a:solidFill>
-                      <a:prstDash val="solid"/>
-                      <a:round/>
-                      <a:headEnd type="none" w="med" len="med"/>
-                      <a:tailEnd type="none" w="med" len="med"/>
-                    </a:lnT>
-                    <a:lnB w="9525" cap="flat" cmpd="sng" algn="ctr">
-                      <a:solidFill>
-                        <a:srgbClr val="D6DCE4"/>
-                      </a:solidFill>
-                      <a:prstDash val="solid"/>
-                      <a:round/>
-                      <a:headEnd type="none" w="med" len="med"/>
-                      <a:tailEnd type="none" w="med" len="med"/>
-                    </a:lnB>
-                    <a:solidFill>
-                      <a:srgbClr val="FFFFFF"/>
-                    </a:solidFill>
-                  </a:tcPr>
-                </a:tc>
-                <a:tc>
-                  <a:txBody>
-                    <a:bodyPr/>
-                    <a:lstStyle/>
-                    <a:p>
-                      <a:pPr indent="0" marL="0">
-                        <a:buNone/>
-                      </a:pPr>
-                      <a:r>
-                        <a:rPr lang="en-US" sz="1200" dirty="0">
-                          <a:solidFill>
-                            <a:srgbClr val="1F2933"/>
-                          </a:solidFill>
-                          <a:latin typeface="Arial" pitchFamily="34" charset="0"/>
-                          <a:ea typeface="Arial" pitchFamily="34" charset="-122"/>
-                          <a:cs typeface="Arial" pitchFamily="34" charset="-120"/>
-                        </a:rPr>
-                        <a:t>Layers are the control: each layer governs the next; a change enters at the top layer it affects; rules live in a layer, not a prompt</a:t>
-                      </a:r>
-                      <a:endParaRPr lang="en-US" sz="1200" dirty="0">
-                        <a:latin typeface="Arial" charset="0"/>
-                        <a:ea typeface="Arial" charset="0"/>
-                        <a:cs typeface="Arial" charset="0"/>
-                      </a:endParaRPr>
-                    </a:p>
-                  </a:txBody>
-                  <a:tcPr marL="73152" marR="73152" marT="73152" marB="73152" anchor="ctr">
-                    <a:lnL w="9525" cap="flat" cmpd="sng" algn="ctr">
-                      <a:solidFill>
-                        <a:srgbClr val="D6DCE4"/>
-                      </a:solidFill>
-                      <a:prstDash val="solid"/>
-                      <a:round/>
-                      <a:headEnd type="none" w="med" len="med"/>
-                      <a:tailEnd type="none" w="med" len="med"/>
-                    </a:lnL>
-                    <a:lnR w="9525" cap="flat" cmpd="sng" algn="ctr">
-                      <a:solidFill>
-                        <a:srgbClr val="D6DCE4"/>
-                      </a:solidFill>
-                      <a:prstDash val="solid"/>
-                      <a:round/>
-                      <a:headEnd type="none" w="med" len="med"/>
-                      <a:tailEnd type="none" w="med" len="med"/>
-                    </a:lnR>
-                    <a:lnT w="9525" cap="flat" cmpd="sng" algn="ctr">
-                      <a:solidFill>
-                        <a:srgbClr val="D6DCE4"/>
-                      </a:solidFill>
-                      <a:prstDash val="solid"/>
-                      <a:round/>
-                      <a:headEnd type="none" w="med" len="med"/>
-                      <a:tailEnd type="none" w="med" len="med"/>
-                    </a:lnT>
-                    <a:lnB w="9525" cap="flat" cmpd="sng" algn="ctr">
-                      <a:solidFill>
-                        <a:srgbClr val="D6DCE4"/>
-                      </a:solidFill>
-                      <a:prstDash val="solid"/>
-                      <a:round/>
-                      <a:headEnd type="none" w="med" len="med"/>
-                      <a:tailEnd type="none" w="med" len="med"/>
-                    </a:lnB>
-                    <a:solidFill>
-                      <a:srgbClr val="FFFFFF"/>
-                    </a:solidFill>
-                  </a:tcPr>
-                </a:tc>
-                <a:tc>
-                  <a:txBody>
-                    <a:bodyPr/>
-                    <a:lstStyle/>
-                    <a:p>
-                      <a:pPr indent="0" marL="0">
-                        <a:buNone/>
-                      </a:pPr>
-                      <a:r>
-                        <a:rPr lang="en-US" sz="1200" dirty="0">
-                          <a:solidFill>
-                            <a:srgbClr val="1F2933"/>
-                          </a:solidFill>
-                          <a:latin typeface="Arial" pitchFamily="34" charset="0"/>
-                          <a:ea typeface="Arial" pitchFamily="34" charset="-122"/>
-                          <a:cs typeface="Arial" pitchFamily="34" charset="-120"/>
-                        </a:rPr>
-                        <a:t>workflows/principles.md#layers-are-the-control</a:t>
-                      </a:r>
-                      <a:endParaRPr lang="en-US" sz="1200" dirty="0">
-                        <a:latin typeface="Arial" charset="0"/>
-                        <a:ea typeface="Arial" charset="0"/>
-                        <a:cs typeface="Arial" charset="0"/>
-                      </a:endParaRPr>
-                    </a:p>
-                  </a:txBody>
-                  <a:tcPr marL="73152" marR="73152" marT="73152" marB="73152" anchor="ctr">
-                    <a:lnL w="9525" cap="flat" cmpd="sng" algn="ctr">
-                      <a:solidFill>
-                        <a:srgbClr val="D6DCE4"/>
-                      </a:solidFill>
-                      <a:prstDash val="solid"/>
-                      <a:round/>
-                      <a:headEnd type="none" w="med" len="med"/>
-                      <a:tailEnd type="none" w="med" len="med"/>
-                    </a:lnL>
-                    <a:lnR w="9525" cap="flat" cmpd="sng" algn="ctr">
-                      <a:solidFill>
-                        <a:srgbClr val="D6DCE4"/>
-                      </a:solidFill>
-                      <a:prstDash val="solid"/>
-                      <a:round/>
-                      <a:headEnd type="none" w="med" len="med"/>
-                      <a:tailEnd type="none" w="med" len="med"/>
-                    </a:lnR>
-                    <a:lnT w="9525" cap="flat" cmpd="sng" algn="ctr">
-                      <a:solidFill>
-                        <a:srgbClr val="D6DCE4"/>
-                      </a:solidFill>
-                      <a:prstDash val="solid"/>
-                      <a:round/>
-                      <a:headEnd type="none" w="med" len="med"/>
-                      <a:tailEnd type="none" w="med" len="med"/>
-                    </a:lnT>
-                    <a:lnB w="9525" cap="flat" cmpd="sng" algn="ctr">
-                      <a:solidFill>
-                        <a:srgbClr val="D6DCE4"/>
-                      </a:solidFill>
-                      <a:prstDash val="solid"/>
-                      <a:round/>
-                      <a:headEnd type="none" w="med" len="med"/>
-                      <a:tailEnd type="none" w="med" len="med"/>
-                    </a:lnB>
-                    <a:solidFill>
-                      <a:srgbClr val="FFFFFF"/>
-                    </a:solidFill>
-                  </a:tcPr>
-                </a:tc>
-              </a:tr>
-              <a:tr h="566928">
-                <a:tc>
-                  <a:txBody>
-                    <a:bodyPr/>
-                    <a:lstStyle/>
-                    <a:p>
-                      <a:pPr indent="0" marL="0">
-                        <a:buNone/>
-                      </a:pPr>
-                      <a:r>
-                        <a:rPr lang="en-US" sz="1200" b="1" dirty="0">
-                          <a:solidFill>
-                            <a:srgbClr val="55606D"/>
-                          </a:solidFill>
-                          <a:latin typeface="Arial" pitchFamily="34" charset="0"/>
-                          <a:ea typeface="Arial" pitchFamily="34" charset="-122"/>
-                          <a:cs typeface="Arial" pitchFamily="34" charset="-120"/>
-                        </a:rPr>
-                        <a:t>S20</a:t>
-                      </a:r>
-                      <a:endParaRPr lang="en-US" sz="1200" dirty="0">
-                        <a:latin typeface="Arial" charset="0"/>
-                        <a:ea typeface="Arial" charset="0"/>
-                        <a:cs typeface="Arial" charset="0"/>
-                      </a:endParaRPr>
-                    </a:p>
-                  </a:txBody>
-                  <a:tcPr marL="73152" marR="73152" marT="73152" marB="73152" anchor="ctr">
-                    <a:lnL w="9525" cap="flat" cmpd="sng" algn="ctr">
-                      <a:solidFill>
-                        <a:srgbClr val="D6DCE4"/>
-                      </a:solidFill>
-                      <a:prstDash val="solid"/>
-                      <a:round/>
-                      <a:headEnd type="none" w="med" len="med"/>
-                      <a:tailEnd type="none" w="med" len="med"/>
-                    </a:lnL>
-                    <a:lnR w="9525" cap="flat" cmpd="sng" algn="ctr">
-                      <a:solidFill>
-                        <a:srgbClr val="D6DCE4"/>
-                      </a:solidFill>
-                      <a:prstDash val="solid"/>
-                      <a:round/>
-                      <a:headEnd type="none" w="med" len="med"/>
-                      <a:tailEnd type="none" w="med" len="med"/>
-                    </a:lnR>
-                    <a:lnT w="9525" cap="flat" cmpd="sng" algn="ctr">
-                      <a:solidFill>
-                        <a:srgbClr val="D6DCE4"/>
-                      </a:solidFill>
-                      <a:prstDash val="solid"/>
-                      <a:round/>
-                      <a:headEnd type="none" w="med" len="med"/>
-                      <a:tailEnd type="none" w="med" len="med"/>
-                    </a:lnT>
-                    <a:lnB w="9525" cap="flat" cmpd="sng" algn="ctr">
-                      <a:solidFill>
-                        <a:srgbClr val="D6DCE4"/>
-                      </a:solidFill>
-                      <a:prstDash val="solid"/>
-                      <a:round/>
-                      <a:headEnd type="none" w="med" len="med"/>
-                      <a:tailEnd type="none" w="med" len="med"/>
-                    </a:lnB>
-                    <a:solidFill>
-                      <a:srgbClr val="FFFFFF"/>
-                    </a:solidFill>
-                  </a:tcPr>
-                </a:tc>
-                <a:tc>
-                  <a:txBody>
-                    <a:bodyPr/>
-                    <a:lstStyle/>
-                    <a:p>
-                      <a:pPr indent="0" marL="0">
-                        <a:buNone/>
-                      </a:pPr>
-                      <a:r>
-                        <a:rPr lang="en-US" sz="1200" dirty="0">
-                          <a:solidFill>
-                            <a:srgbClr val="1F2933"/>
-                          </a:solidFill>
-                          <a:latin typeface="Arial" pitchFamily="34" charset="0"/>
-                          <a:ea typeface="Arial" pitchFamily="34" charset="-122"/>
-                          <a:cs typeface="Arial" pitchFamily="34" charset="-120"/>
-                        </a:rPr>
-                        <a:t>The hierarchy as control loop: authority flows down, concerns cross layers, gates sit between layers, humans hold the hand-offs</a:t>
-                      </a:r>
-                      <a:endParaRPr lang="en-US" sz="1200" dirty="0">
-                        <a:latin typeface="Arial" charset="0"/>
-                        <a:ea typeface="Arial" charset="0"/>
-                        <a:cs typeface="Arial" charset="0"/>
-                      </a:endParaRPr>
-                    </a:p>
-                  </a:txBody>
-                  <a:tcPr marL="73152" marR="73152" marT="73152" marB="73152" anchor="ctr">
-                    <a:lnL w="9525" cap="flat" cmpd="sng" algn="ctr">
-                      <a:solidFill>
-                        <a:srgbClr val="D6DCE4"/>
-                      </a:solidFill>
-                      <a:prstDash val="solid"/>
-                      <a:round/>
-                      <a:headEnd type="none" w="med" len="med"/>
-                      <a:tailEnd type="none" w="med" len="med"/>
-                    </a:lnL>
-                    <a:lnR w="9525" cap="flat" cmpd="sng" algn="ctr">
-                      <a:solidFill>
-                        <a:srgbClr val="D6DCE4"/>
-                      </a:solidFill>
-                      <a:prstDash val="solid"/>
-                      <a:round/>
-                      <a:headEnd type="none" w="med" len="med"/>
-                      <a:tailEnd type="none" w="med" len="med"/>
-                    </a:lnR>
-                    <a:lnT w="9525" cap="flat" cmpd="sng" algn="ctr">
-                      <a:solidFill>
-                        <a:srgbClr val="D6DCE4"/>
-                      </a:solidFill>
-                      <a:prstDash val="solid"/>
-                      <a:round/>
-                      <a:headEnd type="none" w="med" len="med"/>
-                      <a:tailEnd type="none" w="med" len="med"/>
-                    </a:lnT>
-                    <a:lnB w="9525" cap="flat" cmpd="sng" algn="ctr">
-                      <a:solidFill>
-                        <a:srgbClr val="D6DCE4"/>
-                      </a:solidFill>
-                      <a:prstDash val="solid"/>
-                      <a:round/>
-                      <a:headEnd type="none" w="med" len="med"/>
-                      <a:tailEnd type="none" w="med" len="med"/>
-                    </a:lnB>
-                    <a:solidFill>
-                      <a:srgbClr val="FFFFFF"/>
-                    </a:solidFill>
-                  </a:tcPr>
-                </a:tc>
-                <a:tc>
-                  <a:txBody>
-                    <a:bodyPr/>
-                    <a:lstStyle/>
-                    <a:p>
-                      <a:pPr indent="0" marL="0">
-                        <a:buNone/>
-                      </a:pPr>
-                      <a:r>
-                        <a:rPr lang="en-US" sz="1200" dirty="0">
-                          <a:solidFill>
-                            <a:srgbClr val="1F2933"/>
-                          </a:solidFill>
-                          <a:latin typeface="Arial" pitchFamily="34" charset="0"/>
-                          <a:ea typeface="Arial" pitchFamily="34" charset="-122"/>
-                          <a:cs typeface="Arial" pitchFamily="34" charset="-120"/>
-                        </a:rPr>
-                        <a:t>workflows/artifact-hierarchy.md#the-hierarchy-is-the-control-loop</a:t>
-                      </a:r>
-                      <a:endParaRPr lang="en-US" sz="1200" dirty="0">
-                        <a:latin typeface="Arial" charset="0"/>
-                        <a:ea typeface="Arial" charset="0"/>
-                        <a:cs typeface="Arial" charset="0"/>
-                      </a:endParaRPr>
-                    </a:p>
-                  </a:txBody>
-                  <a:tcPr marL="73152" marR="73152" marT="73152" marB="73152" anchor="ctr">
-                    <a:lnL w="9525" cap="flat" cmpd="sng" algn="ctr">
-                      <a:solidFill>
-                        <a:srgbClr val="D6DCE4"/>
-                      </a:solidFill>
-                      <a:prstDash val="solid"/>
-                      <a:round/>
-                      <a:headEnd type="none" w="med" len="med"/>
-                      <a:tailEnd type="none" w="med" len="med"/>
-                    </a:lnL>
-                    <a:lnR w="9525" cap="flat" cmpd="sng" algn="ctr">
-                      <a:solidFill>
-                        <a:srgbClr val="D6DCE4"/>
-                      </a:solidFill>
-                      <a:prstDash val="solid"/>
-                      <a:round/>
-                      <a:headEnd type="none" w="med" len="med"/>
-                      <a:tailEnd type="none" w="med" len="med"/>
-                    </a:lnR>
-                    <a:lnT w="9525" cap="flat" cmpd="sng" algn="ctr">
-                      <a:solidFill>
-                        <a:srgbClr val="D6DCE4"/>
-                      </a:solidFill>
-                      <a:prstDash val="solid"/>
-                      <a:round/>
-                      <a:headEnd type="none" w="med" len="med"/>
-                      <a:tailEnd type="none" w="med" len="med"/>
-                    </a:lnT>
-                    <a:lnB w="9525" cap="flat" cmpd="sng" algn="ctr">
-                      <a:solidFill>
-                        <a:srgbClr val="D6DCE4"/>
-                      </a:solidFill>
-                      <a:prstDash val="solid"/>
-                      <a:round/>
-                      <a:headEnd type="none" w="med" len="med"/>
-                      <a:tailEnd type="none" w="med" len="med"/>
-                    </a:lnB>
-                    <a:solidFill>
-                      <a:srgbClr val="FFFFFF"/>
-                    </a:solidFill>
-                  </a:tcPr>
-                </a:tc>
-              </a:tr>
-              <a:tr h="566928">
+              <a:tr h="512064">
                 <a:tc>
                   <a:txBody>
                     <a:bodyPr/>
@@ -9773,7 +9843,7 @@
                       </a:endParaRPr>
                     </a:p>
                   </a:txBody>
-                  <a:tcPr marL="73152" marR="73152" marT="73152" marB="73152" anchor="ctr">
+                  <a:tcPr marL="45720" marR="45720" marT="45720" marB="45720" anchor="ctr">
                     <a:lnL w="9525" cap="flat" cmpd="sng" algn="ctr">
                       <a:solidFill>
                         <a:srgbClr val="D6DCE4"/>
@@ -9841,7 +9911,7 @@
                       </a:endParaRPr>
                     </a:p>
                   </a:txBody>
-                  <a:tcPr marL="73152" marR="73152" marT="73152" marB="73152" anchor="ctr">
+                  <a:tcPr marL="45720" marR="45720" marT="45720" marB="45720" anchor="ctr">
                     <a:lnL w="9525" cap="flat" cmpd="sng" algn="ctr">
                       <a:solidFill>
                         <a:srgbClr val="D6DCE4"/>
@@ -9909,7 +9979,7 @@
                       </a:endParaRPr>
                     </a:p>
                   </a:txBody>
-                  <a:tcPr marL="73152" marR="73152" marT="73152" marB="73152" anchor="ctr">
+                  <a:tcPr marL="45720" marR="45720" marT="45720" marB="45720" anchor="ctr">
                     <a:lnL w="9525" cap="flat" cmpd="sng" algn="ctr">
                       <a:solidFill>
                         <a:srgbClr val="D6DCE4"/>
@@ -9952,7 +10022,7 @@
                   </a:tcPr>
                 </a:tc>
               </a:tr>
-              <a:tr h="566928">
+              <a:tr h="512064">
                 <a:tc>
                   <a:txBody>
                     <a:bodyPr/>
@@ -9979,7 +10049,7 @@
                       </a:endParaRPr>
                     </a:p>
                   </a:txBody>
-                  <a:tcPr marL="73152" marR="73152" marT="73152" marB="73152" anchor="ctr">
+                  <a:tcPr marL="45720" marR="45720" marT="45720" marB="45720" anchor="ctr">
                     <a:lnL w="9525" cap="flat" cmpd="sng" algn="ctr">
                       <a:solidFill>
                         <a:srgbClr val="D6DCE4"/>
@@ -10047,7 +10117,7 @@
                       </a:endParaRPr>
                     </a:p>
                   </a:txBody>
-                  <a:tcPr marL="73152" marR="73152" marT="73152" marB="73152" anchor="ctr">
+                  <a:tcPr marL="45720" marR="45720" marT="45720" marB="45720" anchor="ctr">
                     <a:lnL w="9525" cap="flat" cmpd="sng" algn="ctr">
                       <a:solidFill>
                         <a:srgbClr val="D6DCE4"/>
@@ -10115,7 +10185,7 @@
                       </a:endParaRPr>
                     </a:p>
                   </a:txBody>
-                  <a:tcPr marL="73152" marR="73152" marT="73152" marB="73152" anchor="ctr">
+                  <a:tcPr marL="45720" marR="45720" marT="45720" marB="45720" anchor="ctr">
                     <a:lnL w="9525" cap="flat" cmpd="sng" algn="ctr">
                       <a:solidFill>
                         <a:srgbClr val="D6DCE4"/>
@@ -10248,9 +10318,9 @@
                 <a:solidFill>
                   <a:srgbClr val="FFFFFF"/>
                 </a:solidFill>
-                <a:latin typeface="Georgia" pitchFamily="34" charset="0"/>
-                <a:ea typeface="Georgia" pitchFamily="34" charset="-122"/>
-                <a:cs typeface="Georgia" pitchFamily="34" charset="-120"/>
+                <a:latin typeface="Arial" pitchFamily="34" charset="0"/>
+                <a:ea typeface="Arial" pitchFamily="34" charset="-122"/>
+                <a:cs typeface="Arial" pitchFamily="34" charset="-120"/>
               </a:rPr>
               <a:t>2</a:t>
             </a:r>
@@ -10293,7 +10363,24 @@
                 <a:ea typeface="Georgia" pitchFamily="34" charset="-122"/>
                 <a:cs typeface="Georgia" pitchFamily="34" charset="-120"/>
               </a:rPr>
-              <a:t>Agents now write most production code</a:t>
+              <a:t>Most developers ship</a:t>
+            </a:r>
+            <a:endParaRPr lang="en-US" sz="3600" dirty="0"/>
+          </a:p>
+          <a:p>
+            <a:pPr algn="l" indent="0" marL="0">
+              <a:buNone/>
+            </a:pPr>
+            <a:r>
+              <a:rPr lang="en-US" sz="3600" b="1" dirty="0">
+                <a:solidFill>
+                  <a:srgbClr val="1F2933"/>
+                </a:solidFill>
+                <a:latin typeface="Georgia" pitchFamily="34" charset="0"/>
+                <a:ea typeface="Georgia" pitchFamily="34" charset="-122"/>
+                <a:cs typeface="Georgia" pitchFamily="34" charset="-120"/>
+              </a:rPr>
+              <a:t>agent-touched code every day</a:t>
             </a:r>
             <a:endParaRPr lang="en-US" sz="3600" dirty="0"/>
           </a:p>
@@ -10400,13 +10487,13 @@
           <a:p>
             <a:pPr marL="228600" indent="-228600">
               <a:spcAft>
-                <a:spcPts val="1080"/>
+                <a:spcPts val="960"/>
               </a:spcAft>
               <a:buSzPct val="100000"/>
               <a:buChar char="•"/>
             </a:pPr>
             <a:r>
-              <a:rPr lang="en-US" sz="1800" dirty="0">
+              <a:rPr lang="en-US" sz="1600" dirty="0">
                 <a:solidFill>
                   <a:srgbClr val="1F2933"/>
                 </a:solidFill>
@@ -10414,20 +10501,20 @@
                 <a:ea typeface="Arial" pitchFamily="34" charset="-122"/>
                 <a:cs typeface="Arial" pitchFamily="34" charset="-120"/>
               </a:rPr>
-              <a:t>Most professional developers ship agent-written code every day</a:t>
-            </a:r>
-            <a:endParaRPr lang="en-US" sz="1800" dirty="0"/>
+              <a:t>Most professional developers ship AI-touched code daily</a:t>
+            </a:r>
+            <a:endParaRPr lang="en-US" sz="1600" dirty="0"/>
           </a:p>
           <a:p>
             <a:pPr marL="228600" indent="-228600">
               <a:spcAft>
-                <a:spcPts val="1080"/>
+                <a:spcPts val="960"/>
               </a:spcAft>
               <a:buSzPct val="100000"/>
               <a:buChar char="•"/>
             </a:pPr>
             <a:r>
-              <a:rPr lang="en-US" sz="1800" dirty="0">
+              <a:rPr lang="en-US" sz="1600" dirty="0">
                 <a:solidFill>
                   <a:srgbClr val="1F2933"/>
                 </a:solidFill>
@@ -10437,18 +10524,18 @@
               </a:rPr>
               <a:t>The output is locally good and globally inconsistent</a:t>
             </a:r>
-            <a:endParaRPr lang="en-US" sz="1800" dirty="0"/>
+            <a:endParaRPr lang="en-US" sz="1600" dirty="0"/>
           </a:p>
           <a:p>
             <a:pPr marL="228600" indent="-228600">
               <a:spcAft>
-                <a:spcPts val="1080"/>
+                <a:spcPts val="960"/>
               </a:spcAft>
               <a:buSzPct val="100000"/>
               <a:buChar char="•"/>
             </a:pPr>
             <a:r>
-              <a:rPr lang="en-US" sz="1800" dirty="0">
+              <a:rPr lang="en-US" sz="1600" dirty="0">
                 <a:solidFill>
                   <a:srgbClr val="1F2933"/>
                 </a:solidFill>
@@ -10458,18 +10545,18 @@
               </a:rPr>
               <a:t>The document disciplines human teams built never reached the agents</a:t>
             </a:r>
-            <a:endParaRPr lang="en-US" sz="1800" dirty="0"/>
+            <a:endParaRPr lang="en-US" sz="1600" dirty="0"/>
           </a:p>
           <a:p>
             <a:pPr marL="228600" indent="-228600">
               <a:spcAft>
-                <a:spcPts val="1080"/>
+                <a:spcPts val="960"/>
               </a:spcAft>
               <a:buSzPct val="100000"/>
               <a:buChar char="•"/>
             </a:pPr>
             <a:r>
-              <a:rPr lang="en-US" sz="1800" dirty="0">
+              <a:rPr lang="en-US" sz="1600" dirty="0">
                 <a:solidFill>
                   <a:srgbClr val="1F2933"/>
                 </a:solidFill>
@@ -10479,7 +10566,7 @@
               </a:rPr>
               <a:t>Every practice era gets its equivalent of test-driven development</a:t>
             </a:r>
-            <a:endParaRPr lang="en-US" sz="1800" dirty="0"/>
+            <a:endParaRPr lang="en-US" sz="1600" dirty="0"/>
           </a:p>
         </p:txBody>
       </p:sp>
@@ -10492,7 +10579,7 @@
         <p:spPr>
           <a:xfrm>
             <a:off x="4886858" y="3502152"/>
-            <a:ext cx="6207557" cy="0"/>
+            <a:ext cx="3103778" cy="0"/>
           </a:xfrm>
           <a:prstGeom prst="line">
             <a:avLst/>
@@ -10516,6 +10603,31 @@
         </p:nvSpPr>
         <p:spPr>
           <a:xfrm>
+            <a:off x="7990637" y="3502152"/>
+            <a:ext cx="3103778" cy="0"/>
+          </a:xfrm>
+          <a:prstGeom prst="line">
+            <a:avLst/>
+          </a:prstGeom>
+          <a:noFill/>
+          <a:ln w="38100">
+            <a:solidFill>
+              <a:srgbClr val="55606D"/>
+            </a:solidFill>
+            <a:prstDash val="dash"/>
+            <a:headEnd type="none"/>
+            <a:tailEnd type="none"/>
+          </a:ln>
+        </p:spPr>
+      </p:sp>
+      <p:sp>
+        <p:nvSpPr>
+          <p:cNvPr id="11" name="Shape 8"/>
+          <p:cNvSpPr/>
+          <p:nvPr/>
+        </p:nvSpPr>
+        <p:spPr>
+          <a:xfrm>
             <a:off x="4749698" y="3364992"/>
             <a:ext cx="274320" cy="274320"/>
           </a:xfrm>
@@ -10535,7 +10647,7 @@
       </p:sp>
       <p:sp>
         <p:nvSpPr>
-          <p:cNvPr id="11" name="Text 8"/>
+          <p:cNvPr id="12" name="Text 9"/>
           <p:cNvSpPr txBox="1"/>
           <p:nvPr/>
         </p:nvSpPr>
@@ -10576,7 +10688,7 @@
       </p:sp>
       <p:sp>
         <p:nvSpPr>
-          <p:cNvPr id="12" name="Shape 9"/>
+          <p:cNvPr id="13" name="Shape 10"/>
           <p:cNvSpPr/>
           <p:nvPr/>
         </p:nvSpPr>
@@ -10601,7 +10713,7 @@
       </p:sp>
       <p:sp>
         <p:nvSpPr>
-          <p:cNvPr id="13" name="Text 10"/>
+          <p:cNvPr id="14" name="Text 11"/>
           <p:cNvSpPr txBox="1"/>
           <p:nvPr/>
         </p:nvSpPr>
@@ -10642,13 +10754,79 @@
       </p:sp>
       <p:sp>
         <p:nvSpPr>
-          <p:cNvPr id="14" name="Shape 11"/>
+          <p:cNvPr id="15" name="Shape 12"/>
           <p:cNvSpPr/>
           <p:nvPr/>
         </p:nvSpPr>
         <p:spPr>
           <a:xfrm>
-            <a:off x="7990637" y="4370832"/>
+            <a:off x="10957255" y="3364992"/>
+            <a:ext cx="274320" cy="274320"/>
+          </a:xfrm>
+          <a:prstGeom prst="ellipse">
+            <a:avLst/>
+          </a:prstGeom>
+          <a:solidFill>
+            <a:srgbClr val="FFFFFF"/>
+          </a:solidFill>
+          <a:ln w="25400">
+            <a:solidFill>
+              <a:srgbClr val="C44B2F"/>
+            </a:solidFill>
+            <a:prstDash val="dash"/>
+          </a:ln>
+        </p:spPr>
+      </p:sp>
+      <p:sp>
+        <p:nvSpPr>
+          <p:cNvPr id="16" name="Text 13"/>
+          <p:cNvSpPr txBox="1"/>
+          <p:nvPr/>
+        </p:nvSpPr>
+        <p:spPr>
+          <a:xfrm>
+            <a:off x="8630717" y="2633472"/>
+            <a:ext cx="3012338" cy="640080"/>
+          </a:xfrm>
+          <a:prstGeom prst="rect">
+            <a:avLst/>
+          </a:prstGeom>
+          <a:noFill/>
+          <a:ln/>
+        </p:spPr>
+        <p:txBody>
+          <a:bodyPr wrap="square" lIns="0" tIns="0" rIns="0" bIns="0" rtlCol="0" anchor="b">
+            <a:normAutofit/>
+          </a:bodyPr>
+          <a:lstStyle/>
+          <a:p>
+            <a:pPr algn="ctr" indent="0" marL="0">
+              <a:buNone/>
+            </a:pPr>
+            <a:r>
+              <a:rPr lang="en-US" sz="1400" b="1" dirty="0">
+                <a:solidFill>
+                  <a:srgbClr val="C44B2F"/>
+                </a:solidFill>
+                <a:latin typeface="Arial" pitchFamily="34" charset="0"/>
+                <a:ea typeface="Arial" pitchFamily="34" charset="-122"/>
+                <a:cs typeface="Arial" pitchFamily="34" charset="-120"/>
+              </a:rPr>
+              <a:t>a shared practice for agents</a:t>
+            </a:r>
+            <a:endParaRPr lang="en-US" sz="1400" dirty="0"/>
+          </a:p>
+        </p:txBody>
+      </p:sp>
+      <p:sp>
+        <p:nvSpPr>
+          <p:cNvPr id="17" name="Shape 14"/>
+          <p:cNvSpPr/>
+          <p:nvPr/>
+        </p:nvSpPr>
+        <p:spPr>
+          <a:xfrm>
+            <a:off x="11094415" y="4370832"/>
             <a:ext cx="0" cy="274320"/>
           </a:xfrm>
           <a:prstGeom prst="line">
@@ -10667,13 +10845,13 @@
       </p:sp>
       <p:sp>
         <p:nvSpPr>
-          <p:cNvPr id="15" name="Text 12"/>
+          <p:cNvPr id="18" name="Text 15"/>
           <p:cNvSpPr txBox="1"/>
           <p:nvPr/>
         </p:nvSpPr>
         <p:spPr>
           <a:xfrm>
-            <a:off x="6118708" y="4690872"/>
+            <a:off x="7899197" y="4690872"/>
             <a:ext cx="3743858" cy="457200"/>
           </a:xfrm>
           <a:prstGeom prst="rect">
@@ -10700,7 +10878,7 @@
                 <a:ea typeface="Arial" pitchFamily="34" charset="-122"/>
                 <a:cs typeface="Arial" pitchFamily="34" charset="-120"/>
               </a:rPr>
-              <a:t>no shared practice yet</a:t>
+              <a:t>not yet</a:t>
             </a:r>
             <a:endParaRPr lang="en-US" sz="1300" dirty="0"/>
           </a:p>
@@ -10708,73 +10886,7 @@
       </p:sp>
       <p:sp>
         <p:nvSpPr>
-          <p:cNvPr id="16" name="Shape 13"/>
-          <p:cNvSpPr/>
-          <p:nvPr/>
-        </p:nvSpPr>
-        <p:spPr>
-          <a:xfrm>
-            <a:off x="10957255" y="3364992"/>
-            <a:ext cx="274320" cy="274320"/>
-          </a:xfrm>
-          <a:prstGeom prst="ellipse">
-            <a:avLst/>
-          </a:prstGeom>
-          <a:solidFill>
-            <a:srgbClr val="3B6BA8"/>
-          </a:solidFill>
-          <a:ln w="12700">
-            <a:solidFill>
-              <a:srgbClr val="3B6BA8"/>
-            </a:solidFill>
-            <a:prstDash val="solid"/>
-          </a:ln>
-        </p:spPr>
-      </p:sp>
-      <p:sp>
-        <p:nvSpPr>
-          <p:cNvPr id="17" name="Text 14"/>
-          <p:cNvSpPr txBox="1"/>
-          <p:nvPr/>
-        </p:nvSpPr>
-        <p:spPr>
-          <a:xfrm>
-            <a:off x="8630717" y="2633472"/>
-            <a:ext cx="3012338" cy="640080"/>
-          </a:xfrm>
-          <a:prstGeom prst="rect">
-            <a:avLst/>
-          </a:prstGeom>
-          <a:noFill/>
-          <a:ln/>
-        </p:spPr>
-        <p:txBody>
-          <a:bodyPr wrap="square" lIns="0" tIns="0" rIns="0" bIns="0" rtlCol="0" anchor="b">
-            <a:normAutofit/>
-          </a:bodyPr>
-          <a:lstStyle/>
-          <a:p>
-            <a:pPr algn="ctr" indent="0" marL="0">
-              <a:buNone/>
-            </a:pPr>
-            <a:r>
-              <a:rPr lang="en-US" sz="1400" dirty="0">
-                <a:solidFill>
-                  <a:srgbClr val="1F2933"/>
-                </a:solidFill>
-                <a:latin typeface="Arial" pitchFamily="34" charset="0"/>
-                <a:ea typeface="Arial" pitchFamily="34" charset="-122"/>
-                <a:cs typeface="Arial" pitchFamily="34" charset="-120"/>
-              </a:rPr>
-              <a:t>a shared practice for agents</a:t>
-            </a:r>
-            <a:endParaRPr lang="en-US" sz="1400" dirty="0"/>
-          </a:p>
-        </p:txBody>
-      </p:sp>
-      <p:sp>
-        <p:nvSpPr>
-          <p:cNvPr id="18" name="Text 15"/>
+          <p:cNvPr id="19" name="Text 16"/>
           <p:cNvSpPr txBox="1"/>
           <p:nvPr/>
         </p:nvSpPr>
@@ -10807,7 +10919,7 @@
                 <a:ea typeface="Arial" pitchFamily="34" charset="-122"/>
                 <a:cs typeface="Arial" pitchFamily="34" charset="-120"/>
               </a:rPr>
-              <a:t>how agent-written code became the default before any discipline caught up</a:t>
+              <a:t>agent-touched code became the default before any discipline caught up</a:t>
             </a:r>
             <a:endParaRPr lang="en-US" sz="1200" dirty="0"/>
           </a:p>
@@ -10899,9 +11011,9 @@
                 <a:solidFill>
                   <a:srgbClr val="FFFFFF"/>
                 </a:solidFill>
-                <a:latin typeface="Georgia" pitchFamily="34" charset="0"/>
-                <a:ea typeface="Georgia" pitchFamily="34" charset="-122"/>
-                <a:cs typeface="Georgia" pitchFamily="34" charset="-120"/>
+                <a:latin typeface="Arial" pitchFamily="34" charset="0"/>
+                <a:ea typeface="Arial" pitchFamily="34" charset="-122"/>
+                <a:cs typeface="Arial" pitchFamily="34" charset="-120"/>
               </a:rPr>
               <a:t>3</a:t>
             </a:r>
@@ -10944,7 +11056,24 @@
                 <a:ea typeface="Georgia" pitchFamily="34" charset="-122"/>
                 <a:cs typeface="Georgia" pitchFamily="34" charset="-120"/>
               </a:rPr>
-              <a:t>Agent code drifts without a shared practice</a:t>
+              <a:t>Agent code drifts</a:t>
+            </a:r>
+            <a:endParaRPr lang="en-US" sz="3600" dirty="0"/>
+          </a:p>
+          <a:p>
+            <a:pPr algn="l" indent="0" marL="0">
+              <a:buNone/>
+            </a:pPr>
+            <a:r>
+              <a:rPr lang="en-US" sz="3600" b="1" dirty="0">
+                <a:solidFill>
+                  <a:srgbClr val="1F2933"/>
+                </a:solidFill>
+                <a:latin typeface="Georgia" pitchFamily="34" charset="0"/>
+                <a:ea typeface="Georgia" pitchFamily="34" charset="-122"/>
+                <a:cs typeface="Georgia" pitchFamily="34" charset="-120"/>
+              </a:rPr>
+              <a:t>without a shared practice</a:t>
             </a:r>
             <a:endParaRPr lang="en-US" sz="3600" dirty="0"/>
           </a:p>
@@ -11065,7 +11194,7 @@
                 <a:ea typeface="Arial" pitchFamily="34" charset="-122"/>
                 <a:cs typeface="Arial" pitchFamily="34" charset="-120"/>
               </a:rPr>
-              <a:t>Specs, designs, and tests fall out of sync because nobody walks them between sessions</a:t>
+              <a:t>Drift surfaces in review, after the work, so each catch costs a rewrite</a:t>
             </a:r>
             <a:endParaRPr lang="en-US" sz="1800" dirty="0"/>
           </a:p>
@@ -11086,7 +11215,7 @@
                 <a:ea typeface="Arial" pitchFamily="34" charset="-122"/>
                 <a:cs typeface="Arial" pitchFamily="34" charset="-120"/>
               </a:rPr>
-              <a:t>A feature ships whose design contradicts a decision recorded months earlier</a:t>
+              <a:t>A contradiction with a recorded decision surfaces in production, where it costs an incident</a:t>
             </a:r>
             <a:endParaRPr lang="en-US" sz="1800" dirty="0"/>
           </a:p>
@@ -11107,7 +11236,7 @@
                 <a:ea typeface="Arial" pitchFamily="34" charset="-122"/>
                 <a:cs typeface="Arial" pitchFamily="34" charset="-120"/>
               </a:rPr>
-              <a:t>Each new conversation re-improvises the workflow, so reviews get skipped</a:t>
+              <a:t>A cold start costs the reviews nobody remembered to run</a:t>
             </a:r>
             <a:endParaRPr lang="en-US" sz="1800" dirty="0"/>
           </a:p>
@@ -11121,8 +11250,8 @@
         </p:nvSpPr>
         <p:spPr>
           <a:xfrm>
-            <a:off x="548640" y="1965960"/>
-            <a:ext cx="1936267" cy="3840480"/>
+            <a:off x="548640" y="2307540"/>
+            <a:ext cx="1936267" cy="3157320"/>
           </a:xfrm>
           <a:prstGeom prst="roundRect">
             <a:avLst>
@@ -11148,7 +11277,7 @@
         </p:nvSpPr>
         <p:spPr>
           <a:xfrm>
-            <a:off x="1081114" y="2423160"/>
+            <a:off x="1081114" y="2764740"/>
             <a:ext cx="871320" cy="871320"/>
           </a:xfrm>
           <a:prstGeom prst="ellipse">
@@ -11181,7 +11310,7 @@
         </p:blipFill>
         <p:spPr>
           <a:xfrm>
-            <a:off x="1255378" y="2597424"/>
+            <a:off x="1255378" y="2939004"/>
             <a:ext cx="522792" cy="522792"/>
           </a:xfrm>
           <a:prstGeom prst="rect">
@@ -11197,7 +11326,7 @@
         </p:nvSpPr>
         <p:spPr>
           <a:xfrm>
-            <a:off x="621792" y="3523080"/>
+            <a:off x="621792" y="3864660"/>
             <a:ext cx="1789963" cy="457200"/>
           </a:xfrm>
           <a:prstGeom prst="rect">
@@ -11238,8 +11367,8 @@
         </p:nvSpPr>
         <p:spPr>
           <a:xfrm>
-            <a:off x="685800" y="4026000"/>
-            <a:ext cx="1661947" cy="1597560"/>
+            <a:off x="685800" y="4413300"/>
+            <a:ext cx="1661947" cy="685800"/>
           </a:xfrm>
           <a:prstGeom prst="rect">
             <a:avLst/>
@@ -11279,8 +11408,8 @@
         </p:nvSpPr>
         <p:spPr>
           <a:xfrm>
-            <a:off x="2759227" y="1965960"/>
-            <a:ext cx="1936267" cy="3840480"/>
+            <a:off x="2759227" y="2307540"/>
+            <a:ext cx="1936267" cy="3157320"/>
           </a:xfrm>
           <a:prstGeom prst="roundRect">
             <a:avLst>
@@ -11306,18 +11435,18 @@
         </p:nvSpPr>
         <p:spPr>
           <a:xfrm>
-            <a:off x="3291701" y="2423160"/>
+            <a:off x="3291701" y="2764740"/>
             <a:ext cx="871320" cy="871320"/>
           </a:xfrm>
           <a:prstGeom prst="ellipse">
             <a:avLst/>
           </a:prstGeom>
           <a:solidFill>
-            <a:srgbClr val="6842A8"/>
+            <a:srgbClr val="3B6BA8"/>
           </a:solidFill>
           <a:ln w="12700">
             <a:solidFill>
-              <a:srgbClr val="6842A8"/>
+              <a:srgbClr val="3B6BA8"/>
             </a:solidFill>
             <a:prstDash val="solid"/>
           </a:ln>
@@ -11339,7 +11468,7 @@
         </p:blipFill>
         <p:spPr>
           <a:xfrm>
-            <a:off x="3465965" y="2597424"/>
+            <a:off x="3465965" y="2939004"/>
             <a:ext cx="522792" cy="522792"/>
           </a:xfrm>
           <a:prstGeom prst="rect">
@@ -11355,7 +11484,7 @@
         </p:nvSpPr>
         <p:spPr>
           <a:xfrm>
-            <a:off x="2832379" y="3523080"/>
+            <a:off x="2832379" y="3864660"/>
             <a:ext cx="1789963" cy="457200"/>
           </a:xfrm>
           <a:prstGeom prst="rect">
@@ -11396,8 +11525,8 @@
         </p:nvSpPr>
         <p:spPr>
           <a:xfrm>
-            <a:off x="2896387" y="4026000"/>
-            <a:ext cx="1661947" cy="1597560"/>
+            <a:off x="2896387" y="4413300"/>
+            <a:ext cx="1661947" cy="685800"/>
           </a:xfrm>
           <a:prstGeom prst="rect">
             <a:avLst/>
@@ -11437,8 +11566,8 @@
         </p:nvSpPr>
         <p:spPr>
           <a:xfrm>
-            <a:off x="4969815" y="1965960"/>
-            <a:ext cx="1936267" cy="3840480"/>
+            <a:off x="4969815" y="2307540"/>
+            <a:ext cx="1936267" cy="3157320"/>
           </a:xfrm>
           <a:prstGeom prst="roundRect">
             <a:avLst>
@@ -11464,18 +11593,18 @@
         </p:nvSpPr>
         <p:spPr>
           <a:xfrm>
-            <a:off x="5502288" y="2423160"/>
+            <a:off x="5502288" y="2764740"/>
             <a:ext cx="871320" cy="871320"/>
           </a:xfrm>
           <a:prstGeom prst="ellipse">
             <a:avLst/>
           </a:prstGeom>
           <a:solidFill>
-            <a:srgbClr val="C44B2F"/>
+            <a:srgbClr val="3B6BA8"/>
           </a:solidFill>
           <a:ln w="12700">
             <a:solidFill>
-              <a:srgbClr val="C44B2F"/>
+              <a:srgbClr val="3B6BA8"/>
             </a:solidFill>
             <a:prstDash val="solid"/>
           </a:ln>
@@ -11497,7 +11626,7 @@
         </p:blipFill>
         <p:spPr>
           <a:xfrm>
-            <a:off x="5676552" y="2597424"/>
+            <a:off x="5676552" y="2939004"/>
             <a:ext cx="522792" cy="522792"/>
           </a:xfrm>
           <a:prstGeom prst="rect">
@@ -11513,7 +11642,7 @@
         </p:nvSpPr>
         <p:spPr>
           <a:xfrm>
-            <a:off x="5042967" y="3523080"/>
+            <a:off x="5042967" y="3864660"/>
             <a:ext cx="1789963" cy="457200"/>
           </a:xfrm>
           <a:prstGeom prst="rect">
@@ -11554,8 +11683,8 @@
         </p:nvSpPr>
         <p:spPr>
           <a:xfrm>
-            <a:off x="5106975" y="4026000"/>
-            <a:ext cx="1661947" cy="1597560"/>
+            <a:off x="5106975" y="4413300"/>
+            <a:ext cx="1661947" cy="685800"/>
           </a:xfrm>
           <a:prstGeom prst="rect">
             <a:avLst/>
@@ -11673,9 +11802,9 @@
                 <a:solidFill>
                   <a:srgbClr val="FFFFFF"/>
                 </a:solidFill>
-                <a:latin typeface="Georgia" pitchFamily="34" charset="0"/>
-                <a:ea typeface="Georgia" pitchFamily="34" charset="-122"/>
-                <a:cs typeface="Georgia" pitchFamily="34" charset="-120"/>
+                <a:latin typeface="Arial" pitchFamily="34" charset="0"/>
+                <a:ea typeface="Arial" pitchFamily="34" charset="-122"/>
+                <a:cs typeface="Arial" pitchFamily="34" charset="-120"/>
               </a:rPr>
               <a:t>4</a:t>
             </a:r>
@@ -11718,7 +11847,24 @@
                 <a:ea typeface="Georgia" pitchFamily="34" charset="-122"/>
                 <a:cs typeface="Georgia" pitchFamily="34" charset="-120"/>
               </a:rPr>
-              <a:t>HELIX is the shared practice, built from templates</a:t>
+              <a:t>HELIX is the shared practice,</a:t>
+            </a:r>
+            <a:endParaRPr lang="en-US" sz="3600" dirty="0"/>
+          </a:p>
+          <a:p>
+            <a:pPr algn="l" indent="0" marL="0">
+              <a:buNone/>
+            </a:pPr>
+            <a:r>
+              <a:rPr lang="en-US" sz="3600" b="1" dirty="0">
+                <a:solidFill>
+                  <a:srgbClr val="1F2933"/>
+                </a:solidFill>
+                <a:latin typeface="Georgia" pitchFamily="34" charset="0"/>
+                <a:ea typeface="Georgia" pitchFamily="34" charset="-122"/>
+                <a:cs typeface="Georgia" pitchFamily="34" charset="-120"/>
+              </a:rPr>
+              <a:t>built from templates</a:t>
             </a:r>
             <a:endParaRPr lang="en-US" sz="3600" dirty="0"/>
           </a:p>
@@ -11810,17 +11956,17 @@
         </p:nvSpPr>
         <p:spPr>
           <a:xfrm>
-            <a:off x="3375508" y="2286000"/>
-            <a:ext cx="5440680" cy="3200400"/>
+            <a:off x="3725266" y="2286000"/>
+            <a:ext cx="4741164" cy="2788920"/>
           </a:xfrm>
           <a:prstGeom prst="ellipse">
             <a:avLst/>
           </a:prstGeom>
-          <a:ln w="38100">
+          <a:ln w="25400">
             <a:solidFill>
               <a:srgbClr val="D6DCE4"/>
             </a:solidFill>
-            <a:prstDash val="dash"/>
+            <a:prstDash val="solid"/>
           </a:ln>
         </p:spPr>
       </p:sp>
@@ -11832,8 +11978,8 @@
         </p:nvSpPr>
         <p:spPr>
           <a:xfrm>
-            <a:off x="4724248" y="3429000"/>
-            <a:ext cx="2743200" cy="914400"/>
+            <a:off x="4891126" y="3223260"/>
+            <a:ext cx="2409444" cy="914400"/>
           </a:xfrm>
           <a:prstGeom prst="rect">
             <a:avLst/>
@@ -11973,8 +12119,8 @@
         </p:blipFill>
         <p:spPr>
           <a:xfrm rot="1560000">
-            <a:off x="7148143" y="2316454"/>
-            <a:ext cx="256032" cy="256032"/>
+            <a:off x="6968957" y="2268647"/>
+            <a:ext cx="310896" cy="310896"/>
           </a:xfrm>
           <a:prstGeom prst="rect">
             <a:avLst/>
@@ -11989,7 +12135,7 @@
         </p:nvSpPr>
         <p:spPr>
           <a:xfrm>
-            <a:off x="7422595" y="2614172"/>
+            <a:off x="7149143" y="2536708"/>
             <a:ext cx="1600200" cy="548640"/>
           </a:xfrm>
           <a:prstGeom prst="roundRect">
@@ -12024,7 +12170,7 @@
         </p:blipFill>
         <p:spPr>
           <a:xfrm>
-            <a:off x="7587187" y="2723900"/>
+            <a:off x="7313735" y="2646436"/>
             <a:ext cx="329184" cy="329184"/>
           </a:xfrm>
           <a:prstGeom prst="rect">
@@ -12040,7 +12186,7 @@
         </p:nvSpPr>
         <p:spPr>
           <a:xfrm>
-            <a:off x="8007811" y="2659892"/>
+            <a:off x="7734359" y="2582428"/>
             <a:ext cx="877824" cy="457200"/>
           </a:xfrm>
           <a:prstGeom prst="rect">
@@ -12089,8 +12235,8 @@
         </p:blipFill>
         <p:spPr>
           <a:xfrm rot="4620000">
-            <a:off x="8619967" y="3402106"/>
-            <a:ext cx="256032" cy="256032"/>
+            <a:off x="8251546" y="3214715"/>
+            <a:ext cx="310896" cy="310896"/>
           </a:xfrm>
           <a:prstGeom prst="rect">
             <a:avLst/>
@@ -12105,7 +12251,7 @@
         </p:nvSpPr>
         <p:spPr>
           <a:xfrm>
-            <a:off x="7947883" y="3967958"/>
+            <a:off x="7606894" y="3716437"/>
             <a:ext cx="1600200" cy="548640"/>
           </a:xfrm>
           <a:prstGeom prst="roundRect">
@@ -12140,7 +12286,7 @@
         </p:blipFill>
         <p:spPr>
           <a:xfrm>
-            <a:off x="8112475" y="4077686"/>
+            <a:off x="7771486" y="3826165"/>
             <a:ext cx="329184" cy="329184"/>
           </a:xfrm>
           <a:prstGeom prst="rect">
@@ -12156,7 +12302,7 @@
         </p:nvSpPr>
         <p:spPr>
           <a:xfrm>
-            <a:off x="8533099" y="4013678"/>
+            <a:off x="8192110" y="3762157"/>
             <a:ext cx="877824" cy="457200"/>
           </a:xfrm>
           <a:prstGeom prst="rect">
@@ -12205,8 +12351,8 @@
         </p:blipFill>
         <p:spPr>
           <a:xfrm rot="7740000">
-            <a:off x="8094679" y="4755892"/>
-            <a:ext cx="256032" cy="256032"/>
+            <a:off x="7793795" y="4394444"/>
+            <a:ext cx="310896" cy="310896"/>
           </a:xfrm>
           <a:prstGeom prst="rect">
             <a:avLst/>
@@ -12221,7 +12367,7 @@
         </p:nvSpPr>
         <p:spPr>
           <a:xfrm>
-            <a:off x="6476059" y="5053610"/>
+            <a:off x="6324305" y="4662505"/>
             <a:ext cx="1600200" cy="548640"/>
           </a:xfrm>
           <a:prstGeom prst="roundRect">
@@ -12256,7 +12402,7 @@
         </p:blipFill>
         <p:spPr>
           <a:xfrm>
-            <a:off x="6640651" y="5163338"/>
+            <a:off x="6488897" y="4772233"/>
             <a:ext cx="329184" cy="329184"/>
           </a:xfrm>
           <a:prstGeom prst="rect">
@@ -12272,7 +12418,7 @@
         </p:nvSpPr>
         <p:spPr>
           <a:xfrm>
-            <a:off x="7061275" y="5099330"/>
+            <a:off x="6909521" y="4708225"/>
             <a:ext cx="877824" cy="457200"/>
           </a:xfrm>
           <a:prstGeom prst="rect">
@@ -12321,8 +12467,8 @@
         </p:blipFill>
         <p:spPr>
           <a:xfrm rot="10800000">
-            <a:off x="5967832" y="5358384"/>
-            <a:ext cx="256032" cy="256032"/>
+            <a:off x="5940400" y="4919472"/>
+            <a:ext cx="310896" cy="310896"/>
           </a:xfrm>
           <a:prstGeom prst="rect">
             <a:avLst/>
@@ -12337,7 +12483,7 @@
         </p:nvSpPr>
         <p:spPr>
           <a:xfrm>
-            <a:off x="4115436" y="5053610"/>
+            <a:off x="4267191" y="4662505"/>
             <a:ext cx="1600200" cy="548640"/>
           </a:xfrm>
           <a:prstGeom prst="roundRect">
@@ -12372,7 +12518,7 @@
         </p:blipFill>
         <p:spPr>
           <a:xfrm>
-            <a:off x="4280028" y="5163338"/>
+            <a:off x="4431783" y="4772233"/>
             <a:ext cx="329184" cy="329184"/>
           </a:xfrm>
           <a:prstGeom prst="rect">
@@ -12388,7 +12534,7 @@
         </p:nvSpPr>
         <p:spPr>
           <a:xfrm>
-            <a:off x="4700652" y="5099330"/>
+            <a:off x="4852407" y="4708225"/>
             <a:ext cx="877824" cy="457200"/>
           </a:xfrm>
           <a:prstGeom prst="rect">
@@ -12437,8 +12583,8 @@
         </p:blipFill>
         <p:spPr>
           <a:xfrm rot="13860000">
-            <a:off x="3840984" y="4755892"/>
-            <a:ext cx="256032" cy="256032"/>
+            <a:off x="4087004" y="4394444"/>
+            <a:ext cx="310896" cy="310896"/>
           </a:xfrm>
           <a:prstGeom prst="rect">
             <a:avLst/>
@@ -12453,7 +12599,7 @@
         </p:nvSpPr>
         <p:spPr>
           <a:xfrm>
-            <a:off x="2643612" y="3967958"/>
+            <a:off x="2984601" y="3716437"/>
             <a:ext cx="1600200" cy="548640"/>
           </a:xfrm>
           <a:prstGeom prst="roundRect">
@@ -12488,7 +12634,7 @@
         </p:blipFill>
         <p:spPr>
           <a:xfrm>
-            <a:off x="2808204" y="4077686"/>
+            <a:off x="3149193" y="3826165"/>
             <a:ext cx="329184" cy="329184"/>
           </a:xfrm>
           <a:prstGeom prst="rect">
@@ -12504,7 +12650,7 @@
         </p:nvSpPr>
         <p:spPr>
           <a:xfrm>
-            <a:off x="3228828" y="4013678"/>
+            <a:off x="3569817" y="3762157"/>
             <a:ext cx="877824" cy="457200"/>
           </a:xfrm>
           <a:prstGeom prst="rect">
@@ -12553,8 +12699,8 @@
         </p:blipFill>
         <p:spPr>
           <a:xfrm rot="16980000">
-            <a:off x="3315696" y="3402106"/>
-            <a:ext cx="256032" cy="256032"/>
+            <a:off x="3629253" y="3214715"/>
+            <a:ext cx="310896" cy="310896"/>
           </a:xfrm>
           <a:prstGeom prst="rect">
             <a:avLst/>
@@ -12569,7 +12715,7 @@
         </p:nvSpPr>
         <p:spPr>
           <a:xfrm>
-            <a:off x="3168900" y="2614172"/>
+            <a:off x="3442352" y="2536708"/>
             <a:ext cx="1600200" cy="548640"/>
           </a:xfrm>
           <a:prstGeom prst="roundRect">
@@ -12604,7 +12750,7 @@
         </p:blipFill>
         <p:spPr>
           <a:xfrm>
-            <a:off x="3333492" y="2723900"/>
+            <a:off x="3606944" y="2646436"/>
             <a:ext cx="329184" cy="329184"/>
           </a:xfrm>
           <a:prstGeom prst="rect">
@@ -12620,7 +12766,7 @@
         </p:nvSpPr>
         <p:spPr>
           <a:xfrm>
-            <a:off x="3754116" y="2659892"/>
+            <a:off x="4027568" y="2582428"/>
             <a:ext cx="877824" cy="457200"/>
           </a:xfrm>
           <a:prstGeom prst="rect">
@@ -12669,14 +12815,55 @@
         </p:blipFill>
         <p:spPr>
           <a:xfrm rot="20040000">
-            <a:off x="4787520" y="2316454"/>
-            <a:ext cx="256032" cy="256032"/>
+            <a:off x="4911843" y="2268647"/>
+            <a:ext cx="310896" cy="310896"/>
           </a:xfrm>
           <a:prstGeom prst="rect">
             <a:avLst/>
           </a:prstGeom>
         </p:spPr>
       </p:pic>
+      <p:sp>
+        <p:nvSpPr>
+          <p:cNvPr id="38" name="Text 21"/>
+          <p:cNvSpPr txBox="1"/>
+          <p:nvPr/>
+        </p:nvSpPr>
+        <p:spPr>
+          <a:xfrm>
+            <a:off x="548640" y="5440680"/>
+            <a:ext cx="11094415" cy="365760"/>
+          </a:xfrm>
+          <a:prstGeom prst="rect">
+            <a:avLst/>
+          </a:prstGeom>
+          <a:noFill/>
+          <a:ln/>
+        </p:spPr>
+        <p:txBody>
+          <a:bodyPr wrap="square" lIns="0" tIns="0" rIns="0" bIns="0" rtlCol="0" anchor="b">
+            <a:normAutofit/>
+          </a:bodyPr>
+          <a:lstStyle/>
+          <a:p>
+            <a:pPr algn="ctr" indent="0" marL="0">
+              <a:buNone/>
+            </a:pPr>
+            <a:r>
+              <a:rPr lang="en-US" sz="1300" dirty="0">
+                <a:solidFill>
+                  <a:srgbClr val="55606D"/>
+                </a:solidFill>
+                <a:latin typeface="Arial" pitchFamily="34" charset="0"/>
+                <a:ea typeface="Arial" pitchFamily="34" charset="-122"/>
+                <a:cs typeface="Arial" pitchFamily="34" charset="-120"/>
+              </a:rPr>
+              <a:t>a method you adopt one template at a time, with no platform to join</a:t>
+            </a:r>
+            <a:endParaRPr lang="en-US" sz="1300" dirty="0"/>
+          </a:p>
+        </p:txBody>
+      </p:sp>
     </p:spTree>
   </p:cSld>
   <p:clrMapOvr>
@@ -12763,9 +12950,9 @@
                 <a:solidFill>
                   <a:srgbClr val="FFFFFF"/>
                 </a:solidFill>
-                <a:latin typeface="Georgia" pitchFamily="34" charset="0"/>
-                <a:ea typeface="Georgia" pitchFamily="34" charset="-122"/>
-                <a:cs typeface="Georgia" pitchFamily="34" charset="-120"/>
+                <a:latin typeface="Arial" pitchFamily="34" charset="0"/>
+                <a:ea typeface="Arial" pitchFamily="34" charset="-122"/>
+                <a:cs typeface="Arial" pitchFamily="34" charset="-120"/>
               </a:rPr>
               <a:t>5</a:t>
             </a:r>
@@ -12808,7 +12995,24 @@
                 <a:ea typeface="Georgia" pitchFamily="34" charset="-122"/>
                 <a:cs typeface="Georgia" pitchFamily="34" charset="-120"/>
               </a:rPr>
-              <a:t>One skill reads the templates and routes each request</a:t>
+              <a:t>One skill reads the templates</a:t>
+            </a:r>
+            <a:endParaRPr lang="en-US" sz="3600" dirty="0"/>
+          </a:p>
+          <a:p>
+            <a:pPr algn="l" indent="0" marL="0">
+              <a:buNone/>
+            </a:pPr>
+            <a:r>
+              <a:rPr lang="en-US" sz="3600" b="1" dirty="0">
+                <a:solidFill>
+                  <a:srgbClr val="1F2933"/>
+                </a:solidFill>
+                <a:latin typeface="Georgia" pitchFamily="34" charset="0"/>
+                <a:ea typeface="Georgia" pitchFamily="34" charset="-122"/>
+                <a:cs typeface="Georgia" pitchFamily="34" charset="-120"/>
+              </a:rPr>
+              <a:t>and routes each request</a:t>
             </a:r>
             <a:endParaRPr lang="en-US" sz="3600" dirty="0"/>
           </a:p>
@@ -12915,13 +13119,13 @@
           <a:p>
             <a:pPr marL="228600" indent="-228600">
               <a:spcAft>
-                <a:spcPts val="1080"/>
+                <a:spcPts val="960"/>
               </a:spcAft>
               <a:buSzPct val="100000"/>
               <a:buChar char="•"/>
             </a:pPr>
             <a:r>
-              <a:rPr lang="en-US" sz="1800" dirty="0">
+              <a:rPr lang="en-US" sz="1600" dirty="0">
                 <a:solidFill>
                   <a:srgbClr val="1F2933"/>
                 </a:solidFill>
@@ -12931,18 +13135,18 @@
               </a:rPr>
               <a:t>A single skill installs on the agent runtime and reads the same documents</a:t>
             </a:r>
-            <a:endParaRPr lang="en-US" sz="1800" dirty="0"/>
+            <a:endParaRPr lang="en-US" sz="1600" dirty="0"/>
           </a:p>
           <a:p>
             <a:pPr marL="228600" indent="-228600">
               <a:spcAft>
-                <a:spcPts val="1080"/>
+                <a:spcPts val="960"/>
               </a:spcAft>
               <a:buSzPct val="100000"/>
               <a:buChar char="•"/>
             </a:pPr>
             <a:r>
-              <a:rPr lang="en-US" sz="1800" dirty="0">
+              <a:rPr lang="en-US" sz="1600" dirty="0">
                 <a:solidFill>
                   <a:srgbClr val="1F2933"/>
                 </a:solidFill>
@@ -12950,20 +13154,20 @@
                 <a:ea typeface="Arial" pitchFamily="34" charset="-122"/>
                 <a:cs typeface="Arial" pitchFamily="34" charset="-120"/>
               </a:rPr>
-              <a:t>It routes each request to one of twenty-one modes</a:t>
-            </a:r>
-            <a:endParaRPr lang="en-US" sz="1800" dirty="0"/>
+              <a:t>It routes each request to one of twenty-one jobs, from vision to deck</a:t>
+            </a:r>
+            <a:endParaRPr lang="en-US" sz="1600" dirty="0"/>
           </a:p>
           <a:p>
             <a:pPr marL="228600" indent="-228600">
               <a:spcAft>
-                <a:spcPts val="1080"/>
+                <a:spcPts val="960"/>
               </a:spcAft>
               <a:buSzPct val="100000"/>
               <a:buChar char="•"/>
             </a:pPr>
             <a:r>
-              <a:rPr lang="en-US" sz="1800" dirty="0">
+              <a:rPr lang="en-US" sz="1600" dirty="0">
                 <a:solidFill>
                   <a:srgbClr val="1F2933"/>
                 </a:solidFill>
@@ -12971,20 +13175,20 @@
                 <a:ea typeface="Arial" pitchFamily="34" charset="-122"/>
                 <a:cs typeface="Arial" pitchFamily="34" charset="-120"/>
               </a:rPr>
-              <a:t>Alignment is the required mode; it finds drift and hands back a plan</a:t>
-            </a:r>
-            <a:endParaRPr lang="en-US" sz="1800" dirty="0"/>
+              <a:t>The alignment check, which every team runs, finds drift and hands back a plan</a:t>
+            </a:r>
+            <a:endParaRPr lang="en-US" sz="1600" dirty="0"/>
           </a:p>
           <a:p>
             <a:pPr marL="228600" indent="-228600">
               <a:spcAft>
-                <a:spcPts val="1080"/>
+                <a:spcPts val="960"/>
               </a:spcAft>
               <a:buSzPct val="100000"/>
               <a:buChar char="•"/>
             </a:pPr>
             <a:r>
-              <a:rPr lang="en-US" sz="1800" dirty="0">
+              <a:rPr lang="en-US" sz="1600" dirty="0">
                 <a:solidFill>
                   <a:srgbClr val="1F2933"/>
                 </a:solidFill>
@@ -12994,7 +13198,7 @@
               </a:rPr>
               <a:t>The skill body is portable: no runtime commands, so it loads on any host</a:t>
             </a:r>
-            <a:endParaRPr lang="en-US" sz="1800" dirty="0"/>
+            <a:endParaRPr lang="en-US" sz="1600" dirty="0"/>
           </a:p>
         </p:txBody>
       </p:sp>
@@ -13083,7 +13287,7 @@
           <a:noFill/>
           <a:ln w="19050">
             <a:solidFill>
-              <a:srgbClr val="D6DCE4"/>
+              <a:srgbClr val="55606D"/>
             </a:solidFill>
             <a:prstDash val="solid"/>
             <a:headEnd type="none"/>
@@ -13108,7 +13312,7 @@
           <a:noFill/>
           <a:ln w="19050">
             <a:solidFill>
-              <a:srgbClr val="D6DCE4"/>
+              <a:srgbClr val="55606D"/>
             </a:solidFill>
             <a:prstDash val="solid"/>
             <a:headEnd type="none"/>
@@ -13133,7 +13337,7 @@
           <a:noFill/>
           <a:ln w="19050">
             <a:solidFill>
-              <a:srgbClr val="D6DCE4"/>
+              <a:srgbClr val="55606D"/>
             </a:solidFill>
             <a:prstDash val="solid"/>
             <a:headEnd type="none"/>
@@ -13289,7 +13493,7 @@
           <a:noFill/>
           <a:ln w="19050">
             <a:solidFill>
-              <a:srgbClr val="D6DCE4"/>
+              <a:srgbClr val="55606D"/>
             </a:solidFill>
             <a:prstDash val="solid"/>
             <a:headEnd type="none"/>
@@ -13445,7 +13649,7 @@
           <a:noFill/>
           <a:ln w="19050">
             <a:solidFill>
-              <a:srgbClr val="D6DCE4"/>
+              <a:srgbClr val="55606D"/>
             </a:solidFill>
             <a:prstDash val="solid"/>
             <a:headEnd type="none"/>
@@ -13601,7 +13805,7 @@
           <a:noFill/>
           <a:ln w="19050">
             <a:solidFill>
-              <a:srgbClr val="D6DCE4"/>
+              <a:srgbClr val="55606D"/>
             </a:solidFill>
             <a:prstDash val="solid"/>
             <a:headEnd type="none"/>
@@ -13826,9 +14030,9 @@
                 <a:solidFill>
                   <a:srgbClr val="FFFFFF"/>
                 </a:solidFill>
-                <a:latin typeface="Georgia" pitchFamily="34" charset="0"/>
-                <a:ea typeface="Georgia" pitchFamily="34" charset="-122"/>
-                <a:cs typeface="Georgia" pitchFamily="34" charset="-120"/>
+                <a:latin typeface="Arial" pitchFamily="34" charset="0"/>
+                <a:ea typeface="Arial" pitchFamily="34" charset="-122"/>
+                <a:cs typeface="Arial" pitchFamily="34" charset="-120"/>
               </a:rPr>
               <a:t>6</a:t>
             </a:r>
@@ -13871,7 +14075,24 @@
                 <a:ea typeface="Georgia" pitchFamily="34" charset="-122"/>
                 <a:cs typeface="Georgia" pitchFamily="34" charset="-120"/>
               </a:rPr>
-              <a:t>Each template layer governs the layer below</a:t>
+              <a:t>Each template layer</a:t>
+            </a:r>
+            <a:endParaRPr lang="en-US" sz="3600" dirty="0"/>
+          </a:p>
+          <a:p>
+            <a:pPr algn="l" indent="0" marL="0">
+              <a:buNone/>
+            </a:pPr>
+            <a:r>
+              <a:rPr lang="en-US" sz="3600" b="1" dirty="0">
+                <a:solidFill>
+                  <a:srgbClr val="1F2933"/>
+                </a:solidFill>
+                <a:latin typeface="Georgia" pitchFamily="34" charset="0"/>
+                <a:ea typeface="Georgia" pitchFamily="34" charset="-122"/>
+                <a:cs typeface="Georgia" pitchFamily="34" charset="-120"/>
+              </a:rPr>
+              <a:t>governs the layer below</a:t>
             </a:r>
             <a:endParaRPr lang="en-US" sz="3600" dirty="0"/>
           </a:p>
@@ -13964,11 +14185,11 @@
         <p:spPr>
           <a:xfrm>
             <a:off x="548640" y="1965960"/>
-            <a:ext cx="11094415" cy="457200"/>
+            <a:ext cx="11094415" cy="510235"/>
           </a:xfrm>
           <a:prstGeom prst="roundRect">
             <a:avLst>
-              <a:gd name="adj" fmla="val 16000"/>
+              <a:gd name="adj" fmla="val 14337"/>
             </a:avLst>
           </a:prstGeom>
           <a:solidFill>
@@ -13998,8 +14219,8 @@
         </p:blipFill>
         <p:spPr>
           <a:xfrm>
-            <a:off x="777240" y="2103120"/>
-            <a:ext cx="182880" cy="182880"/>
+            <a:off x="777240" y="2048256"/>
+            <a:ext cx="345643" cy="345643"/>
           </a:xfrm>
           <a:prstGeom prst="rect">
             <a:avLst/>
@@ -14014,8 +14235,8 @@
         </p:nvSpPr>
         <p:spPr>
           <a:xfrm>
-            <a:off x="1097280" y="2057400"/>
-            <a:ext cx="2377440" cy="274320"/>
+            <a:off x="1260043" y="2057400"/>
+            <a:ext cx="2214677" cy="327355"/>
           </a:xfrm>
           <a:prstGeom prst="rect">
             <a:avLst/>
@@ -14056,7 +14277,7 @@
         <p:spPr>
           <a:xfrm>
             <a:off x="3657600" y="2057400"/>
-            <a:ext cx="7756855" cy="274320"/>
+            <a:ext cx="7756855" cy="327355"/>
           </a:xfrm>
           <a:prstGeom prst="rect">
             <a:avLst/>
@@ -14096,8 +14317,8 @@
         </p:nvSpPr>
         <p:spPr>
           <a:xfrm>
-            <a:off x="1865376" y="2450592"/>
-            <a:ext cx="292608" cy="219456"/>
+            <a:off x="1865376" y="2503627"/>
+            <a:ext cx="292608" cy="164592"/>
           </a:xfrm>
           <a:prstGeom prst="downArrow">
             <a:avLst/>
@@ -14121,12 +14342,12 @@
         </p:nvSpPr>
         <p:spPr>
           <a:xfrm>
-            <a:off x="548640" y="2697480"/>
-            <a:ext cx="11094415" cy="457200"/>
+            <a:off x="548640" y="2695651"/>
+            <a:ext cx="11094415" cy="510235"/>
           </a:xfrm>
           <a:prstGeom prst="roundRect">
             <a:avLst>
-              <a:gd name="adj" fmla="val 16000"/>
+              <a:gd name="adj" fmla="val 14337"/>
             </a:avLst>
           </a:prstGeom>
           <a:solidFill>
@@ -14156,8 +14377,8 @@
         </p:blipFill>
         <p:spPr>
           <a:xfrm>
-            <a:off x="777240" y="2834640"/>
-            <a:ext cx="182880" cy="182880"/>
+            <a:off x="777240" y="2777947"/>
+            <a:ext cx="345643" cy="345643"/>
           </a:xfrm>
           <a:prstGeom prst="rect">
             <a:avLst/>
@@ -14172,8 +14393,8 @@
         </p:nvSpPr>
         <p:spPr>
           <a:xfrm>
-            <a:off x="1097280" y="2788920"/>
-            <a:ext cx="2377440" cy="274320"/>
+            <a:off x="1260043" y="2787091"/>
+            <a:ext cx="2214677" cy="327355"/>
           </a:xfrm>
           <a:prstGeom prst="rect">
             <a:avLst/>
@@ -14213,8 +14434,8 @@
         </p:nvSpPr>
         <p:spPr>
           <a:xfrm>
-            <a:off x="3657600" y="2788920"/>
-            <a:ext cx="7756855" cy="274320"/>
+            <a:off x="3657600" y="2787091"/>
+            <a:ext cx="7756855" cy="327355"/>
           </a:xfrm>
           <a:prstGeom prst="rect">
             <a:avLst/>
@@ -14254,8 +14475,8 @@
         </p:nvSpPr>
         <p:spPr>
           <a:xfrm>
-            <a:off x="1865376" y="3182112"/>
-            <a:ext cx="292608" cy="219456"/>
+            <a:off x="1865376" y="3233318"/>
+            <a:ext cx="292608" cy="164592"/>
           </a:xfrm>
           <a:prstGeom prst="downArrow">
             <a:avLst/>
@@ -14279,12 +14500,12 @@
         </p:nvSpPr>
         <p:spPr>
           <a:xfrm>
-            <a:off x="548640" y="3429000"/>
-            <a:ext cx="11094415" cy="457200"/>
+            <a:off x="548640" y="3425342"/>
+            <a:ext cx="11094415" cy="510235"/>
           </a:xfrm>
           <a:prstGeom prst="roundRect">
             <a:avLst>
-              <a:gd name="adj" fmla="val 16000"/>
+              <a:gd name="adj" fmla="val 14337"/>
             </a:avLst>
           </a:prstGeom>
           <a:solidFill>
@@ -14314,8 +14535,8 @@
         </p:blipFill>
         <p:spPr>
           <a:xfrm>
-            <a:off x="777240" y="3566160"/>
-            <a:ext cx="182880" cy="182880"/>
+            <a:off x="777240" y="3507638"/>
+            <a:ext cx="345643" cy="345643"/>
           </a:xfrm>
           <a:prstGeom prst="rect">
             <a:avLst/>
@@ -14330,8 +14551,8 @@
         </p:nvSpPr>
         <p:spPr>
           <a:xfrm>
-            <a:off x="1097280" y="3520440"/>
-            <a:ext cx="2377440" cy="274320"/>
+            <a:off x="1260043" y="3516782"/>
+            <a:ext cx="2214677" cy="327355"/>
           </a:xfrm>
           <a:prstGeom prst="rect">
             <a:avLst/>
@@ -14371,8 +14592,8 @@
         </p:nvSpPr>
         <p:spPr>
           <a:xfrm>
-            <a:off x="3657600" y="3520440"/>
-            <a:ext cx="7756855" cy="274320"/>
+            <a:off x="3657600" y="3516782"/>
+            <a:ext cx="7756855" cy="327355"/>
           </a:xfrm>
           <a:prstGeom prst="rect">
             <a:avLst/>
@@ -14412,8 +14633,8 @@
         </p:nvSpPr>
         <p:spPr>
           <a:xfrm>
-            <a:off x="1865376" y="3913632"/>
-            <a:ext cx="292608" cy="219456"/>
+            <a:off x="1865376" y="3963010"/>
+            <a:ext cx="292608" cy="164592"/>
           </a:xfrm>
           <a:prstGeom prst="downArrow">
             <a:avLst/>
@@ -14437,12 +14658,12 @@
         </p:nvSpPr>
         <p:spPr>
           <a:xfrm>
-            <a:off x="548640" y="4160520"/>
-            <a:ext cx="11094415" cy="457200"/>
+            <a:off x="548640" y="4155034"/>
+            <a:ext cx="11094415" cy="510235"/>
           </a:xfrm>
           <a:prstGeom prst="roundRect">
             <a:avLst>
-              <a:gd name="adj" fmla="val 16000"/>
+              <a:gd name="adj" fmla="val 14337"/>
             </a:avLst>
           </a:prstGeom>
           <a:solidFill>
@@ -14472,8 +14693,8 @@
         </p:blipFill>
         <p:spPr>
           <a:xfrm>
-            <a:off x="777240" y="4297680"/>
-            <a:ext cx="182880" cy="182880"/>
+            <a:off x="777240" y="4237330"/>
+            <a:ext cx="345643" cy="345643"/>
           </a:xfrm>
           <a:prstGeom prst="rect">
             <a:avLst/>
@@ -14488,8 +14709,8 @@
         </p:nvSpPr>
         <p:spPr>
           <a:xfrm>
-            <a:off x="1097280" y="4251960"/>
-            <a:ext cx="2377440" cy="274320"/>
+            <a:off x="1260043" y="4246474"/>
+            <a:ext cx="2214677" cy="327355"/>
           </a:xfrm>
           <a:prstGeom prst="rect">
             <a:avLst/>
@@ -14529,8 +14750,8 @@
         </p:nvSpPr>
         <p:spPr>
           <a:xfrm>
-            <a:off x="3657600" y="4251960"/>
-            <a:ext cx="7756855" cy="274320"/>
+            <a:off x="3657600" y="4246474"/>
+            <a:ext cx="7756855" cy="327355"/>
           </a:xfrm>
           <a:prstGeom prst="rect">
             <a:avLst/>
@@ -14570,8 +14791,8 @@
         </p:nvSpPr>
         <p:spPr>
           <a:xfrm>
-            <a:off x="1865376" y="4645152"/>
-            <a:ext cx="292608" cy="219456"/>
+            <a:off x="1865376" y="4692701"/>
+            <a:ext cx="292608" cy="164592"/>
           </a:xfrm>
           <a:prstGeom prst="downArrow">
             <a:avLst/>
@@ -14595,12 +14816,12 @@
         </p:nvSpPr>
         <p:spPr>
           <a:xfrm>
-            <a:off x="548640" y="4892040"/>
-            <a:ext cx="11094415" cy="457200"/>
+            <a:off x="548640" y="4884725"/>
+            <a:ext cx="11094415" cy="510235"/>
           </a:xfrm>
           <a:prstGeom prst="roundRect">
             <a:avLst>
-              <a:gd name="adj" fmla="val 16000"/>
+              <a:gd name="adj" fmla="val 14337"/>
             </a:avLst>
           </a:prstGeom>
           <a:solidFill>
@@ -14630,8 +14851,8 @@
         </p:blipFill>
         <p:spPr>
           <a:xfrm>
-            <a:off x="777240" y="5029200"/>
-            <a:ext cx="182880" cy="182880"/>
+            <a:off x="777240" y="4967021"/>
+            <a:ext cx="345643" cy="345643"/>
           </a:xfrm>
           <a:prstGeom prst="rect">
             <a:avLst/>
@@ -14646,8 +14867,8 @@
         </p:nvSpPr>
         <p:spPr>
           <a:xfrm>
-            <a:off x="1097280" y="4983480"/>
-            <a:ext cx="2377440" cy="274320"/>
+            <a:off x="1260043" y="4976165"/>
+            <a:ext cx="2214677" cy="327355"/>
           </a:xfrm>
           <a:prstGeom prst="rect">
             <a:avLst/>
@@ -14687,8 +14908,8 @@
         </p:nvSpPr>
         <p:spPr>
           <a:xfrm>
-            <a:off x="3657600" y="4983480"/>
-            <a:ext cx="7756855" cy="274320"/>
+            <a:off x="3657600" y="4976165"/>
+            <a:ext cx="7756855" cy="327355"/>
           </a:xfrm>
           <a:prstGeom prst="rect">
             <a:avLst/>
@@ -14728,8 +14949,8 @@
         </p:nvSpPr>
         <p:spPr>
           <a:xfrm>
-            <a:off x="548640" y="5394960"/>
-            <a:ext cx="11094415" cy="411480"/>
+            <a:off x="548640" y="5440680"/>
+            <a:ext cx="11094415" cy="365760"/>
           </a:xfrm>
           <a:prstGeom prst="rect">
             <a:avLst/>
@@ -14747,9 +14968,9 @@
               <a:buNone/>
             </a:pPr>
             <a:r>
-              <a:rPr lang="en-US" sz="1300" b="1" dirty="0">
+              <a:rPr lang="en-US" sz="1300" dirty="0">
                 <a:solidFill>
-                  <a:srgbClr val="C44B2F"/>
+                  <a:srgbClr val="55606D"/>
                 </a:solidFill>
                 <a:latin typeface="Arial" pitchFamily="34" charset="0"/>
                 <a:ea typeface="Arial" pitchFamily="34" charset="-122"/>
@@ -14847,9 +15068,9 @@
                 <a:solidFill>
                   <a:srgbClr val="FFFFFF"/>
                 </a:solidFill>
-                <a:latin typeface="Georgia" pitchFamily="34" charset="0"/>
-                <a:ea typeface="Georgia" pitchFamily="34" charset="-122"/>
-                <a:cs typeface="Georgia" pitchFamily="34" charset="-120"/>
+                <a:latin typeface="Arial" pitchFamily="34" charset="0"/>
+                <a:ea typeface="Arial" pitchFamily="34" charset="-122"/>
+                <a:cs typeface="Arial" pitchFamily="34" charset="-120"/>
               </a:rPr>
               <a:t>7</a:t>
             </a:r>
@@ -14892,7 +15113,24 @@
                 <a:ea typeface="Georgia" pitchFamily="34" charset="-122"/>
                 <a:cs typeface="Georgia" pitchFamily="34" charset="-120"/>
               </a:rPr>
-              <a:t>Concerns and gates carry control across layers</a:t>
+              <a:t>Shared choices and gates</a:t>
+            </a:r>
+            <a:endParaRPr lang="en-US" sz="3600" dirty="0"/>
+          </a:p>
+          <a:p>
+            <a:pPr algn="l" indent="0" marL="0">
+              <a:buNone/>
+            </a:pPr>
+            <a:r>
+              <a:rPr lang="en-US" sz="3600" b="1" dirty="0">
+                <a:solidFill>
+                  <a:srgbClr val="1F2933"/>
+                </a:solidFill>
+                <a:latin typeface="Georgia" pitchFamily="34" charset="0"/>
+                <a:ea typeface="Georgia" pitchFamily="34" charset="-122"/>
+                <a:cs typeface="Georgia" pitchFamily="34" charset="-120"/>
+              </a:rPr>
+              <a:t>carry control across layers</a:t>
             </a:r>
             <a:endParaRPr lang="en-US" sz="3600" dirty="0"/>
           </a:p>
@@ -14931,7 +15169,7 @@
                 <a:ea typeface="Arial" pitchFamily="34" charset="-122"/>
                 <a:cs typeface="Arial" pitchFamily="34" charset="-120"/>
               </a:rPr>
-              <a:t>Sources: S9, S11, S19 (appendix)</a:t>
+              <a:t>Sources: S9, S10, S11, S12, S19 (appendix)</a:t>
             </a:r>
             <a:endParaRPr lang="en-US" sz="900" dirty="0"/>
           </a:p>
@@ -15358,48 +15596,33 @@
           </a:ln>
         </p:spPr>
       </p:sp>
-      <p:sp>
-        <p:nvSpPr>
-          <p:cNvPr id="20" name="Text 15"/>
-          <p:cNvSpPr txBox="1"/>
-          <p:nvPr/>
-        </p:nvSpPr>
-        <p:spPr>
-          <a:xfrm>
-            <a:off x="6507328" y="2743200"/>
-            <a:ext cx="292608" cy="292608"/>
-          </a:xfrm>
-          <a:prstGeom prst="rect">
-            <a:avLst/>
-          </a:prstGeom>
-          <a:noFill/>
-          <a:ln/>
-        </p:spPr>
-        <p:txBody>
-          <a:bodyPr wrap="square" lIns="0" tIns="0" rIns="0" bIns="0" rtlCol="0" anchor="ctr"/>
-          <a:lstStyle/>
-          <a:p>
-            <a:pPr algn="ctr" indent="0" marL="0">
-              <a:buNone/>
-            </a:pPr>
-            <a:r>
-              <a:rPr lang="en-US" sz="1200" b="1" dirty="0">
-                <a:solidFill>
-                  <a:srgbClr val="FFFFFF"/>
-                </a:solidFill>
-                <a:latin typeface="Georgia" pitchFamily="34" charset="0"/>
-                <a:ea typeface="Georgia" pitchFamily="34" charset="-122"/>
-                <a:cs typeface="Georgia" pitchFamily="34" charset="-120"/>
-              </a:rPr>
-              <a:t>✓</a:t>
-            </a:r>
-            <a:endParaRPr lang="en-US" sz="1200" dirty="0"/>
-          </a:p>
-        </p:txBody>
-      </p:sp>
-      <p:sp>
-        <p:nvSpPr>
-          <p:cNvPr id="21" name="Text 16"/>
+      <p:pic>
+        <p:nvPicPr>
+          <p:cNvPr id="20" name="Image 2" descr="preencoded.png">    </p:cNvPr>
+          <p:cNvPicPr>
+            <a:picLocks noChangeAspect="1"/>
+          </p:cNvPicPr>
+          <p:nvPr/>
+        </p:nvPicPr>
+        <p:blipFill>
+          <a:blip r:embed="rId3"/>
+          <a:stretch>
+            <a:fillRect/>
+          </a:stretch>
+        </p:blipFill>
+        <p:spPr>
+          <a:xfrm>
+            <a:off x="6565849" y="2801722"/>
+            <a:ext cx="175565" cy="175565"/>
+          </a:xfrm>
+          <a:prstGeom prst="rect">
+            <a:avLst/>
+          </a:prstGeom>
+        </p:spPr>
+      </p:pic>
+      <p:sp>
+        <p:nvSpPr>
+          <p:cNvPr id="21" name="Text 15"/>
           <p:cNvSpPr txBox="1"/>
           <p:nvPr/>
         </p:nvSpPr>
@@ -15432,7 +15655,7 @@
                 <a:ea typeface="Arial" pitchFamily="34" charset="-122"/>
                 <a:cs typeface="Arial" pitchFamily="34" charset="-120"/>
               </a:rPr>
-              <a:t>The team selects a concern once and its practices propagate down</a:t>
+              <a:t>The team picks each shared choice once and every agent inherits it</a:t>
             </a:r>
             <a:endParaRPr lang="en-US" sz="1500" dirty="0"/>
           </a:p>
@@ -15440,7 +15663,7 @@
       </p:sp>
       <p:sp>
         <p:nvSpPr>
-          <p:cNvPr id="22" name="Shape 17"/>
+          <p:cNvPr id="22" name="Shape 16"/>
           <p:cNvSpPr/>
           <p:nvPr/>
         </p:nvSpPr>
@@ -15463,48 +15686,33 @@
           </a:ln>
         </p:spPr>
       </p:sp>
-      <p:sp>
-        <p:nvSpPr>
-          <p:cNvPr id="23" name="Text 18"/>
-          <p:cNvSpPr txBox="1"/>
-          <p:nvPr/>
-        </p:nvSpPr>
-        <p:spPr>
-          <a:xfrm>
-            <a:off x="6507328" y="3474720"/>
-            <a:ext cx="292608" cy="292608"/>
-          </a:xfrm>
-          <a:prstGeom prst="rect">
-            <a:avLst/>
-          </a:prstGeom>
-          <a:noFill/>
-          <a:ln/>
-        </p:spPr>
-        <p:txBody>
-          <a:bodyPr wrap="square" lIns="0" tIns="0" rIns="0" bIns="0" rtlCol="0" anchor="ctr"/>
-          <a:lstStyle/>
-          <a:p>
-            <a:pPr algn="ctr" indent="0" marL="0">
-              <a:buNone/>
-            </a:pPr>
-            <a:r>
-              <a:rPr lang="en-US" sz="1200" b="1" dirty="0">
-                <a:solidFill>
-                  <a:srgbClr val="FFFFFF"/>
-                </a:solidFill>
-                <a:latin typeface="Georgia" pitchFamily="34" charset="0"/>
-                <a:ea typeface="Georgia" pitchFamily="34" charset="-122"/>
-                <a:cs typeface="Georgia" pitchFamily="34" charset="-120"/>
-              </a:rPr>
-              <a:t>✓</a:t>
-            </a:r>
-            <a:endParaRPr lang="en-US" sz="1200" dirty="0"/>
-          </a:p>
-        </p:txBody>
-      </p:sp>
-      <p:sp>
-        <p:nvSpPr>
-          <p:cNvPr id="24" name="Text 19"/>
+      <p:pic>
+        <p:nvPicPr>
+          <p:cNvPr id="23" name="Image 3" descr="preencoded.png">    </p:cNvPr>
+          <p:cNvPicPr>
+            <a:picLocks noChangeAspect="1"/>
+          </p:cNvPicPr>
+          <p:nvPr/>
+        </p:nvPicPr>
+        <p:blipFill>
+          <a:blip r:embed="rId4"/>
+          <a:stretch>
+            <a:fillRect/>
+          </a:stretch>
+        </p:blipFill>
+        <p:spPr>
+          <a:xfrm>
+            <a:off x="6565849" y="3533242"/>
+            <a:ext cx="175565" cy="175565"/>
+          </a:xfrm>
+          <a:prstGeom prst="rect">
+            <a:avLst/>
+          </a:prstGeom>
+        </p:spPr>
+      </p:pic>
+      <p:sp>
+        <p:nvSpPr>
+          <p:cNvPr id="24" name="Text 17"/>
           <p:cNvSpPr txBox="1"/>
           <p:nvPr/>
         </p:nvSpPr>
@@ -15545,7 +15753,7 @@
       </p:sp>
       <p:sp>
         <p:nvSpPr>
-          <p:cNvPr id="25" name="Shape 20"/>
+          <p:cNvPr id="25" name="Shape 18"/>
           <p:cNvSpPr/>
           <p:nvPr/>
         </p:nvSpPr>
@@ -15568,48 +15776,33 @@
           </a:ln>
         </p:spPr>
       </p:sp>
-      <p:sp>
-        <p:nvSpPr>
-          <p:cNvPr id="26" name="Text 21"/>
-          <p:cNvSpPr txBox="1"/>
-          <p:nvPr/>
-        </p:nvSpPr>
-        <p:spPr>
-          <a:xfrm>
-            <a:off x="6507328" y="4206240"/>
-            <a:ext cx="292608" cy="292608"/>
-          </a:xfrm>
-          <a:prstGeom prst="rect">
-            <a:avLst/>
-          </a:prstGeom>
-          <a:noFill/>
-          <a:ln/>
-        </p:spPr>
-        <p:txBody>
-          <a:bodyPr wrap="square" lIns="0" tIns="0" rIns="0" bIns="0" rtlCol="0" anchor="ctr"/>
-          <a:lstStyle/>
-          <a:p>
-            <a:pPr algn="ctr" indent="0" marL="0">
-              <a:buNone/>
-            </a:pPr>
-            <a:r>
-              <a:rPr lang="en-US" sz="1200" b="1" dirty="0">
-                <a:solidFill>
-                  <a:srgbClr val="FFFFFF"/>
-                </a:solidFill>
-                <a:latin typeface="Georgia" pitchFamily="34" charset="0"/>
-                <a:ea typeface="Georgia" pitchFamily="34" charset="-122"/>
-                <a:cs typeface="Georgia" pitchFamily="34" charset="-120"/>
-              </a:rPr>
-              <a:t>✓</a:t>
-            </a:r>
-            <a:endParaRPr lang="en-US" sz="1200" dirty="0"/>
-          </a:p>
-        </p:txBody>
-      </p:sp>
-      <p:sp>
-        <p:nvSpPr>
-          <p:cNvPr id="27" name="Text 22"/>
+      <p:pic>
+        <p:nvPicPr>
+          <p:cNvPr id="26" name="Image 4" descr="preencoded.png">    </p:cNvPr>
+          <p:cNvPicPr>
+            <a:picLocks noChangeAspect="1"/>
+          </p:cNvPicPr>
+          <p:nvPr/>
+        </p:nvPicPr>
+        <p:blipFill>
+          <a:blip r:embed="rId5"/>
+          <a:stretch>
+            <a:fillRect/>
+          </a:stretch>
+        </p:blipFill>
+        <p:spPr>
+          <a:xfrm>
+            <a:off x="6565849" y="4264762"/>
+            <a:ext cx="175565" cy="175565"/>
+          </a:xfrm>
+          <a:prstGeom prst="rect">
+            <a:avLst/>
+          </a:prstGeom>
+        </p:spPr>
+      </p:pic>
+      <p:sp>
+        <p:nvSpPr>
+          <p:cNvPr id="27" name="Text 19"/>
           <p:cNvSpPr txBox="1"/>
           <p:nvPr/>
         </p:nvSpPr>
@@ -15650,7 +15843,7 @@
       </p:sp>
       <p:sp>
         <p:nvSpPr>
-          <p:cNvPr id="28" name="Text 23"/>
+          <p:cNvPr id="28" name="Text 20"/>
           <p:cNvSpPr txBox="1"/>
           <p:nvPr/>
         </p:nvSpPr>
@@ -15775,9 +15968,9 @@
                 <a:solidFill>
                   <a:srgbClr val="FFFFFF"/>
                 </a:solidFill>
-                <a:latin typeface="Georgia" pitchFamily="34" charset="0"/>
-                <a:ea typeface="Georgia" pitchFamily="34" charset="-122"/>
-                <a:cs typeface="Georgia" pitchFamily="34" charset="-120"/>
+                <a:latin typeface="Arial" pitchFamily="34" charset="0"/>
+                <a:ea typeface="Arial" pitchFamily="34" charset="-122"/>
+                <a:cs typeface="Arial" pitchFamily="34" charset="-120"/>
               </a:rPr>
               <a:t>8</a:t>
             </a:r>
@@ -15820,7 +16013,24 @@
                 <a:ea typeface="Georgia" pitchFamily="34" charset="-122"/>
                 <a:cs typeface="Georgia" pitchFamily="34" charset="-120"/>
               </a:rPr>
-              <a:t>Those same layers produce the documents sponsors read</a:t>
+              <a:t>Those same layers produce</a:t>
+            </a:r>
+            <a:endParaRPr lang="en-US" sz="3600" dirty="0"/>
+          </a:p>
+          <a:p>
+            <a:pPr algn="l" indent="0" marL="0">
+              <a:buNone/>
+            </a:pPr>
+            <a:r>
+              <a:rPr lang="en-US" sz="3600" b="1" dirty="0">
+                <a:solidFill>
+                  <a:srgbClr val="1F2933"/>
+                </a:solidFill>
+                <a:latin typeface="Georgia" pitchFamily="34" charset="0"/>
+                <a:ea typeface="Georgia" pitchFamily="34" charset="-122"/>
+                <a:cs typeface="Georgia" pitchFamily="34" charset="-120"/>
+              </a:rPr>
+              <a:t>the documents sponsors read</a:t>
             </a:r>
             <a:endParaRPr lang="en-US" sz="3600" dirty="0"/>
           </a:p>
@@ -15912,8 +16122,35 @@
         </p:nvSpPr>
         <p:spPr>
           <a:xfrm>
-            <a:off x="548640" y="2308860"/>
-            <a:ext cx="685800" cy="685800"/>
+            <a:off x="548640" y="2286000"/>
+            <a:ext cx="3515258" cy="3200400"/>
+          </a:xfrm>
+          <a:prstGeom prst="roundRect">
+            <a:avLst>
+              <a:gd name="adj" fmla="val 2857"/>
+            </a:avLst>
+          </a:prstGeom>
+          <a:solidFill>
+            <a:srgbClr val="F3F5F8"/>
+          </a:solidFill>
+          <a:ln w="9525">
+            <a:solidFill>
+              <a:srgbClr val="D6DCE4"/>
+            </a:solidFill>
+            <a:prstDash val="solid"/>
+          </a:ln>
+        </p:spPr>
+      </p:sp>
+      <p:sp>
+        <p:nvSpPr>
+          <p:cNvPr id="9" name="Shape 6"/>
+          <p:cNvSpPr/>
+          <p:nvPr/>
+        </p:nvSpPr>
+        <p:spPr>
+          <a:xfrm>
+            <a:off x="1849069" y="2743200"/>
+            <a:ext cx="914400" cy="914400"/>
           </a:xfrm>
           <a:prstGeom prst="ellipse">
             <a:avLst/>
@@ -15931,7 +16168,7 @@
       </p:sp>
       <p:pic>
         <p:nvPicPr>
-          <p:cNvPr id="9" name="Image 0" descr="preencoded.png">    </p:cNvPr>
+          <p:cNvPr id="10" name="Image 0" descr="preencoded.png">    </p:cNvPr>
           <p:cNvPicPr>
             <a:picLocks noChangeAspect="1"/>
           </p:cNvPicPr>
@@ -15945,8 +16182,8 @@
         </p:blipFill>
         <p:spPr>
           <a:xfrm>
-            <a:off x="685800" y="2446020"/>
-            <a:ext cx="411480" cy="411480"/>
+            <a:off x="2031949" y="2926080"/>
+            <a:ext cx="548640" cy="548640"/>
           </a:xfrm>
           <a:prstGeom prst="rect">
             <a:avLst/>
@@ -15955,14 +16192,14 @@
       </p:pic>
       <p:sp>
         <p:nvSpPr>
-          <p:cNvPr id="10" name="Text 6"/>
+          <p:cNvPr id="11" name="Text 7"/>
           <p:cNvSpPr txBox="1"/>
           <p:nvPr/>
         </p:nvSpPr>
         <p:spPr>
           <a:xfrm>
-            <a:off x="1463040" y="2103120"/>
-            <a:ext cx="10180015" cy="534924"/>
+            <a:off x="621792" y="3886200"/>
+            <a:ext cx="3368954" cy="457200"/>
           </a:xfrm>
           <a:prstGeom prst="rect">
             <a:avLst/>
@@ -15971,16 +16208,16 @@
           <a:ln/>
         </p:spPr>
         <p:txBody>
-          <a:bodyPr wrap="square" lIns="0" tIns="0" rIns="0" bIns="0" rtlCol="0" anchor="b">
+          <a:bodyPr wrap="square" lIns="0" tIns="0" rIns="0" bIns="0" rtlCol="0" anchor="t">
             <a:normAutofit/>
           </a:bodyPr>
           <a:lstStyle/>
           <a:p>
-            <a:pPr algn="l" indent="0" marL="0">
+            <a:pPr algn="ctr" indent="0" marL="0">
               <a:buNone/>
             </a:pPr>
             <a:r>
-              <a:rPr lang="en-US" sz="1800" b="1" dirty="0">
+              <a:rPr lang="en-US" sz="1600" b="1" dirty="0">
                 <a:solidFill>
                   <a:srgbClr val="1F2933"/>
                 </a:solidFill>
@@ -15990,20 +16227,20 @@
               </a:rPr>
               <a:t>Status report</a:t>
             </a:r>
-            <a:endParaRPr lang="en-US" sz="1800" dirty="0"/>
-          </a:p>
-        </p:txBody>
-      </p:sp>
-      <p:sp>
-        <p:nvSpPr>
-          <p:cNvPr id="11" name="Text 7"/>
+            <a:endParaRPr lang="en-US" sz="1600" dirty="0"/>
+          </a:p>
+        </p:txBody>
+      </p:sp>
+      <p:sp>
+        <p:nvSpPr>
+          <p:cNvPr id="12" name="Text 8"/>
           <p:cNvSpPr txBox="1"/>
           <p:nvPr/>
         </p:nvSpPr>
         <p:spPr>
           <a:xfrm>
-            <a:off x="1463040" y="2673706"/>
-            <a:ext cx="10180015" cy="594360"/>
+            <a:off x="685800" y="4434840"/>
+            <a:ext cx="3240938" cy="685800"/>
           </a:xfrm>
           <a:prstGeom prst="rect">
             <a:avLst/>
@@ -16017,11 +16254,11 @@
           </a:bodyPr>
           <a:lstStyle/>
           <a:p>
-            <a:pPr algn="l" indent="0" marL="0">
+            <a:pPr algn="ctr" indent="0" marL="0">
               <a:buNone/>
             </a:pPr>
             <a:r>
-              <a:rPr lang="en-US" sz="1400" dirty="0">
+              <a:rPr lang="en-US" sz="1300" dirty="0">
                 <a:solidFill>
                   <a:srgbClr val="55606D"/>
                 </a:solidFill>
@@ -16031,20 +16268,47 @@
               </a:rPr>
               <a:t>for sponsors and clients, from the iteration plan, with evidence per claim</a:t>
             </a:r>
-            <a:endParaRPr lang="en-US" sz="1400" dirty="0"/>
-          </a:p>
-        </p:txBody>
-      </p:sp>
-      <p:sp>
-        <p:nvSpPr>
-          <p:cNvPr id="12" name="Shape 8"/>
+            <a:endParaRPr lang="en-US" sz="1300" dirty="0"/>
+          </a:p>
+        </p:txBody>
+      </p:sp>
+      <p:sp>
+        <p:nvSpPr>
+          <p:cNvPr id="13" name="Shape 9"/>
           <p:cNvSpPr/>
           <p:nvPr/>
         </p:nvSpPr>
         <p:spPr>
           <a:xfrm>
-            <a:off x="548640" y="3497580"/>
-            <a:ext cx="685800" cy="685800"/>
+            <a:off x="4338218" y="2286000"/>
+            <a:ext cx="3515258" cy="3200400"/>
+          </a:xfrm>
+          <a:prstGeom prst="roundRect">
+            <a:avLst>
+              <a:gd name="adj" fmla="val 2857"/>
+            </a:avLst>
+          </a:prstGeom>
+          <a:solidFill>
+            <a:srgbClr val="F3F5F8"/>
+          </a:solidFill>
+          <a:ln w="9525">
+            <a:solidFill>
+              <a:srgbClr val="D6DCE4"/>
+            </a:solidFill>
+            <a:prstDash val="solid"/>
+          </a:ln>
+        </p:spPr>
+      </p:sp>
+      <p:sp>
+        <p:nvSpPr>
+          <p:cNvPr id="14" name="Shape 10"/>
+          <p:cNvSpPr/>
+          <p:nvPr/>
+        </p:nvSpPr>
+        <p:spPr>
+          <a:xfrm>
+            <a:off x="5638648" y="2743200"/>
+            <a:ext cx="914400" cy="914400"/>
           </a:xfrm>
           <a:prstGeom prst="ellipse">
             <a:avLst/>
@@ -16062,7 +16326,7 @@
       </p:sp>
       <p:pic>
         <p:nvPicPr>
-          <p:cNvPr id="13" name="Image 1" descr="preencoded.png">    </p:cNvPr>
+          <p:cNvPr id="15" name="Image 1" descr="preencoded.png">    </p:cNvPr>
           <p:cNvPicPr>
             <a:picLocks noChangeAspect="1"/>
           </p:cNvPicPr>
@@ -16076,8 +16340,8 @@
         </p:blipFill>
         <p:spPr>
           <a:xfrm>
-            <a:off x="685800" y="3634740"/>
-            <a:ext cx="411480" cy="411480"/>
+            <a:off x="5821528" y="2926080"/>
+            <a:ext cx="548640" cy="548640"/>
           </a:xfrm>
           <a:prstGeom prst="rect">
             <a:avLst/>
@@ -16086,14 +16350,14 @@
       </p:pic>
       <p:sp>
         <p:nvSpPr>
-          <p:cNvPr id="14" name="Text 9"/>
+          <p:cNvPr id="16" name="Text 11"/>
           <p:cNvSpPr txBox="1"/>
           <p:nvPr/>
         </p:nvSpPr>
         <p:spPr>
           <a:xfrm>
-            <a:off x="1463040" y="3291840"/>
-            <a:ext cx="10180015" cy="534924"/>
+            <a:off x="4411370" y="3886200"/>
+            <a:ext cx="3368954" cy="457200"/>
           </a:xfrm>
           <a:prstGeom prst="rect">
             <a:avLst/>
@@ -16102,16 +16366,16 @@
           <a:ln/>
         </p:spPr>
         <p:txBody>
-          <a:bodyPr wrap="square" lIns="0" tIns="0" rIns="0" bIns="0" rtlCol="0" anchor="b">
+          <a:bodyPr wrap="square" lIns="0" tIns="0" rIns="0" bIns="0" rtlCol="0" anchor="t">
             <a:normAutofit/>
           </a:bodyPr>
           <a:lstStyle/>
           <a:p>
-            <a:pPr algn="l" indent="0" marL="0">
+            <a:pPr algn="ctr" indent="0" marL="0">
               <a:buNone/>
             </a:pPr>
             <a:r>
-              <a:rPr lang="en-US" sz="1800" b="1" dirty="0">
+              <a:rPr lang="en-US" sz="1600" b="1" dirty="0">
                 <a:solidFill>
                   <a:srgbClr val="1F2933"/>
                 </a:solidFill>
@@ -16121,20 +16385,20 @@
               </a:rPr>
               <a:t>Deck or brief</a:t>
             </a:r>
-            <a:endParaRPr lang="en-US" sz="1800" dirty="0"/>
-          </a:p>
-        </p:txBody>
-      </p:sp>
-      <p:sp>
-        <p:nvSpPr>
-          <p:cNvPr id="15" name="Text 10"/>
+            <a:endParaRPr lang="en-US" sz="1600" dirty="0"/>
+          </a:p>
+        </p:txBody>
+      </p:sp>
+      <p:sp>
+        <p:nvSpPr>
+          <p:cNvPr id="17" name="Text 12"/>
           <p:cNvSpPr txBox="1"/>
           <p:nvPr/>
         </p:nvSpPr>
         <p:spPr>
           <a:xfrm>
-            <a:off x="1463040" y="3862426"/>
-            <a:ext cx="10180015" cy="594360"/>
+            <a:off x="4475378" y="4434840"/>
+            <a:ext cx="3240938" cy="685800"/>
           </a:xfrm>
           <a:prstGeom prst="rect">
             <a:avLst/>
@@ -16148,11 +16412,11 @@
           </a:bodyPr>
           <a:lstStyle/>
           <a:p>
-            <a:pPr algn="l" indent="0" marL="0">
+            <a:pPr algn="ctr" indent="0" marL="0">
               <a:buNone/>
             </a:pPr>
             <a:r>
-              <a:rPr lang="en-US" sz="1400" dirty="0">
+              <a:rPr lang="en-US" sz="1300" dirty="0">
                 <a:solidFill>
                   <a:srgbClr val="55606D"/>
                 </a:solidFill>
@@ -16162,20 +16426,47 @@
               </a:rPr>
               <a:t>for executives and customers, from any governed document set, every number sourced</a:t>
             </a:r>
-            <a:endParaRPr lang="en-US" sz="1400" dirty="0"/>
-          </a:p>
-        </p:txBody>
-      </p:sp>
-      <p:sp>
-        <p:nvSpPr>
-          <p:cNvPr id="16" name="Shape 11"/>
+            <a:endParaRPr lang="en-US" sz="1300" dirty="0"/>
+          </a:p>
+        </p:txBody>
+      </p:sp>
+      <p:sp>
+        <p:nvSpPr>
+          <p:cNvPr id="18" name="Shape 13"/>
           <p:cNvSpPr/>
           <p:nvPr/>
         </p:nvSpPr>
         <p:spPr>
           <a:xfrm>
-            <a:off x="548640" y="4686300"/>
-            <a:ext cx="685800" cy="685800"/>
+            <a:off x="8127797" y="2286000"/>
+            <a:ext cx="3515258" cy="3200400"/>
+          </a:xfrm>
+          <a:prstGeom prst="roundRect">
+            <a:avLst>
+              <a:gd name="adj" fmla="val 2857"/>
+            </a:avLst>
+          </a:prstGeom>
+          <a:solidFill>
+            <a:srgbClr val="F3F5F8"/>
+          </a:solidFill>
+          <a:ln w="9525">
+            <a:solidFill>
+              <a:srgbClr val="D6DCE4"/>
+            </a:solidFill>
+            <a:prstDash val="solid"/>
+          </a:ln>
+        </p:spPr>
+      </p:sp>
+      <p:sp>
+        <p:nvSpPr>
+          <p:cNvPr id="19" name="Shape 14"/>
+          <p:cNvSpPr/>
+          <p:nvPr/>
+        </p:nvSpPr>
+        <p:spPr>
+          <a:xfrm>
+            <a:off x="9428226" y="2743200"/>
+            <a:ext cx="914400" cy="914400"/>
           </a:xfrm>
           <a:prstGeom prst="ellipse">
             <a:avLst/>
@@ -16193,7 +16484,7 @@
       </p:sp>
       <p:pic>
         <p:nvPicPr>
-          <p:cNvPr id="17" name="Image 2" descr="preencoded.png">    </p:cNvPr>
+          <p:cNvPr id="20" name="Image 2" descr="preencoded.png">    </p:cNvPr>
           <p:cNvPicPr>
             <a:picLocks noChangeAspect="1"/>
           </p:cNvPicPr>
@@ -16207,8 +16498,8 @@
         </p:blipFill>
         <p:spPr>
           <a:xfrm>
-            <a:off x="685800" y="4823460"/>
-            <a:ext cx="411480" cy="411480"/>
+            <a:off x="9611106" y="2926080"/>
+            <a:ext cx="548640" cy="548640"/>
           </a:xfrm>
           <a:prstGeom prst="rect">
             <a:avLst/>
@@ -16217,14 +16508,14 @@
       </p:pic>
       <p:sp>
         <p:nvSpPr>
-          <p:cNvPr id="18" name="Text 12"/>
+          <p:cNvPr id="21" name="Text 15"/>
           <p:cNvSpPr txBox="1"/>
           <p:nvPr/>
         </p:nvSpPr>
         <p:spPr>
           <a:xfrm>
-            <a:off x="1463040" y="4480560"/>
-            <a:ext cx="10180015" cy="534924"/>
+            <a:off x="8200949" y="3886200"/>
+            <a:ext cx="3368954" cy="457200"/>
           </a:xfrm>
           <a:prstGeom prst="rect">
             <a:avLst/>
@@ -16233,16 +16524,16 @@
           <a:ln/>
         </p:spPr>
         <p:txBody>
-          <a:bodyPr wrap="square" lIns="0" tIns="0" rIns="0" bIns="0" rtlCol="0" anchor="b">
+          <a:bodyPr wrap="square" lIns="0" tIns="0" rIns="0" bIns="0" rtlCol="0" anchor="t">
             <a:normAutofit/>
           </a:bodyPr>
           <a:lstStyle/>
           <a:p>
-            <a:pPr algn="l" indent="0" marL="0">
+            <a:pPr algn="ctr" indent="0" marL="0">
               <a:buNone/>
             </a:pPr>
             <a:r>
-              <a:rPr lang="en-US" sz="1800" b="1" dirty="0">
+              <a:rPr lang="en-US" sz="1600" b="1" dirty="0">
                 <a:solidFill>
                   <a:srgbClr val="1F2933"/>
                 </a:solidFill>
@@ -16252,20 +16543,20 @@
               </a:rPr>
               <a:t>Release notes</a:t>
             </a:r>
-            <a:endParaRPr lang="en-US" sz="1800" dirty="0"/>
-          </a:p>
-        </p:txBody>
-      </p:sp>
-      <p:sp>
-        <p:nvSpPr>
-          <p:cNvPr id="19" name="Text 13"/>
+            <a:endParaRPr lang="en-US" sz="1600" dirty="0"/>
+          </a:p>
+        </p:txBody>
+      </p:sp>
+      <p:sp>
+        <p:nvSpPr>
+          <p:cNvPr id="22" name="Text 16"/>
           <p:cNvSpPr txBox="1"/>
           <p:nvPr/>
         </p:nvSpPr>
         <p:spPr>
           <a:xfrm>
-            <a:off x="1463040" y="5051146"/>
-            <a:ext cx="10180015" cy="594360"/>
+            <a:off x="8264957" y="4434840"/>
+            <a:ext cx="3240938" cy="685800"/>
           </a:xfrm>
           <a:prstGeom prst="rect">
             <a:avLst/>
@@ -16279,11 +16570,11 @@
           </a:bodyPr>
           <a:lstStyle/>
           <a:p>
-            <a:pPr algn="l" indent="0" marL="0">
+            <a:pPr algn="ctr" indent="0" marL="0">
               <a:buNone/>
             </a:pPr>
             <a:r>
-              <a:rPr lang="en-US" sz="1400" dirty="0">
+              <a:rPr lang="en-US" sz="1300" dirty="0">
                 <a:solidFill>
                   <a:srgbClr val="55606D"/>
                 </a:solidFill>
@@ -16293,7 +16584,7 @@
               </a:rPr>
               <a:t>for users and support, from the deploy documents</a:t>
             </a:r>
-            <a:endParaRPr lang="en-US" sz="1400" dirty="0"/>
+            <a:endParaRPr lang="en-US" sz="1300" dirty="0"/>
           </a:p>
         </p:txBody>
       </p:sp>
@@ -16383,9 +16674,9 @@
                 <a:solidFill>
                   <a:srgbClr val="FFFFFF"/>
                 </a:solidFill>
-                <a:latin typeface="Georgia" pitchFamily="34" charset="0"/>
-                <a:ea typeface="Georgia" pitchFamily="34" charset="-122"/>
-                <a:cs typeface="Georgia" pitchFamily="34" charset="-120"/>
+                <a:latin typeface="Arial" pitchFamily="34" charset="0"/>
+                <a:ea typeface="Arial" pitchFamily="34" charset="-122"/>
+                <a:cs typeface="Arial" pitchFamily="34" charset="-120"/>
               </a:rPr>
               <a:t>9</a:t>
             </a:r>
@@ -16428,7 +16719,24 @@
                 <a:ea typeface="Georgia" pitchFamily="34" charset="-122"/>
                 <a:cs typeface="Georgia" pitchFamily="34" charset="-120"/>
               </a:rPr>
-              <a:t>One gate caught five affected documents before coding</a:t>
+              <a:t>In the worked example, one</a:t>
+            </a:r>
+            <a:endParaRPr lang="en-US" sz="3600" dirty="0"/>
+          </a:p>
+          <a:p>
+            <a:pPr algn="l" indent="0" marL="0">
+              <a:buNone/>
+            </a:pPr>
+            <a:r>
+              <a:rPr lang="en-US" sz="3600" b="1" dirty="0">
+                <a:solidFill>
+                  <a:srgbClr val="1F2933"/>
+                </a:solidFill>
+                <a:latin typeface="Georgia" pitchFamily="34" charset="0"/>
+                <a:ea typeface="Georgia" pitchFamily="34" charset="-122"/>
+                <a:cs typeface="Georgia" pitchFamily="34" charset="-120"/>
+              </a:rPr>
+              <a:t>gate flags six documents</a:t>
             </a:r>
             <a:endParaRPr lang="en-US" sz="3600" dirty="0"/>
           </a:p>
@@ -16549,7 +16857,7 @@
                 <a:ea typeface="Arial" pitchFamily="34" charset="-122"/>
                 <a:cs typeface="Arial" pitchFamily="34" charset="-120"/>
               </a:rPr>
-              <a:t>A team asked its agent to add OAuth login</a:t>
+              <a:t>The product vision walks one change, adding OAuth login, through the alignment check</a:t>
             </a:r>
             <a:endParaRPr lang="en-US" sz="1800" dirty="0"/>
           </a:p>
@@ -16570,7 +16878,7 @@
                 <a:ea typeface="Arial" pitchFamily="34" charset="-122"/>
                 <a:cs typeface="Arial" pitchFamily="34" charset="-120"/>
               </a:rPr>
-              <a:t>The alignment check found 3 affected feature specs and 2 affected designs</a:t>
+              <a:t>Six documents need work before code: 3 specs, 2 designs, the security architecture</a:t>
             </a:r>
             <a:endParaRPr lang="en-US" sz="1800" dirty="0"/>
           </a:p>
@@ -16591,7 +16899,7 @@
                 <a:ea typeface="Arial" pitchFamily="34" charset="-122"/>
                 <a:cs typeface="Arial" pitchFamily="34" charset="-120"/>
               </a:rPr>
-              <a:t>It flagged 1 recorded decision that conflicted with the OAuth pattern</a:t>
+              <a:t>It also flags 1 conflicting decision, 4 missing stories, and 1 test plan</a:t>
             </a:r>
             <a:endParaRPr lang="en-US" sz="1800" dirty="0"/>
           </a:p>
@@ -16612,7 +16920,7 @@
                 <a:ea typeface="Arial" pitchFamily="34" charset="-122"/>
                 <a:cs typeface="Arial" pitchFamily="34" charset="-120"/>
               </a:rPr>
-              <a:t>It listed 4 missing user stories and 1 test plan to revise</a:t>
+              <a:t>The plan comes back in authority order: architecture first, then specs, stories, designs</a:t>
             </a:r>
             <a:endParaRPr lang="en-US" sz="1800" dirty="0"/>
           </a:p>
@@ -16626,8 +16934,8 @@
         </p:nvSpPr>
         <p:spPr>
           <a:xfrm>
-            <a:off x="5285613" y="1965960"/>
-            <a:ext cx="1383621" cy="3840480"/>
+            <a:off x="5285613" y="2279485"/>
+            <a:ext cx="1383621" cy="3213429"/>
           </a:xfrm>
           <a:prstGeom prst="roundRect">
             <a:avLst>
@@ -16653,7 +16961,7 @@
         </p:nvSpPr>
         <p:spPr>
           <a:xfrm>
-            <a:off x="5666109" y="2423160"/>
+            <a:off x="5666109" y="2736685"/>
             <a:ext cx="622629" cy="622629"/>
           </a:xfrm>
           <a:prstGeom prst="ellipse">
@@ -16686,7 +16994,7 @@
         </p:blipFill>
         <p:spPr>
           <a:xfrm>
-            <a:off x="5790635" y="2547686"/>
+            <a:off x="5790635" y="2861211"/>
             <a:ext cx="373578" cy="373578"/>
           </a:xfrm>
           <a:prstGeom prst="rect">
@@ -16702,8 +17010,49 @@
         </p:nvSpPr>
         <p:spPr>
           <a:xfrm>
-            <a:off x="5358765" y="3274389"/>
-            <a:ext cx="1237317" cy="457200"/>
+            <a:off x="5358765" y="3587915"/>
+            <a:ext cx="1237317" cy="594360"/>
+          </a:xfrm>
+          <a:prstGeom prst="rect">
+            <a:avLst/>
+          </a:prstGeom>
+          <a:noFill/>
+          <a:ln/>
+        </p:spPr>
+        <p:txBody>
+          <a:bodyPr wrap="square" lIns="0" tIns="0" rIns="0" bIns="0" rtlCol="0" anchor="ctr">
+            <a:normAutofit/>
+          </a:bodyPr>
+          <a:lstStyle/>
+          <a:p>
+            <a:pPr algn="ctr" indent="0" marL="0">
+              <a:buNone/>
+            </a:pPr>
+            <a:r>
+              <a:rPr lang="en-US" sz="3600" b="1" dirty="0">
+                <a:solidFill>
+                  <a:srgbClr val="3B6BA8"/>
+                </a:solidFill>
+                <a:latin typeface="Georgia" pitchFamily="34" charset="0"/>
+                <a:ea typeface="Georgia" pitchFamily="34" charset="-122"/>
+                <a:cs typeface="Georgia" pitchFamily="34" charset="-120"/>
+              </a:rPr>
+              <a:t>3</a:t>
+            </a:r>
+            <a:endParaRPr lang="en-US" sz="3600" dirty="0"/>
+          </a:p>
+        </p:txBody>
+      </p:sp>
+      <p:sp>
+        <p:nvSpPr>
+          <p:cNvPr id="13" name="Text 9"/>
+          <p:cNvSpPr txBox="1"/>
+          <p:nvPr/>
+        </p:nvSpPr>
+        <p:spPr>
+          <a:xfrm>
+            <a:off x="5358765" y="4182275"/>
+            <a:ext cx="1237317" cy="365760"/>
           </a:xfrm>
           <a:prstGeom prst="rect">
             <a:avLst/>
@@ -16721,7 +17070,7 @@
               <a:buNone/>
             </a:pPr>
             <a:r>
-              <a:rPr lang="en-US" sz="1600" b="1" dirty="0">
+              <a:rPr lang="en-US" sz="1400" b="1" dirty="0">
                 <a:solidFill>
                   <a:srgbClr val="1F2933"/>
                 </a:solidFill>
@@ -16729,22 +17078,22 @@
                 <a:ea typeface="Arial" pitchFamily="34" charset="-122"/>
                 <a:cs typeface="Arial" pitchFamily="34" charset="-120"/>
               </a:rPr>
-              <a:t>3 specs</a:t>
-            </a:r>
-            <a:endParaRPr lang="en-US" sz="1600" dirty="0"/>
-          </a:p>
-        </p:txBody>
-      </p:sp>
-      <p:sp>
-        <p:nvSpPr>
-          <p:cNvPr id="13" name="Text 9"/>
+              <a:t>specs</a:t>
+            </a:r>
+            <a:endParaRPr lang="en-US" sz="1400" dirty="0"/>
+          </a:p>
+        </p:txBody>
+      </p:sp>
+      <p:sp>
+        <p:nvSpPr>
+          <p:cNvPr id="14" name="Text 10"/>
           <p:cNvSpPr txBox="1"/>
           <p:nvPr/>
         </p:nvSpPr>
         <p:spPr>
           <a:xfrm>
-            <a:off x="5422773" y="3777309"/>
-            <a:ext cx="1109301" cy="1846251"/>
+            <a:off x="5422773" y="4639475"/>
+            <a:ext cx="1109301" cy="487680"/>
           </a:xfrm>
           <a:prstGeom prst="rect">
             <a:avLst/>
@@ -16778,14 +17127,14 @@
       </p:sp>
       <p:sp>
         <p:nvSpPr>
-          <p:cNvPr id="14" name="Shape 10"/>
+          <p:cNvPr id="15" name="Shape 11"/>
           <p:cNvSpPr/>
           <p:nvPr/>
         </p:nvSpPr>
         <p:spPr>
           <a:xfrm>
-            <a:off x="6943554" y="1965960"/>
-            <a:ext cx="1383621" cy="3840480"/>
+            <a:off x="6943554" y="2279485"/>
+            <a:ext cx="1383621" cy="3213429"/>
           </a:xfrm>
           <a:prstGeom prst="roundRect">
             <a:avLst>
@@ -16805,24 +17154,24 @@
       </p:sp>
       <p:sp>
         <p:nvSpPr>
-          <p:cNvPr id="15" name="Shape 11"/>
+          <p:cNvPr id="16" name="Shape 12"/>
           <p:cNvSpPr/>
           <p:nvPr/>
         </p:nvSpPr>
         <p:spPr>
           <a:xfrm>
-            <a:off x="7324049" y="2423160"/>
+            <a:off x="7324049" y="2736685"/>
             <a:ext cx="622629" cy="622629"/>
           </a:xfrm>
           <a:prstGeom prst="ellipse">
             <a:avLst/>
           </a:prstGeom>
           <a:solidFill>
-            <a:srgbClr val="6842A8"/>
+            <a:srgbClr val="3B6BA8"/>
           </a:solidFill>
           <a:ln w="12700">
             <a:solidFill>
-              <a:srgbClr val="6842A8"/>
+              <a:srgbClr val="3B6BA8"/>
             </a:solidFill>
             <a:prstDash val="solid"/>
           </a:ln>
@@ -16830,7 +17179,7 @@
       </p:sp>
       <p:pic>
         <p:nvPicPr>
-          <p:cNvPr id="16" name="Image 1" descr="preencoded.png">    </p:cNvPr>
+          <p:cNvPr id="17" name="Image 1" descr="preencoded.png">    </p:cNvPr>
           <p:cNvPicPr>
             <a:picLocks noChangeAspect="1"/>
           </p:cNvPicPr>
@@ -16844,7 +17193,7 @@
         </p:blipFill>
         <p:spPr>
           <a:xfrm>
-            <a:off x="7448575" y="2547686"/>
+            <a:off x="7448575" y="2861211"/>
             <a:ext cx="373578" cy="373578"/>
           </a:xfrm>
           <a:prstGeom prst="rect">
@@ -16854,14 +17203,55 @@
       </p:pic>
       <p:sp>
         <p:nvSpPr>
-          <p:cNvPr id="17" name="Text 12"/>
+          <p:cNvPr id="18" name="Text 13"/>
           <p:cNvSpPr txBox="1"/>
           <p:nvPr/>
         </p:nvSpPr>
         <p:spPr>
           <a:xfrm>
-            <a:off x="7016706" y="3274389"/>
-            <a:ext cx="1237317" cy="457200"/>
+            <a:off x="7016706" y="3587915"/>
+            <a:ext cx="1237317" cy="594360"/>
+          </a:xfrm>
+          <a:prstGeom prst="rect">
+            <a:avLst/>
+          </a:prstGeom>
+          <a:noFill/>
+          <a:ln/>
+        </p:spPr>
+        <p:txBody>
+          <a:bodyPr wrap="square" lIns="0" tIns="0" rIns="0" bIns="0" rtlCol="0" anchor="ctr">
+            <a:normAutofit/>
+          </a:bodyPr>
+          <a:lstStyle/>
+          <a:p>
+            <a:pPr algn="ctr" indent="0" marL="0">
+              <a:buNone/>
+            </a:pPr>
+            <a:r>
+              <a:rPr lang="en-US" sz="3600" b="1" dirty="0">
+                <a:solidFill>
+                  <a:srgbClr val="3B6BA8"/>
+                </a:solidFill>
+                <a:latin typeface="Georgia" pitchFamily="34" charset="0"/>
+                <a:ea typeface="Georgia" pitchFamily="34" charset="-122"/>
+                <a:cs typeface="Georgia" pitchFamily="34" charset="-120"/>
+              </a:rPr>
+              <a:t>2</a:t>
+            </a:r>
+            <a:endParaRPr lang="en-US" sz="3600" dirty="0"/>
+          </a:p>
+        </p:txBody>
+      </p:sp>
+      <p:sp>
+        <p:nvSpPr>
+          <p:cNvPr id="19" name="Text 14"/>
+          <p:cNvSpPr txBox="1"/>
+          <p:nvPr/>
+        </p:nvSpPr>
+        <p:spPr>
+          <a:xfrm>
+            <a:off x="7016706" y="4182275"/>
+            <a:ext cx="1237317" cy="365760"/>
           </a:xfrm>
           <a:prstGeom prst="rect">
             <a:avLst/>
@@ -16879,7 +17269,7 @@
               <a:buNone/>
             </a:pPr>
             <a:r>
-              <a:rPr lang="en-US" sz="1600" b="1" dirty="0">
+              <a:rPr lang="en-US" sz="1400" b="1" dirty="0">
                 <a:solidFill>
                   <a:srgbClr val="1F2933"/>
                 </a:solidFill>
@@ -16887,22 +17277,221 @@
                 <a:ea typeface="Arial" pitchFamily="34" charset="-122"/>
                 <a:cs typeface="Arial" pitchFamily="34" charset="-120"/>
               </a:rPr>
-              <a:t>1 decision</a:t>
-            </a:r>
-            <a:endParaRPr lang="en-US" sz="1600" dirty="0"/>
-          </a:p>
-        </p:txBody>
-      </p:sp>
-      <p:sp>
-        <p:nvSpPr>
-          <p:cNvPr id="18" name="Text 13"/>
+              <a:t>designs</a:t>
+            </a:r>
+            <a:endParaRPr lang="en-US" sz="1400" dirty="0"/>
+          </a:p>
+        </p:txBody>
+      </p:sp>
+      <p:sp>
+        <p:nvSpPr>
+          <p:cNvPr id="20" name="Text 15"/>
           <p:cNvSpPr txBox="1"/>
           <p:nvPr/>
         </p:nvSpPr>
         <p:spPr>
           <a:xfrm>
-            <a:off x="7080714" y="3777309"/>
-            <a:ext cx="1109301" cy="1846251"/>
+            <a:off x="7080714" y="4639475"/>
+            <a:ext cx="1109301" cy="487680"/>
+          </a:xfrm>
+          <a:prstGeom prst="rect">
+            <a:avLst/>
+          </a:prstGeom>
+          <a:noFill/>
+          <a:ln/>
+        </p:spPr>
+        <p:txBody>
+          <a:bodyPr wrap="square" lIns="0" tIns="0" rIns="0" bIns="0" rtlCol="0" anchor="t">
+            <a:normAutofit/>
+          </a:bodyPr>
+          <a:lstStyle/>
+          <a:p>
+            <a:pPr algn="ctr" indent="0" marL="0">
+              <a:buNone/>
+            </a:pPr>
+            <a:r>
+              <a:rPr lang="en-US" sz="1300" dirty="0">
+                <a:solidFill>
+                  <a:srgbClr val="55606D"/>
+                </a:solidFill>
+                <a:latin typeface="Arial" pitchFamily="34" charset="0"/>
+                <a:ea typeface="Arial" pitchFamily="34" charset="-122"/>
+                <a:cs typeface="Arial" pitchFamily="34" charset="-120"/>
+              </a:rPr>
+              <a:t>affected by the change</a:t>
+            </a:r>
+            <a:endParaRPr lang="en-US" sz="1300" dirty="0"/>
+          </a:p>
+        </p:txBody>
+      </p:sp>
+      <p:sp>
+        <p:nvSpPr>
+          <p:cNvPr id="21" name="Shape 16"/>
+          <p:cNvSpPr/>
+          <p:nvPr/>
+        </p:nvSpPr>
+        <p:spPr>
+          <a:xfrm>
+            <a:off x="8601494" y="2279485"/>
+            <a:ext cx="1383621" cy="3213429"/>
+          </a:xfrm>
+          <a:prstGeom prst="roundRect">
+            <a:avLst>
+              <a:gd name="adj" fmla="val 6609"/>
+            </a:avLst>
+          </a:prstGeom>
+          <a:solidFill>
+            <a:srgbClr val="F3F5F8"/>
+          </a:solidFill>
+          <a:ln w="9525">
+            <a:solidFill>
+              <a:srgbClr val="D6DCE4"/>
+            </a:solidFill>
+            <a:prstDash val="solid"/>
+          </a:ln>
+        </p:spPr>
+      </p:sp>
+      <p:sp>
+        <p:nvSpPr>
+          <p:cNvPr id="22" name="Shape 17"/>
+          <p:cNvSpPr/>
+          <p:nvPr/>
+        </p:nvSpPr>
+        <p:spPr>
+          <a:xfrm>
+            <a:off x="8981990" y="2736685"/>
+            <a:ext cx="622629" cy="622629"/>
+          </a:xfrm>
+          <a:prstGeom prst="ellipse">
+            <a:avLst/>
+          </a:prstGeom>
+          <a:solidFill>
+            <a:srgbClr val="3B6BA8"/>
+          </a:solidFill>
+          <a:ln w="12700">
+            <a:solidFill>
+              <a:srgbClr val="3B6BA8"/>
+            </a:solidFill>
+            <a:prstDash val="solid"/>
+          </a:ln>
+        </p:spPr>
+      </p:sp>
+      <p:pic>
+        <p:nvPicPr>
+          <p:cNvPr id="23" name="Image 2" descr="preencoded.png">    </p:cNvPr>
+          <p:cNvPicPr>
+            <a:picLocks noChangeAspect="1"/>
+          </p:cNvPicPr>
+          <p:nvPr/>
+        </p:nvPicPr>
+        <p:blipFill>
+          <a:blip r:embed="rId3"/>
+          <a:stretch>
+            <a:fillRect/>
+          </a:stretch>
+        </p:blipFill>
+        <p:spPr>
+          <a:xfrm>
+            <a:off x="9106516" y="2861211"/>
+            <a:ext cx="373578" cy="373578"/>
+          </a:xfrm>
+          <a:prstGeom prst="rect">
+            <a:avLst/>
+          </a:prstGeom>
+        </p:spPr>
+      </p:pic>
+      <p:sp>
+        <p:nvSpPr>
+          <p:cNvPr id="24" name="Text 18"/>
+          <p:cNvSpPr txBox="1"/>
+          <p:nvPr/>
+        </p:nvSpPr>
+        <p:spPr>
+          <a:xfrm>
+            <a:off x="8674646" y="3587915"/>
+            <a:ext cx="1237317" cy="594360"/>
+          </a:xfrm>
+          <a:prstGeom prst="rect">
+            <a:avLst/>
+          </a:prstGeom>
+          <a:noFill/>
+          <a:ln/>
+        </p:spPr>
+        <p:txBody>
+          <a:bodyPr wrap="square" lIns="0" tIns="0" rIns="0" bIns="0" rtlCol="0" anchor="ctr">
+            <a:normAutofit/>
+          </a:bodyPr>
+          <a:lstStyle/>
+          <a:p>
+            <a:pPr algn="ctr" indent="0" marL="0">
+              <a:buNone/>
+            </a:pPr>
+            <a:r>
+              <a:rPr lang="en-US" sz="3600" b="1" dirty="0">
+                <a:solidFill>
+                  <a:srgbClr val="3B6BA8"/>
+                </a:solidFill>
+                <a:latin typeface="Georgia" pitchFamily="34" charset="0"/>
+                <a:ea typeface="Georgia" pitchFamily="34" charset="-122"/>
+                <a:cs typeface="Georgia" pitchFamily="34" charset="-120"/>
+              </a:rPr>
+              <a:t>1</a:t>
+            </a:r>
+            <a:endParaRPr lang="en-US" sz="3600" dirty="0"/>
+          </a:p>
+        </p:txBody>
+      </p:sp>
+      <p:sp>
+        <p:nvSpPr>
+          <p:cNvPr id="25" name="Text 19"/>
+          <p:cNvSpPr txBox="1"/>
+          <p:nvPr/>
+        </p:nvSpPr>
+        <p:spPr>
+          <a:xfrm>
+            <a:off x="8674646" y="4182275"/>
+            <a:ext cx="1237317" cy="365760"/>
+          </a:xfrm>
+          <a:prstGeom prst="rect">
+            <a:avLst/>
+          </a:prstGeom>
+          <a:noFill/>
+          <a:ln/>
+        </p:spPr>
+        <p:txBody>
+          <a:bodyPr wrap="square" lIns="0" tIns="0" rIns="0" bIns="0" rtlCol="0" anchor="t">
+            <a:normAutofit/>
+          </a:bodyPr>
+          <a:lstStyle/>
+          <a:p>
+            <a:pPr algn="ctr" indent="0" marL="0">
+              <a:buNone/>
+            </a:pPr>
+            <a:r>
+              <a:rPr lang="en-US" sz="1400" b="1" dirty="0">
+                <a:solidFill>
+                  <a:srgbClr val="1F2933"/>
+                </a:solidFill>
+                <a:latin typeface="Arial" pitchFamily="34" charset="0"/>
+                <a:ea typeface="Arial" pitchFamily="34" charset="-122"/>
+                <a:cs typeface="Arial" pitchFamily="34" charset="-120"/>
+              </a:rPr>
+              <a:t>decision</a:t>
+            </a:r>
+            <a:endParaRPr lang="en-US" sz="1400" dirty="0"/>
+          </a:p>
+        </p:txBody>
+      </p:sp>
+      <p:sp>
+        <p:nvSpPr>
+          <p:cNvPr id="26" name="Text 20"/>
+          <p:cNvSpPr txBox="1"/>
+          <p:nvPr/>
+        </p:nvSpPr>
+        <p:spPr>
+          <a:xfrm>
+            <a:off x="8738654" y="4639475"/>
+            <a:ext cx="1109301" cy="487680"/>
           </a:xfrm>
           <a:prstGeom prst="rect">
             <a:avLst/>
@@ -16936,14 +17525,14 @@
       </p:sp>
       <p:sp>
         <p:nvSpPr>
-          <p:cNvPr id="19" name="Shape 14"/>
+          <p:cNvPr id="27" name="Shape 21"/>
           <p:cNvSpPr/>
           <p:nvPr/>
         </p:nvSpPr>
         <p:spPr>
           <a:xfrm>
-            <a:off x="8601494" y="1965960"/>
-            <a:ext cx="1383621" cy="3840480"/>
+            <a:off x="10259435" y="2279485"/>
+            <a:ext cx="1383621" cy="3213429"/>
           </a:xfrm>
           <a:prstGeom prst="roundRect">
             <a:avLst>
@@ -16963,24 +17552,24 @@
       </p:sp>
       <p:sp>
         <p:nvSpPr>
-          <p:cNvPr id="20" name="Shape 15"/>
+          <p:cNvPr id="28" name="Shape 22"/>
           <p:cNvSpPr/>
           <p:nvPr/>
         </p:nvSpPr>
         <p:spPr>
           <a:xfrm>
-            <a:off x="8981990" y="2423160"/>
+            <a:off x="10639930" y="2736685"/>
             <a:ext cx="622629" cy="622629"/>
           </a:xfrm>
           <a:prstGeom prst="ellipse">
             <a:avLst/>
           </a:prstGeom>
           <a:solidFill>
-            <a:srgbClr val="C44B2F"/>
+            <a:srgbClr val="3B6BA8"/>
           </a:solidFill>
           <a:ln w="12700">
             <a:solidFill>
-              <a:srgbClr val="C44B2F"/>
+              <a:srgbClr val="3B6BA8"/>
             </a:solidFill>
             <a:prstDash val="solid"/>
           </a:ln>
@@ -16988,21 +17577,21 @@
       </p:sp>
       <p:pic>
         <p:nvPicPr>
-          <p:cNvPr id="21" name="Image 2" descr="preencoded.png">    </p:cNvPr>
+          <p:cNvPr id="29" name="Image 3" descr="preencoded.png">    </p:cNvPr>
           <p:cNvPicPr>
             <a:picLocks noChangeAspect="1"/>
           </p:cNvPicPr>
           <p:nvPr/>
         </p:nvPicPr>
         <p:blipFill>
-          <a:blip r:embed="rId3"/>
+          <a:blip r:embed="rId4"/>
           <a:stretch>
             <a:fillRect/>
           </a:stretch>
         </p:blipFill>
         <p:spPr>
           <a:xfrm>
-            <a:off x="9106516" y="2547686"/>
+            <a:off x="10764456" y="2861211"/>
             <a:ext cx="373578" cy="373578"/>
           </a:xfrm>
           <a:prstGeom prst="rect">
@@ -17012,14 +17601,55 @@
       </p:pic>
       <p:sp>
         <p:nvSpPr>
-          <p:cNvPr id="22" name="Text 16"/>
+          <p:cNvPr id="30" name="Text 23"/>
           <p:cNvSpPr txBox="1"/>
           <p:nvPr/>
         </p:nvSpPr>
         <p:spPr>
           <a:xfrm>
-            <a:off x="8674646" y="3274389"/>
-            <a:ext cx="1237317" cy="457200"/>
+            <a:off x="10332587" y="3587915"/>
+            <a:ext cx="1237317" cy="594360"/>
+          </a:xfrm>
+          <a:prstGeom prst="rect">
+            <a:avLst/>
+          </a:prstGeom>
+          <a:noFill/>
+          <a:ln/>
+        </p:spPr>
+        <p:txBody>
+          <a:bodyPr wrap="square" lIns="0" tIns="0" rIns="0" bIns="0" rtlCol="0" anchor="ctr">
+            <a:normAutofit/>
+          </a:bodyPr>
+          <a:lstStyle/>
+          <a:p>
+            <a:pPr algn="ctr" indent="0" marL="0">
+              <a:buNone/>
+            </a:pPr>
+            <a:r>
+              <a:rPr lang="en-US" sz="3600" b="1" dirty="0">
+                <a:solidFill>
+                  <a:srgbClr val="3B6BA8"/>
+                </a:solidFill>
+                <a:latin typeface="Georgia" pitchFamily="34" charset="0"/>
+                <a:ea typeface="Georgia" pitchFamily="34" charset="-122"/>
+                <a:cs typeface="Georgia" pitchFamily="34" charset="-120"/>
+              </a:rPr>
+              <a:t>4</a:t>
+            </a:r>
+            <a:endParaRPr lang="en-US" sz="3600" dirty="0"/>
+          </a:p>
+        </p:txBody>
+      </p:sp>
+      <p:sp>
+        <p:nvSpPr>
+          <p:cNvPr id="31" name="Text 24"/>
+          <p:cNvSpPr txBox="1"/>
+          <p:nvPr/>
+        </p:nvSpPr>
+        <p:spPr>
+          <a:xfrm>
+            <a:off x="10332587" y="4182275"/>
+            <a:ext cx="1237317" cy="365760"/>
           </a:xfrm>
           <a:prstGeom prst="rect">
             <a:avLst/>
@@ -17037,7 +17667,7 @@
               <a:buNone/>
             </a:pPr>
             <a:r>
-              <a:rPr lang="en-US" sz="1600" b="1" dirty="0">
+              <a:rPr lang="en-US" sz="1400" b="1" dirty="0">
                 <a:solidFill>
                   <a:srgbClr val="1F2933"/>
                 </a:solidFill>
@@ -17045,22 +17675,22 @@
                 <a:ea typeface="Arial" pitchFamily="34" charset="-122"/>
                 <a:cs typeface="Arial" pitchFamily="34" charset="-120"/>
               </a:rPr>
-              <a:t>4 stories</a:t>
-            </a:r>
-            <a:endParaRPr lang="en-US" sz="1600" dirty="0"/>
-          </a:p>
-        </p:txBody>
-      </p:sp>
-      <p:sp>
-        <p:nvSpPr>
-          <p:cNvPr id="23" name="Text 17"/>
+              <a:t>stories</a:t>
+            </a:r>
+            <a:endParaRPr lang="en-US" sz="1400" dirty="0"/>
+          </a:p>
+        </p:txBody>
+      </p:sp>
+      <p:sp>
+        <p:nvSpPr>
+          <p:cNvPr id="32" name="Text 25"/>
           <p:cNvSpPr txBox="1"/>
           <p:nvPr/>
         </p:nvSpPr>
         <p:spPr>
           <a:xfrm>
-            <a:off x="8738654" y="3777309"/>
-            <a:ext cx="1109301" cy="1846251"/>
+            <a:off x="10396595" y="4639475"/>
+            <a:ext cx="1109301" cy="487680"/>
           </a:xfrm>
           <a:prstGeom prst="rect">
             <a:avLst/>
@@ -17087,164 +17717,6 @@
                 <a:cs typeface="Arial" pitchFamily="34" charset="-120"/>
               </a:rPr>
               <a:t>missing and now listed</a:t>
-            </a:r>
-            <a:endParaRPr lang="en-US" sz="1300" dirty="0"/>
-          </a:p>
-        </p:txBody>
-      </p:sp>
-      <p:sp>
-        <p:nvSpPr>
-          <p:cNvPr id="24" name="Shape 18"/>
-          <p:cNvSpPr/>
-          <p:nvPr/>
-        </p:nvSpPr>
-        <p:spPr>
-          <a:xfrm>
-            <a:off x="10259435" y="1965960"/>
-            <a:ext cx="1383621" cy="3840480"/>
-          </a:xfrm>
-          <a:prstGeom prst="roundRect">
-            <a:avLst>
-              <a:gd name="adj" fmla="val 6609"/>
-            </a:avLst>
-          </a:prstGeom>
-          <a:solidFill>
-            <a:srgbClr val="F3F5F8"/>
-          </a:solidFill>
-          <a:ln w="9525">
-            <a:solidFill>
-              <a:srgbClr val="D6DCE4"/>
-            </a:solidFill>
-            <a:prstDash val="solid"/>
-          </a:ln>
-        </p:spPr>
-      </p:sp>
-      <p:sp>
-        <p:nvSpPr>
-          <p:cNvPr id="25" name="Shape 19"/>
-          <p:cNvSpPr/>
-          <p:nvPr/>
-        </p:nvSpPr>
-        <p:spPr>
-          <a:xfrm>
-            <a:off x="10639930" y="2423160"/>
-            <a:ext cx="622629" cy="622629"/>
-          </a:xfrm>
-          <a:prstGeom prst="ellipse">
-            <a:avLst/>
-          </a:prstGeom>
-          <a:solidFill>
-            <a:srgbClr val="3B6BA8"/>
-          </a:solidFill>
-          <a:ln w="12700">
-            <a:solidFill>
-              <a:srgbClr val="3B6BA8"/>
-            </a:solidFill>
-            <a:prstDash val="solid"/>
-          </a:ln>
-        </p:spPr>
-      </p:sp>
-      <p:pic>
-        <p:nvPicPr>
-          <p:cNvPr id="26" name="Image 3" descr="preencoded.png">    </p:cNvPr>
-          <p:cNvPicPr>
-            <a:picLocks noChangeAspect="1"/>
-          </p:cNvPicPr>
-          <p:nvPr/>
-        </p:nvPicPr>
-        <p:blipFill>
-          <a:blip r:embed="rId4"/>
-          <a:stretch>
-            <a:fillRect/>
-          </a:stretch>
-        </p:blipFill>
-        <p:spPr>
-          <a:xfrm>
-            <a:off x="10764456" y="2547686"/>
-            <a:ext cx="373578" cy="373578"/>
-          </a:xfrm>
-          <a:prstGeom prst="rect">
-            <a:avLst/>
-          </a:prstGeom>
-        </p:spPr>
-      </p:pic>
-      <p:sp>
-        <p:nvSpPr>
-          <p:cNvPr id="27" name="Text 20"/>
-          <p:cNvSpPr txBox="1"/>
-          <p:nvPr/>
-        </p:nvSpPr>
-        <p:spPr>
-          <a:xfrm>
-            <a:off x="10332587" y="3274389"/>
-            <a:ext cx="1237317" cy="457200"/>
-          </a:xfrm>
-          <a:prstGeom prst="rect">
-            <a:avLst/>
-          </a:prstGeom>
-          <a:noFill/>
-          <a:ln/>
-        </p:spPr>
-        <p:txBody>
-          <a:bodyPr wrap="square" lIns="0" tIns="0" rIns="0" bIns="0" rtlCol="0" anchor="t">
-            <a:normAutofit/>
-          </a:bodyPr>
-          <a:lstStyle/>
-          <a:p>
-            <a:pPr algn="ctr" indent="0" marL="0">
-              <a:buNone/>
-            </a:pPr>
-            <a:r>
-              <a:rPr lang="en-US" sz="1400" b="1" dirty="0">
-                <a:solidFill>
-                  <a:srgbClr val="1F2933"/>
-                </a:solidFill>
-                <a:latin typeface="Arial" pitchFamily="34" charset="0"/>
-                <a:ea typeface="Arial" pitchFamily="34" charset="-122"/>
-                <a:cs typeface="Arial" pitchFamily="34" charset="-120"/>
-              </a:rPr>
-              <a:t>1 test plan</a:t>
-            </a:r>
-            <a:endParaRPr lang="en-US" sz="1400" dirty="0"/>
-          </a:p>
-        </p:txBody>
-      </p:sp>
-      <p:sp>
-        <p:nvSpPr>
-          <p:cNvPr id="28" name="Text 21"/>
-          <p:cNvSpPr txBox="1"/>
-          <p:nvPr/>
-        </p:nvSpPr>
-        <p:spPr>
-          <a:xfrm>
-            <a:off x="10396595" y="3777309"/>
-            <a:ext cx="1109301" cy="1846251"/>
-          </a:xfrm>
-          <a:prstGeom prst="rect">
-            <a:avLst/>
-          </a:prstGeom>
-          <a:noFill/>
-          <a:ln/>
-        </p:spPr>
-        <p:txBody>
-          <a:bodyPr wrap="square" lIns="0" tIns="0" rIns="0" bIns="0" rtlCol="0" anchor="t">
-            <a:normAutofit/>
-          </a:bodyPr>
-          <a:lstStyle/>
-          <a:p>
-            <a:pPr algn="ctr" indent="0" marL="0">
-              <a:buNone/>
-            </a:pPr>
-            <a:r>
-              <a:rPr lang="en-US" sz="1300" dirty="0">
-                <a:solidFill>
-                  <a:srgbClr val="55606D"/>
-                </a:solidFill>
-                <a:latin typeface="Arial" pitchFamily="34" charset="0"/>
-                <a:ea typeface="Arial" pitchFamily="34" charset="-122"/>
-                <a:cs typeface="Arial" pitchFamily="34" charset="-120"/>
-              </a:rPr>
-              <a:t>to revise first</a:t>
             </a:r>
             <a:endParaRPr lang="en-US" sz="1300" dirty="0"/>
           </a:p>
